--- a/Power BI Report/Background/Dashboard Layout.pptx
+++ b/Power BI Report/Background/Dashboard Layout.pptx
@@ -9,6 +9,8 @@
     <p:sldId id="257" r:id="rId3"/>
     <p:sldId id="256" r:id="rId4"/>
     <p:sldId id="259" r:id="rId5"/>
+    <p:sldId id="260" r:id="rId6"/>
+    <p:sldId id="261" r:id="rId7"/>
   </p:sldIdLst>
   <p:sldSz cx="17373600" cy="9144000"/>
   <p:notesSz cx="6858000" cy="9144000"/>
@@ -246,7 +248,7 @@
           <a:p>
             <a:fld id="{7A2C6692-EA0D-4861-862E-DDC209ABBD47}" type="datetimeFigureOut">
               <a:rPr lang="en-US" smtClean="0"/>
-              <a:t>11/5/2025</a:t>
+              <a:t>12/4/2025</a:t>
             </a:fld>
             <a:endParaRPr lang="en-US"/>
           </a:p>
@@ -416,7 +418,7 @@
           <a:p>
             <a:fld id="{7A2C6692-EA0D-4861-862E-DDC209ABBD47}" type="datetimeFigureOut">
               <a:rPr lang="en-US" smtClean="0"/>
-              <a:t>11/5/2025</a:t>
+              <a:t>12/4/2025</a:t>
             </a:fld>
             <a:endParaRPr lang="en-US"/>
           </a:p>
@@ -596,7 +598,7 @@
           <a:p>
             <a:fld id="{7A2C6692-EA0D-4861-862E-DDC209ABBD47}" type="datetimeFigureOut">
               <a:rPr lang="en-US" smtClean="0"/>
-              <a:t>11/5/2025</a:t>
+              <a:t>12/4/2025</a:t>
             </a:fld>
             <a:endParaRPr lang="en-US"/>
           </a:p>
@@ -766,7 +768,7 @@
           <a:p>
             <a:fld id="{7A2C6692-EA0D-4861-862E-DDC209ABBD47}" type="datetimeFigureOut">
               <a:rPr lang="en-US" smtClean="0"/>
-              <a:t>11/5/2025</a:t>
+              <a:t>12/4/2025</a:t>
             </a:fld>
             <a:endParaRPr lang="en-US"/>
           </a:p>
@@ -1012,7 +1014,7 @@
           <a:p>
             <a:fld id="{7A2C6692-EA0D-4861-862E-DDC209ABBD47}" type="datetimeFigureOut">
               <a:rPr lang="en-US" smtClean="0"/>
-              <a:t>11/5/2025</a:t>
+              <a:t>12/4/2025</a:t>
             </a:fld>
             <a:endParaRPr lang="en-US"/>
           </a:p>
@@ -1244,7 +1246,7 @@
           <a:p>
             <a:fld id="{7A2C6692-EA0D-4861-862E-DDC209ABBD47}" type="datetimeFigureOut">
               <a:rPr lang="en-US" smtClean="0"/>
-              <a:t>11/5/2025</a:t>
+              <a:t>12/4/2025</a:t>
             </a:fld>
             <a:endParaRPr lang="en-US"/>
           </a:p>
@@ -1611,7 +1613,7 @@
           <a:p>
             <a:fld id="{7A2C6692-EA0D-4861-862E-DDC209ABBD47}" type="datetimeFigureOut">
               <a:rPr lang="en-US" smtClean="0"/>
-              <a:t>11/5/2025</a:t>
+              <a:t>12/4/2025</a:t>
             </a:fld>
             <a:endParaRPr lang="en-US"/>
           </a:p>
@@ -1729,7 +1731,7 @@
           <a:p>
             <a:fld id="{7A2C6692-EA0D-4861-862E-DDC209ABBD47}" type="datetimeFigureOut">
               <a:rPr lang="en-US" smtClean="0"/>
-              <a:t>11/5/2025</a:t>
+              <a:t>12/4/2025</a:t>
             </a:fld>
             <a:endParaRPr lang="en-US"/>
           </a:p>
@@ -1824,7 +1826,7 @@
           <a:p>
             <a:fld id="{7A2C6692-EA0D-4861-862E-DDC209ABBD47}" type="datetimeFigureOut">
               <a:rPr lang="en-US" smtClean="0"/>
-              <a:t>11/5/2025</a:t>
+              <a:t>12/4/2025</a:t>
             </a:fld>
             <a:endParaRPr lang="en-US"/>
           </a:p>
@@ -2101,7 +2103,7 @@
           <a:p>
             <a:fld id="{7A2C6692-EA0D-4861-862E-DDC209ABBD47}" type="datetimeFigureOut">
               <a:rPr lang="en-US" smtClean="0"/>
-              <a:t>11/5/2025</a:t>
+              <a:t>12/4/2025</a:t>
             </a:fld>
             <a:endParaRPr lang="en-US"/>
           </a:p>
@@ -2358,7 +2360,7 @@
           <a:p>
             <a:fld id="{7A2C6692-EA0D-4861-862E-DDC209ABBD47}" type="datetimeFigureOut">
               <a:rPr lang="en-US" smtClean="0"/>
-              <a:t>11/5/2025</a:t>
+              <a:t>12/4/2025</a:t>
             </a:fld>
             <a:endParaRPr lang="en-US"/>
           </a:p>
@@ -2571,7 +2573,7 @@
           <a:p>
             <a:fld id="{7A2C6692-EA0D-4861-862E-DDC209ABBD47}" type="datetimeFigureOut">
               <a:rPr lang="en-US" smtClean="0"/>
-              <a:t>11/5/2025</a:t>
+              <a:t>12/4/2025</a:t>
             </a:fld>
             <a:endParaRPr lang="en-US"/>
           </a:p>
@@ -3740,7 +3742,7 @@
           </a:xfrm>
           <a:prstGeom prst="round2SameRect">
             <a:avLst>
-              <a:gd name="adj1" fmla="val 15107"/>
+              <a:gd name="adj1" fmla="val 0"/>
               <a:gd name="adj2" fmla="val 0"/>
             </a:avLst>
           </a:prstGeom>
@@ -3772,7 +3774,11 @@
           <a:lstStyle/>
           <a:p>
             <a:pPr algn="ctr"/>
-            <a:endParaRPr lang="en-US" dirty="0"/>
+            <a:endParaRPr lang="en-US" dirty="0">
+              <a:solidFill>
+                <a:srgbClr val="C00000"/>
+              </a:solidFill>
+            </a:endParaRPr>
           </a:p>
         </p:txBody>
       </p:sp>
@@ -4549,7 +4555,7 @@
           </a:xfrm>
           <a:prstGeom prst="round2SameRect">
             <a:avLst>
-              <a:gd name="adj1" fmla="val 15107"/>
+              <a:gd name="adj1" fmla="val 0"/>
               <a:gd name="adj2" fmla="val 0"/>
             </a:avLst>
           </a:prstGeom>
@@ -5327,7 +5333,7 @@
           </a:xfrm>
           <a:prstGeom prst="round2SameRect">
             <a:avLst>
-              <a:gd name="adj1" fmla="val 15107"/>
+              <a:gd name="adj1" fmla="val 0"/>
               <a:gd name="adj2" fmla="val 0"/>
             </a:avLst>
           </a:prstGeom>
@@ -6372,7 +6378,7 @@
           </a:xfrm>
           <a:prstGeom prst="round2SameRect">
             <a:avLst>
-              <a:gd name="adj1" fmla="val 15107"/>
+              <a:gd name="adj1" fmla="val 0"/>
               <a:gd name="adj2" fmla="val 0"/>
             </a:avLst>
           </a:prstGeom>
@@ -6602,6 +6608,1902 @@
     <p:extLst>
       <p:ext uri="{BB962C8B-B14F-4D97-AF65-F5344CB8AC3E}">
         <p14:creationId xmlns:p14="http://schemas.microsoft.com/office/powerpoint/2010/main" val="3798665442"/>
+      </p:ext>
+    </p:extLst>
+  </p:cSld>
+  <p:clrMapOvr>
+    <a:masterClrMapping/>
+  </p:clrMapOvr>
+</p:sld>
+</file>
+
+<file path=ppt/slides/slide5.xml><?xml version="1.0" encoding="utf-8"?>
+<p:sld xmlns:a="http://schemas.openxmlformats.org/drawingml/2006/main" xmlns:r="http://schemas.openxmlformats.org/officeDocument/2006/relationships" xmlns:p="http://schemas.openxmlformats.org/presentationml/2006/main">
+  <p:cSld>
+    <p:spTree>
+      <p:nvGrpSpPr>
+        <p:cNvPr id="1" name="">
+          <a:extLst>
+            <a:ext uri="{FF2B5EF4-FFF2-40B4-BE49-F238E27FC236}">
+              <a16:creationId xmlns:a16="http://schemas.microsoft.com/office/drawing/2014/main" id="{C304DCDA-D3BD-7D0A-4041-914B68F60C69}"/>
+            </a:ext>
+          </a:extLst>
+        </p:cNvPr>
+        <p:cNvGrpSpPr/>
+        <p:nvPr/>
+      </p:nvGrpSpPr>
+      <p:grpSpPr>
+        <a:xfrm>
+          <a:off x="0" y="0"/>
+          <a:ext cx="0" cy="0"/>
+          <a:chOff x="0" y="0"/>
+          <a:chExt cx="0" cy="0"/>
+        </a:xfrm>
+      </p:grpSpPr>
+      <p:sp>
+        <p:nvSpPr>
+          <p:cNvPr id="11" name="Rectangle 10">
+            <a:extLst>
+              <a:ext uri="{FF2B5EF4-FFF2-40B4-BE49-F238E27FC236}">
+                <a16:creationId xmlns:a16="http://schemas.microsoft.com/office/drawing/2014/main" id="{0595BADB-6665-7378-6EA1-FD900F438170}"/>
+              </a:ext>
+            </a:extLst>
+          </p:cNvPr>
+          <p:cNvSpPr>
+            <a:spLocks noGrp="1" noRot="1" noMove="1" noResize="1" noEditPoints="1" noAdjustHandles="1" noChangeArrowheads="1" noChangeShapeType="1"/>
+          </p:cNvSpPr>
+          <p:nvPr/>
+        </p:nvSpPr>
+        <p:spPr>
+          <a:xfrm>
+            <a:off x="2694357" y="411480"/>
+            <a:ext cx="13949917" cy="816819"/>
+          </a:xfrm>
+          <a:prstGeom prst="rect">
+            <a:avLst/>
+          </a:prstGeom>
+          <a:noFill/>
+          <a:ln>
+            <a:noFill/>
+          </a:ln>
+        </p:spPr>
+        <p:style>
+          <a:lnRef idx="2">
+            <a:schemeClr val="accent1">
+              <a:shade val="15000"/>
+            </a:schemeClr>
+          </a:lnRef>
+          <a:fillRef idx="1">
+            <a:schemeClr val="accent1"/>
+          </a:fillRef>
+          <a:effectRef idx="0">
+            <a:schemeClr val="accent1"/>
+          </a:effectRef>
+          <a:fontRef idx="minor">
+            <a:schemeClr val="lt1"/>
+          </a:fontRef>
+        </p:style>
+        <p:txBody>
+          <a:bodyPr rtlCol="0" anchor="ctr"/>
+          <a:lstStyle/>
+          <a:p>
+            <a:pPr>
+              <a:lnSpc>
+                <a:spcPts val="3000"/>
+              </a:lnSpc>
+            </a:pPr>
+            <a:r>
+              <a:rPr lang="en-US" sz="3200" b="1" dirty="0">
+                <a:solidFill>
+                  <a:schemeClr val="tx1"/>
+                </a:solidFill>
+                <a:latin typeface="Segoe UI Variable Text" pitchFamily="2" charset="0"/>
+                <a:ea typeface="Segoe UI Black" panose="020B0A02040204020203" pitchFamily="34" charset="0"/>
+                <a:cs typeface="Segoe UI Semibold" panose="020B0702040204020203" pitchFamily="34" charset="0"/>
+              </a:rPr>
+              <a:t>Satisfaction Analysis</a:t>
+            </a:r>
+          </a:p>
+          <a:p>
+            <a:pPr>
+              <a:lnSpc>
+                <a:spcPts val="3000"/>
+              </a:lnSpc>
+            </a:pPr>
+            <a:r>
+              <a:rPr lang="en-US" dirty="0">
+                <a:solidFill>
+                  <a:schemeClr val="tx1"/>
+                </a:solidFill>
+                <a:latin typeface="Segoe UI Variable Display Light" pitchFamily="2" charset="0"/>
+                <a:ea typeface="Segoe UI Black" panose="020B0A02040204020203" pitchFamily="34" charset="0"/>
+                <a:cs typeface="Segoe UI Semibold" panose="020B0702040204020203" pitchFamily="34" charset="0"/>
+              </a:rPr>
+              <a:t>Analyze customer composition, churn behavior, and demographic trends across key segments.</a:t>
+            </a:r>
+          </a:p>
+        </p:txBody>
+      </p:sp>
+      <p:sp>
+        <p:nvSpPr>
+          <p:cNvPr id="14" name="Rectangle 13" hidden="1">
+            <a:extLst>
+              <a:ext uri="{FF2B5EF4-FFF2-40B4-BE49-F238E27FC236}">
+                <a16:creationId xmlns:a16="http://schemas.microsoft.com/office/drawing/2014/main" id="{ADF18C17-94E5-0027-1CE5-340B88A9A768}"/>
+              </a:ext>
+            </a:extLst>
+          </p:cNvPr>
+          <p:cNvSpPr>
+            <a:spLocks noGrp="1" noRot="1" noMove="1" noResize="1" noEditPoints="1" noAdjustHandles="1" noChangeArrowheads="1" noChangeShapeType="1"/>
+          </p:cNvSpPr>
+          <p:nvPr/>
+        </p:nvSpPr>
+        <p:spPr>
+          <a:xfrm>
+            <a:off x="217716" y="0"/>
+            <a:ext cx="417282" cy="9144000"/>
+          </a:xfrm>
+          <a:prstGeom prst="rect">
+            <a:avLst/>
+          </a:prstGeom>
+          <a:noFill/>
+          <a:ln>
+            <a:solidFill>
+              <a:schemeClr val="tx1"/>
+            </a:solidFill>
+          </a:ln>
+        </p:spPr>
+        <p:style>
+          <a:lnRef idx="2">
+            <a:schemeClr val="accent1">
+              <a:shade val="15000"/>
+            </a:schemeClr>
+          </a:lnRef>
+          <a:fillRef idx="1">
+            <a:schemeClr val="accent1"/>
+          </a:fillRef>
+          <a:effectRef idx="0">
+            <a:schemeClr val="accent1"/>
+          </a:effectRef>
+          <a:fontRef idx="minor">
+            <a:schemeClr val="lt1"/>
+          </a:fontRef>
+        </p:style>
+        <p:txBody>
+          <a:bodyPr rtlCol="0" anchor="ctr"/>
+          <a:lstStyle/>
+          <a:p>
+            <a:endParaRPr lang="en-US" sz="3200" b="1">
+              <a:solidFill>
+                <a:schemeClr val="tx1"/>
+              </a:solidFill>
+              <a:latin typeface="Segoe UI Variable Text" pitchFamily="2" charset="0"/>
+              <a:ea typeface="Segoe UI Black" panose="020B0A02040204020203" pitchFamily="34" charset="0"/>
+              <a:cs typeface="Segoe UI Semibold" panose="020B0702040204020203" pitchFamily="34" charset="0"/>
+            </a:endParaRPr>
+          </a:p>
+        </p:txBody>
+      </p:sp>
+      <p:sp>
+        <p:nvSpPr>
+          <p:cNvPr id="15" name="Rectangle 14" hidden="1">
+            <a:extLst>
+              <a:ext uri="{FF2B5EF4-FFF2-40B4-BE49-F238E27FC236}">
+                <a16:creationId xmlns:a16="http://schemas.microsoft.com/office/drawing/2014/main" id="{F1D5AE6F-9ED2-A4D2-AB52-1E5944A423A4}"/>
+              </a:ext>
+            </a:extLst>
+          </p:cNvPr>
+          <p:cNvSpPr>
+            <a:spLocks/>
+          </p:cNvSpPr>
+          <p:nvPr/>
+        </p:nvSpPr>
+        <p:spPr>
+          <a:xfrm>
+            <a:off x="16651518" y="0"/>
+            <a:ext cx="417282" cy="9144000"/>
+          </a:xfrm>
+          <a:prstGeom prst="rect">
+            <a:avLst/>
+          </a:prstGeom>
+          <a:solidFill>
+            <a:srgbClr val="C00000"/>
+          </a:solidFill>
+          <a:ln>
+            <a:solidFill>
+              <a:schemeClr val="tx1"/>
+            </a:solidFill>
+          </a:ln>
+        </p:spPr>
+        <p:style>
+          <a:lnRef idx="2">
+            <a:schemeClr val="accent1">
+              <a:shade val="15000"/>
+            </a:schemeClr>
+          </a:lnRef>
+          <a:fillRef idx="1">
+            <a:schemeClr val="accent1"/>
+          </a:fillRef>
+          <a:effectRef idx="0">
+            <a:schemeClr val="accent1"/>
+          </a:effectRef>
+          <a:fontRef idx="minor">
+            <a:schemeClr val="lt1"/>
+          </a:fontRef>
+        </p:style>
+        <p:txBody>
+          <a:bodyPr rtlCol="0" anchor="ctr"/>
+          <a:lstStyle/>
+          <a:p>
+            <a:endParaRPr lang="en-US" sz="3200" b="1">
+              <a:solidFill>
+                <a:schemeClr val="tx1"/>
+              </a:solidFill>
+              <a:latin typeface="Segoe UI Variable Text" pitchFamily="2" charset="0"/>
+              <a:ea typeface="Segoe UI Black" panose="020B0A02040204020203" pitchFamily="34" charset="0"/>
+              <a:cs typeface="Segoe UI Semibold" panose="020B0702040204020203" pitchFamily="34" charset="0"/>
+            </a:endParaRPr>
+          </a:p>
+        </p:txBody>
+      </p:sp>
+      <p:sp>
+        <p:nvSpPr>
+          <p:cNvPr id="17" name="Rectangle 16" hidden="1">
+            <a:extLst>
+              <a:ext uri="{FF2B5EF4-FFF2-40B4-BE49-F238E27FC236}">
+                <a16:creationId xmlns:a16="http://schemas.microsoft.com/office/drawing/2014/main" id="{F0603979-5BE0-FE49-2CDD-3AFBA6653788}"/>
+              </a:ext>
+            </a:extLst>
+          </p:cNvPr>
+          <p:cNvSpPr>
+            <a:spLocks/>
+          </p:cNvSpPr>
+          <p:nvPr/>
+        </p:nvSpPr>
+        <p:spPr>
+          <a:xfrm>
+            <a:off x="2269839" y="0"/>
+            <a:ext cx="417282" cy="9144000"/>
+          </a:xfrm>
+          <a:prstGeom prst="rect">
+            <a:avLst/>
+          </a:prstGeom>
+          <a:solidFill>
+            <a:srgbClr val="C00000"/>
+          </a:solidFill>
+          <a:ln>
+            <a:solidFill>
+              <a:schemeClr val="tx1"/>
+            </a:solidFill>
+          </a:ln>
+        </p:spPr>
+        <p:style>
+          <a:lnRef idx="2">
+            <a:schemeClr val="accent1">
+              <a:shade val="15000"/>
+            </a:schemeClr>
+          </a:lnRef>
+          <a:fillRef idx="1">
+            <a:schemeClr val="accent1"/>
+          </a:fillRef>
+          <a:effectRef idx="0">
+            <a:schemeClr val="accent1"/>
+          </a:effectRef>
+          <a:fontRef idx="minor">
+            <a:schemeClr val="lt1"/>
+          </a:fontRef>
+        </p:style>
+        <p:txBody>
+          <a:bodyPr rtlCol="0" anchor="ctr"/>
+          <a:lstStyle/>
+          <a:p>
+            <a:endParaRPr lang="en-US" sz="3200" b="1">
+              <a:solidFill>
+                <a:schemeClr val="tx1"/>
+              </a:solidFill>
+              <a:latin typeface="Segoe UI Variable Text" pitchFamily="2" charset="0"/>
+              <a:ea typeface="Segoe UI Black" panose="020B0A02040204020203" pitchFamily="34" charset="0"/>
+              <a:cs typeface="Segoe UI Semibold" panose="020B0702040204020203" pitchFamily="34" charset="0"/>
+            </a:endParaRPr>
+          </a:p>
+        </p:txBody>
+      </p:sp>
+      <p:sp>
+        <p:nvSpPr>
+          <p:cNvPr id="20" name="Rectangle 19" hidden="1">
+            <a:extLst>
+              <a:ext uri="{FF2B5EF4-FFF2-40B4-BE49-F238E27FC236}">
+                <a16:creationId xmlns:a16="http://schemas.microsoft.com/office/drawing/2014/main" id="{7DBE6768-48CC-2872-C46F-6980FA41BE31}"/>
+              </a:ext>
+            </a:extLst>
+          </p:cNvPr>
+          <p:cNvSpPr>
+            <a:spLocks/>
+          </p:cNvSpPr>
+          <p:nvPr/>
+        </p:nvSpPr>
+        <p:spPr>
+          <a:xfrm>
+            <a:off x="2694357" y="4803035"/>
+            <a:ext cx="13964397" cy="352188"/>
+          </a:xfrm>
+          <a:prstGeom prst="rect">
+            <a:avLst/>
+          </a:prstGeom>
+          <a:solidFill>
+            <a:srgbClr val="C00000"/>
+          </a:solidFill>
+          <a:ln>
+            <a:solidFill>
+              <a:schemeClr val="tx1"/>
+            </a:solidFill>
+          </a:ln>
+        </p:spPr>
+        <p:style>
+          <a:lnRef idx="2">
+            <a:schemeClr val="accent1">
+              <a:shade val="15000"/>
+            </a:schemeClr>
+          </a:lnRef>
+          <a:fillRef idx="1">
+            <a:schemeClr val="accent1"/>
+          </a:fillRef>
+          <a:effectRef idx="0">
+            <a:schemeClr val="accent1"/>
+          </a:effectRef>
+          <a:fontRef idx="minor">
+            <a:schemeClr val="lt1"/>
+          </a:fontRef>
+        </p:style>
+        <p:txBody>
+          <a:bodyPr rtlCol="0" anchor="ctr"/>
+          <a:lstStyle/>
+          <a:p>
+            <a:endParaRPr lang="en-US" sz="3200" b="1" dirty="0">
+              <a:solidFill>
+                <a:schemeClr val="tx1"/>
+              </a:solidFill>
+              <a:latin typeface="Segoe UI Variable Text" pitchFamily="2" charset="0"/>
+              <a:ea typeface="Segoe UI Black" panose="020B0A02040204020203" pitchFamily="34" charset="0"/>
+              <a:cs typeface="Segoe UI Semibold" panose="020B0702040204020203" pitchFamily="34" charset="0"/>
+            </a:endParaRPr>
+          </a:p>
+        </p:txBody>
+      </p:sp>
+      <p:sp>
+        <p:nvSpPr>
+          <p:cNvPr id="18" name="Rectangle: Rounded Corners 17" hidden="1">
+            <a:extLst>
+              <a:ext uri="{FF2B5EF4-FFF2-40B4-BE49-F238E27FC236}">
+                <a16:creationId xmlns:a16="http://schemas.microsoft.com/office/drawing/2014/main" id="{83DFCE63-E3B4-E6F6-50EF-2ADAA30D8CDC}"/>
+              </a:ext>
+            </a:extLst>
+          </p:cNvPr>
+          <p:cNvSpPr>
+            <a:spLocks/>
+          </p:cNvSpPr>
+          <p:nvPr/>
+        </p:nvSpPr>
+        <p:spPr>
+          <a:xfrm>
+            <a:off x="2694355" y="4767943"/>
+            <a:ext cx="5522545" cy="3928444"/>
+          </a:xfrm>
+          <a:prstGeom prst="roundRect">
+            <a:avLst>
+              <a:gd name="adj" fmla="val 2037"/>
+            </a:avLst>
+          </a:prstGeom>
+          <a:solidFill>
+            <a:schemeClr val="bg1"/>
+          </a:solidFill>
+          <a:ln>
+            <a:noFill/>
+          </a:ln>
+          <a:effectLst>
+            <a:outerShdw blurRad="50800" dist="50800" dir="5400000" sx="102000" sy="102000" algn="ctr" rotWithShape="0">
+              <a:srgbClr val="000000">
+                <a:alpha val="10000"/>
+              </a:srgbClr>
+            </a:outerShdw>
+            <a:softEdge rad="0"/>
+          </a:effectLst>
+        </p:spPr>
+        <p:style>
+          <a:lnRef idx="2">
+            <a:schemeClr val="accent1">
+              <a:shade val="15000"/>
+            </a:schemeClr>
+          </a:lnRef>
+          <a:fillRef idx="1">
+            <a:schemeClr val="accent1"/>
+          </a:fillRef>
+          <a:effectRef idx="0">
+            <a:schemeClr val="accent1"/>
+          </a:effectRef>
+          <a:fontRef idx="minor">
+            <a:schemeClr val="lt1"/>
+          </a:fontRef>
+        </p:style>
+        <p:txBody>
+          <a:bodyPr rtlCol="0" anchor="ctr"/>
+          <a:lstStyle/>
+          <a:p>
+            <a:endParaRPr lang="en-US" sz="3200" b="1">
+              <a:solidFill>
+                <a:schemeClr val="tx1"/>
+              </a:solidFill>
+              <a:latin typeface="Segoe UI Variable Text" pitchFamily="2" charset="0"/>
+              <a:ea typeface="Segoe UI Black" panose="020B0A02040204020203" pitchFamily="34" charset="0"/>
+              <a:cs typeface="Segoe UI Semibold" panose="020B0702040204020203" pitchFamily="34" charset="0"/>
+            </a:endParaRPr>
+          </a:p>
+        </p:txBody>
+      </p:sp>
+      <p:sp>
+        <p:nvSpPr>
+          <p:cNvPr id="19" name="Rectangle 18" hidden="1">
+            <a:extLst>
+              <a:ext uri="{FF2B5EF4-FFF2-40B4-BE49-F238E27FC236}">
+                <a16:creationId xmlns:a16="http://schemas.microsoft.com/office/drawing/2014/main" id="{7DA0BEBF-B9CC-DA08-2156-ED1B4003FC93}"/>
+              </a:ext>
+            </a:extLst>
+          </p:cNvPr>
+          <p:cNvSpPr>
+            <a:spLocks/>
+          </p:cNvSpPr>
+          <p:nvPr/>
+        </p:nvSpPr>
+        <p:spPr>
+          <a:xfrm>
+            <a:off x="7994921" y="0"/>
+            <a:ext cx="356616" cy="9144000"/>
+          </a:xfrm>
+          <a:prstGeom prst="rect">
+            <a:avLst/>
+          </a:prstGeom>
+          <a:solidFill>
+            <a:srgbClr val="C00000"/>
+          </a:solidFill>
+          <a:ln>
+            <a:solidFill>
+              <a:schemeClr val="tx1"/>
+            </a:solidFill>
+          </a:ln>
+        </p:spPr>
+        <p:style>
+          <a:lnRef idx="2">
+            <a:schemeClr val="accent1">
+              <a:shade val="15000"/>
+            </a:schemeClr>
+          </a:lnRef>
+          <a:fillRef idx="1">
+            <a:schemeClr val="accent1"/>
+          </a:fillRef>
+          <a:effectRef idx="0">
+            <a:schemeClr val="accent1"/>
+          </a:effectRef>
+          <a:fontRef idx="minor">
+            <a:schemeClr val="lt1"/>
+          </a:fontRef>
+        </p:style>
+        <p:txBody>
+          <a:bodyPr rtlCol="0" anchor="ctr"/>
+          <a:lstStyle/>
+          <a:p>
+            <a:endParaRPr lang="en-US" sz="3200" b="1">
+              <a:solidFill>
+                <a:schemeClr val="tx1"/>
+              </a:solidFill>
+              <a:latin typeface="Segoe UI Variable Text" pitchFamily="2" charset="0"/>
+              <a:ea typeface="Segoe UI Black" panose="020B0A02040204020203" pitchFamily="34" charset="0"/>
+              <a:cs typeface="Segoe UI Semibold" panose="020B0702040204020203" pitchFamily="34" charset="0"/>
+            </a:endParaRPr>
+          </a:p>
+        </p:txBody>
+      </p:sp>
+      <p:sp>
+        <p:nvSpPr>
+          <p:cNvPr id="39" name="Rectangle 38" hidden="1">
+            <a:extLst>
+              <a:ext uri="{FF2B5EF4-FFF2-40B4-BE49-F238E27FC236}">
+                <a16:creationId xmlns:a16="http://schemas.microsoft.com/office/drawing/2014/main" id="{29D2F768-BAF5-E16C-96BB-75391158C12E}"/>
+              </a:ext>
+            </a:extLst>
+          </p:cNvPr>
+          <p:cNvSpPr>
+            <a:spLocks/>
+          </p:cNvSpPr>
+          <p:nvPr/>
+        </p:nvSpPr>
+        <p:spPr>
+          <a:xfrm>
+            <a:off x="12056609" y="0"/>
+            <a:ext cx="356616" cy="9144000"/>
+          </a:xfrm>
+          <a:prstGeom prst="rect">
+            <a:avLst/>
+          </a:prstGeom>
+          <a:solidFill>
+            <a:srgbClr val="C00000"/>
+          </a:solidFill>
+          <a:ln>
+            <a:solidFill>
+              <a:schemeClr val="tx1"/>
+            </a:solidFill>
+          </a:ln>
+        </p:spPr>
+        <p:style>
+          <a:lnRef idx="2">
+            <a:schemeClr val="accent1">
+              <a:shade val="15000"/>
+            </a:schemeClr>
+          </a:lnRef>
+          <a:fillRef idx="1">
+            <a:schemeClr val="accent1"/>
+          </a:fillRef>
+          <a:effectRef idx="0">
+            <a:schemeClr val="accent1"/>
+          </a:effectRef>
+          <a:fontRef idx="minor">
+            <a:schemeClr val="lt1"/>
+          </a:fontRef>
+        </p:style>
+        <p:txBody>
+          <a:bodyPr rtlCol="0" anchor="ctr"/>
+          <a:lstStyle/>
+          <a:p>
+            <a:endParaRPr lang="en-US" sz="3200" b="1">
+              <a:solidFill>
+                <a:schemeClr val="tx1"/>
+              </a:solidFill>
+              <a:latin typeface="Segoe UI Variable Text" pitchFamily="2" charset="0"/>
+              <a:ea typeface="Segoe UI Black" panose="020B0A02040204020203" pitchFamily="34" charset="0"/>
+              <a:cs typeface="Segoe UI Semibold" panose="020B0702040204020203" pitchFamily="34" charset="0"/>
+            </a:endParaRPr>
+          </a:p>
+        </p:txBody>
+      </p:sp>
+      <p:sp>
+        <p:nvSpPr>
+          <p:cNvPr id="26" name="Rectangle: Rounded Corners 25">
+            <a:extLst>
+              <a:ext uri="{FF2B5EF4-FFF2-40B4-BE49-F238E27FC236}">
+                <a16:creationId xmlns:a16="http://schemas.microsoft.com/office/drawing/2014/main" id="{E72B9B5E-0CF6-2AAF-07E0-EDAAEEFC680B}"/>
+              </a:ext>
+            </a:extLst>
+          </p:cNvPr>
+          <p:cNvSpPr>
+            <a:spLocks/>
+          </p:cNvSpPr>
+          <p:nvPr/>
+        </p:nvSpPr>
+        <p:spPr>
+          <a:xfrm>
+            <a:off x="8618429" y="4904788"/>
+            <a:ext cx="8353633" cy="3775372"/>
+          </a:xfrm>
+          <a:prstGeom prst="roundRect">
+            <a:avLst>
+              <a:gd name="adj" fmla="val 2037"/>
+            </a:avLst>
+          </a:prstGeom>
+          <a:solidFill>
+            <a:schemeClr val="bg1"/>
+          </a:solidFill>
+          <a:ln>
+            <a:noFill/>
+          </a:ln>
+          <a:effectLst>
+            <a:outerShdw blurRad="50800" dist="50800" dir="5400000" sx="102000" sy="102000" algn="ctr" rotWithShape="0">
+              <a:srgbClr val="000000">
+                <a:alpha val="10000"/>
+              </a:srgbClr>
+            </a:outerShdw>
+            <a:softEdge rad="0"/>
+          </a:effectLst>
+        </p:spPr>
+        <p:style>
+          <a:lnRef idx="2">
+            <a:schemeClr val="accent1">
+              <a:shade val="15000"/>
+            </a:schemeClr>
+          </a:lnRef>
+          <a:fillRef idx="1">
+            <a:schemeClr val="accent1"/>
+          </a:fillRef>
+          <a:effectRef idx="0">
+            <a:schemeClr val="accent1"/>
+          </a:effectRef>
+          <a:fontRef idx="minor">
+            <a:schemeClr val="lt1"/>
+          </a:fontRef>
+        </p:style>
+        <p:txBody>
+          <a:bodyPr rtlCol="0" anchor="ctr"/>
+          <a:lstStyle/>
+          <a:p>
+            <a:endParaRPr lang="en-US" sz="3200" b="1">
+              <a:solidFill>
+                <a:schemeClr val="tx1"/>
+              </a:solidFill>
+              <a:latin typeface="Segoe UI Variable Text" pitchFamily="2" charset="0"/>
+              <a:ea typeface="Segoe UI Black" panose="020B0A02040204020203" pitchFamily="34" charset="0"/>
+              <a:cs typeface="Segoe UI Semibold" panose="020B0702040204020203" pitchFamily="34" charset="0"/>
+            </a:endParaRPr>
+          </a:p>
+        </p:txBody>
+      </p:sp>
+      <p:sp>
+        <p:nvSpPr>
+          <p:cNvPr id="8" name="Rectangle: Top Corners Rounded 7">
+            <a:extLst>
+              <a:ext uri="{FF2B5EF4-FFF2-40B4-BE49-F238E27FC236}">
+                <a16:creationId xmlns:a16="http://schemas.microsoft.com/office/drawing/2014/main" id="{6D511F9C-105E-5BAB-9B6C-5AD0925477F0}"/>
+              </a:ext>
+            </a:extLst>
+          </p:cNvPr>
+          <p:cNvSpPr/>
+          <p:nvPr/>
+        </p:nvSpPr>
+        <p:spPr>
+          <a:xfrm rot="5400000">
+            <a:off x="-3430417" y="3420759"/>
+            <a:ext cx="9144000" cy="2302482"/>
+          </a:xfrm>
+          <a:prstGeom prst="round2SameRect">
+            <a:avLst>
+              <a:gd name="adj1" fmla="val 0"/>
+              <a:gd name="adj2" fmla="val 0"/>
+            </a:avLst>
+          </a:prstGeom>
+          <a:solidFill>
+            <a:srgbClr val="B2292E"/>
+          </a:solidFill>
+          <a:ln>
+            <a:noFill/>
+          </a:ln>
+        </p:spPr>
+        <p:style>
+          <a:lnRef idx="2">
+            <a:schemeClr val="accent1">
+              <a:shade val="15000"/>
+            </a:schemeClr>
+          </a:lnRef>
+          <a:fillRef idx="1">
+            <a:schemeClr val="accent1"/>
+          </a:fillRef>
+          <a:effectRef idx="0">
+            <a:schemeClr val="accent1"/>
+          </a:effectRef>
+          <a:fontRef idx="minor">
+            <a:schemeClr val="lt1"/>
+          </a:fontRef>
+        </p:style>
+        <p:txBody>
+          <a:bodyPr rtlCol="0" anchor="ctr"/>
+          <a:lstStyle/>
+          <a:p>
+            <a:pPr algn="ctr"/>
+            <a:endParaRPr lang="en-US" dirty="0"/>
+          </a:p>
+        </p:txBody>
+      </p:sp>
+      <p:sp>
+        <p:nvSpPr>
+          <p:cNvPr id="4" name="Rectangle: Rounded Corners 3">
+            <a:extLst>
+              <a:ext uri="{FF2B5EF4-FFF2-40B4-BE49-F238E27FC236}">
+                <a16:creationId xmlns:a16="http://schemas.microsoft.com/office/drawing/2014/main" id="{93890BC6-C29C-A899-7EAE-FA894981F383}"/>
+              </a:ext>
+            </a:extLst>
+          </p:cNvPr>
+          <p:cNvSpPr>
+            <a:spLocks/>
+          </p:cNvSpPr>
+          <p:nvPr/>
+        </p:nvSpPr>
+        <p:spPr>
+          <a:xfrm>
+            <a:off x="2694354" y="1393036"/>
+            <a:ext cx="3554045" cy="3178964"/>
+          </a:xfrm>
+          <a:prstGeom prst="roundRect">
+            <a:avLst>
+              <a:gd name="adj" fmla="val 7453"/>
+            </a:avLst>
+          </a:prstGeom>
+          <a:solidFill>
+            <a:schemeClr val="bg1"/>
+          </a:solidFill>
+          <a:ln>
+            <a:noFill/>
+          </a:ln>
+          <a:effectLst>
+            <a:outerShdw blurRad="50800" dist="50800" dir="5400000" sx="102000" sy="102000" algn="ctr" rotWithShape="0">
+              <a:srgbClr val="000000">
+                <a:alpha val="10000"/>
+              </a:srgbClr>
+            </a:outerShdw>
+            <a:softEdge rad="0"/>
+          </a:effectLst>
+        </p:spPr>
+        <p:style>
+          <a:lnRef idx="2">
+            <a:schemeClr val="accent1">
+              <a:shade val="15000"/>
+            </a:schemeClr>
+          </a:lnRef>
+          <a:fillRef idx="1">
+            <a:schemeClr val="accent1"/>
+          </a:fillRef>
+          <a:effectRef idx="0">
+            <a:schemeClr val="accent1"/>
+          </a:effectRef>
+          <a:fontRef idx="minor">
+            <a:schemeClr val="lt1"/>
+          </a:fontRef>
+        </p:style>
+        <p:txBody>
+          <a:bodyPr rtlCol="0" anchor="ctr"/>
+          <a:lstStyle/>
+          <a:p>
+            <a:endParaRPr lang="en-US" sz="3200" b="1">
+              <a:solidFill>
+                <a:schemeClr val="tx1"/>
+              </a:solidFill>
+              <a:latin typeface="Segoe UI Variable Text" pitchFamily="2" charset="0"/>
+              <a:ea typeface="Segoe UI Black" panose="020B0A02040204020203" pitchFamily="34" charset="0"/>
+              <a:cs typeface="Segoe UI Semibold" panose="020B0702040204020203" pitchFamily="34" charset="0"/>
+            </a:endParaRPr>
+          </a:p>
+        </p:txBody>
+      </p:sp>
+      <p:sp>
+        <p:nvSpPr>
+          <p:cNvPr id="5" name="Rectangle: Rounded Corners 4">
+            <a:extLst>
+              <a:ext uri="{FF2B5EF4-FFF2-40B4-BE49-F238E27FC236}">
+                <a16:creationId xmlns:a16="http://schemas.microsoft.com/office/drawing/2014/main" id="{EAF53AD2-1D82-4A08-F830-C872AC5EA95D}"/>
+              </a:ext>
+            </a:extLst>
+          </p:cNvPr>
+          <p:cNvSpPr>
+            <a:spLocks/>
+          </p:cNvSpPr>
+          <p:nvPr/>
+        </p:nvSpPr>
+        <p:spPr>
+          <a:xfrm>
+            <a:off x="6672929" y="1393036"/>
+            <a:ext cx="4876804" cy="3178964"/>
+          </a:xfrm>
+          <a:prstGeom prst="roundRect">
+            <a:avLst>
+              <a:gd name="adj" fmla="val 7453"/>
+            </a:avLst>
+          </a:prstGeom>
+          <a:solidFill>
+            <a:schemeClr val="bg1"/>
+          </a:solidFill>
+          <a:ln>
+            <a:noFill/>
+          </a:ln>
+          <a:effectLst>
+            <a:outerShdw blurRad="50800" dist="50800" dir="5400000" sx="102000" sy="102000" algn="ctr" rotWithShape="0">
+              <a:srgbClr val="000000">
+                <a:alpha val="10000"/>
+              </a:srgbClr>
+            </a:outerShdw>
+            <a:softEdge rad="0"/>
+          </a:effectLst>
+        </p:spPr>
+        <p:style>
+          <a:lnRef idx="2">
+            <a:schemeClr val="accent1">
+              <a:shade val="15000"/>
+            </a:schemeClr>
+          </a:lnRef>
+          <a:fillRef idx="1">
+            <a:schemeClr val="accent1"/>
+          </a:fillRef>
+          <a:effectRef idx="0">
+            <a:schemeClr val="accent1"/>
+          </a:effectRef>
+          <a:fontRef idx="minor">
+            <a:schemeClr val="lt1"/>
+          </a:fontRef>
+        </p:style>
+        <p:txBody>
+          <a:bodyPr rtlCol="0" anchor="ctr"/>
+          <a:lstStyle/>
+          <a:p>
+            <a:endParaRPr lang="en-US" sz="3200" b="1">
+              <a:solidFill>
+                <a:schemeClr val="tx1"/>
+              </a:solidFill>
+              <a:latin typeface="Segoe UI Variable Text" pitchFamily="2" charset="0"/>
+              <a:ea typeface="Segoe UI Black" panose="020B0A02040204020203" pitchFamily="34" charset="0"/>
+              <a:cs typeface="Segoe UI Semibold" panose="020B0702040204020203" pitchFamily="34" charset="0"/>
+            </a:endParaRPr>
+          </a:p>
+        </p:txBody>
+      </p:sp>
+      <p:sp>
+        <p:nvSpPr>
+          <p:cNvPr id="9" name="Rectangle: Rounded Corners 8">
+            <a:extLst>
+              <a:ext uri="{FF2B5EF4-FFF2-40B4-BE49-F238E27FC236}">
+                <a16:creationId xmlns:a16="http://schemas.microsoft.com/office/drawing/2014/main" id="{F8C38C69-8CAC-CDC6-E521-A32724A30EF2}"/>
+              </a:ext>
+            </a:extLst>
+          </p:cNvPr>
+          <p:cNvSpPr>
+            <a:spLocks/>
+          </p:cNvSpPr>
+          <p:nvPr/>
+        </p:nvSpPr>
+        <p:spPr>
+          <a:xfrm>
+            <a:off x="11974263" y="1393036"/>
+            <a:ext cx="4997800" cy="3178964"/>
+          </a:xfrm>
+          <a:prstGeom prst="roundRect">
+            <a:avLst>
+              <a:gd name="adj" fmla="val 7453"/>
+            </a:avLst>
+          </a:prstGeom>
+          <a:solidFill>
+            <a:schemeClr val="bg1"/>
+          </a:solidFill>
+          <a:ln>
+            <a:noFill/>
+          </a:ln>
+          <a:effectLst>
+            <a:outerShdw blurRad="50800" dist="50800" dir="5400000" sx="102000" sy="102000" algn="ctr" rotWithShape="0">
+              <a:srgbClr val="000000">
+                <a:alpha val="10000"/>
+              </a:srgbClr>
+            </a:outerShdw>
+            <a:softEdge rad="0"/>
+          </a:effectLst>
+        </p:spPr>
+        <p:style>
+          <a:lnRef idx="2">
+            <a:schemeClr val="accent1">
+              <a:shade val="15000"/>
+            </a:schemeClr>
+          </a:lnRef>
+          <a:fillRef idx="1">
+            <a:schemeClr val="accent1"/>
+          </a:fillRef>
+          <a:effectRef idx="0">
+            <a:schemeClr val="accent1"/>
+          </a:effectRef>
+          <a:fontRef idx="minor">
+            <a:schemeClr val="lt1"/>
+          </a:fontRef>
+        </p:style>
+        <p:txBody>
+          <a:bodyPr rtlCol="0" anchor="ctr"/>
+          <a:lstStyle/>
+          <a:p>
+            <a:endParaRPr lang="en-US" sz="3200" b="1">
+              <a:solidFill>
+                <a:schemeClr val="tx1"/>
+              </a:solidFill>
+              <a:latin typeface="Segoe UI Variable Text" pitchFamily="2" charset="0"/>
+              <a:ea typeface="Segoe UI Black" panose="020B0A02040204020203" pitchFamily="34" charset="0"/>
+              <a:cs typeface="Segoe UI Semibold" panose="020B0702040204020203" pitchFamily="34" charset="0"/>
+            </a:endParaRPr>
+          </a:p>
+        </p:txBody>
+      </p:sp>
+      <p:pic>
+        <p:nvPicPr>
+          <p:cNvPr id="13" name="Picture 12" hidden="1">
+            <a:extLst>
+              <a:ext uri="{FF2B5EF4-FFF2-40B4-BE49-F238E27FC236}">
+                <a16:creationId xmlns:a16="http://schemas.microsoft.com/office/drawing/2014/main" id="{58A151CD-087B-ED66-69F9-8BA5AA93B39A}"/>
+              </a:ext>
+            </a:extLst>
+          </p:cNvPr>
+          <p:cNvPicPr>
+            <a:picLocks noChangeAspect="1"/>
+          </p:cNvPicPr>
+          <p:nvPr/>
+        </p:nvPicPr>
+        <p:blipFill>
+          <a:blip r:embed="rId2"/>
+          <a:stretch>
+            <a:fillRect/>
+          </a:stretch>
+        </p:blipFill>
+        <p:spPr>
+          <a:xfrm>
+            <a:off x="2689476" y="1393034"/>
+            <a:ext cx="3554045" cy="2534004"/>
+          </a:xfrm>
+          <a:prstGeom prst="rect">
+            <a:avLst/>
+          </a:prstGeom>
+        </p:spPr>
+      </p:pic>
+      <p:pic>
+        <p:nvPicPr>
+          <p:cNvPr id="22" name="Picture 21" hidden="1">
+            <a:extLst>
+              <a:ext uri="{FF2B5EF4-FFF2-40B4-BE49-F238E27FC236}">
+                <a16:creationId xmlns:a16="http://schemas.microsoft.com/office/drawing/2014/main" id="{225E8960-1865-AA7E-643A-5C1979C1BF4A}"/>
+              </a:ext>
+            </a:extLst>
+          </p:cNvPr>
+          <p:cNvPicPr>
+            <a:picLocks noChangeAspect="1"/>
+          </p:cNvPicPr>
+          <p:nvPr/>
+        </p:nvPicPr>
+        <p:blipFill>
+          <a:blip r:embed="rId3"/>
+          <a:stretch>
+            <a:fillRect/>
+          </a:stretch>
+        </p:blipFill>
+        <p:spPr>
+          <a:xfrm>
+            <a:off x="6649928" y="1393034"/>
+            <a:ext cx="4475271" cy="2679384"/>
+          </a:xfrm>
+          <a:prstGeom prst="rect">
+            <a:avLst/>
+          </a:prstGeom>
+        </p:spPr>
+      </p:pic>
+      <p:pic>
+        <p:nvPicPr>
+          <p:cNvPr id="24" name="Picture 23" hidden="1">
+            <a:extLst>
+              <a:ext uri="{FF2B5EF4-FFF2-40B4-BE49-F238E27FC236}">
+                <a16:creationId xmlns:a16="http://schemas.microsoft.com/office/drawing/2014/main" id="{F0443F0D-697C-5794-E9A8-8AAB1C8DE06D}"/>
+              </a:ext>
+            </a:extLst>
+          </p:cNvPr>
+          <p:cNvPicPr>
+            <a:picLocks noChangeAspect="1"/>
+          </p:cNvPicPr>
+          <p:nvPr/>
+        </p:nvPicPr>
+        <p:blipFill>
+          <a:blip r:embed="rId4"/>
+          <a:stretch>
+            <a:fillRect/>
+          </a:stretch>
+        </p:blipFill>
+        <p:spPr>
+          <a:xfrm>
+            <a:off x="11549726" y="1303474"/>
+            <a:ext cx="5496990" cy="2679384"/>
+          </a:xfrm>
+          <a:prstGeom prst="rect">
+            <a:avLst/>
+          </a:prstGeom>
+        </p:spPr>
+      </p:pic>
+      <p:sp>
+        <p:nvSpPr>
+          <p:cNvPr id="25" name="Rectangle: Rounded Corners 24">
+            <a:extLst>
+              <a:ext uri="{FF2B5EF4-FFF2-40B4-BE49-F238E27FC236}">
+                <a16:creationId xmlns:a16="http://schemas.microsoft.com/office/drawing/2014/main" id="{165BADFD-2740-C15C-74B2-EB737FFA9663}"/>
+              </a:ext>
+            </a:extLst>
+          </p:cNvPr>
+          <p:cNvSpPr>
+            <a:spLocks/>
+          </p:cNvSpPr>
+          <p:nvPr/>
+        </p:nvSpPr>
+        <p:spPr>
+          <a:xfrm>
+            <a:off x="2694354" y="4911634"/>
+            <a:ext cx="5468710" cy="3820886"/>
+          </a:xfrm>
+          <a:prstGeom prst="roundRect">
+            <a:avLst>
+              <a:gd name="adj" fmla="val 2037"/>
+            </a:avLst>
+          </a:prstGeom>
+          <a:solidFill>
+            <a:schemeClr val="bg1"/>
+          </a:solidFill>
+          <a:ln>
+            <a:noFill/>
+          </a:ln>
+          <a:effectLst>
+            <a:outerShdw blurRad="50800" dist="50800" dir="5400000" sx="102000" sy="102000" algn="ctr" rotWithShape="0">
+              <a:srgbClr val="000000">
+                <a:alpha val="10000"/>
+              </a:srgbClr>
+            </a:outerShdw>
+            <a:softEdge rad="0"/>
+          </a:effectLst>
+        </p:spPr>
+        <p:style>
+          <a:lnRef idx="2">
+            <a:schemeClr val="accent1">
+              <a:shade val="15000"/>
+            </a:schemeClr>
+          </a:lnRef>
+          <a:fillRef idx="1">
+            <a:schemeClr val="accent1"/>
+          </a:fillRef>
+          <a:effectRef idx="0">
+            <a:schemeClr val="accent1"/>
+          </a:effectRef>
+          <a:fontRef idx="minor">
+            <a:schemeClr val="lt1"/>
+          </a:fontRef>
+        </p:style>
+        <p:txBody>
+          <a:bodyPr rtlCol="0" anchor="ctr"/>
+          <a:lstStyle/>
+          <a:p>
+            <a:endParaRPr lang="en-US" sz="3200" b="1">
+              <a:solidFill>
+                <a:schemeClr val="tx1"/>
+              </a:solidFill>
+              <a:latin typeface="Segoe UI Variable Text" pitchFamily="2" charset="0"/>
+              <a:ea typeface="Segoe UI Black" panose="020B0A02040204020203" pitchFamily="34" charset="0"/>
+              <a:cs typeface="Segoe UI Semibold" panose="020B0702040204020203" pitchFamily="34" charset="0"/>
+            </a:endParaRPr>
+          </a:p>
+        </p:txBody>
+      </p:sp>
+    </p:spTree>
+    <p:extLst>
+      <p:ext uri="{BB962C8B-B14F-4D97-AF65-F5344CB8AC3E}">
+        <p14:creationId xmlns:p14="http://schemas.microsoft.com/office/powerpoint/2010/main" val="2484462050"/>
+      </p:ext>
+    </p:extLst>
+  </p:cSld>
+  <p:clrMapOvr>
+    <a:masterClrMapping/>
+  </p:clrMapOvr>
+</p:sld>
+</file>
+
+<file path=ppt/slides/slide6.xml><?xml version="1.0" encoding="utf-8"?>
+<p:sld xmlns:a="http://schemas.openxmlformats.org/drawingml/2006/main" xmlns:r="http://schemas.openxmlformats.org/officeDocument/2006/relationships" xmlns:p="http://schemas.openxmlformats.org/presentationml/2006/main">
+  <p:cSld>
+    <p:spTree>
+      <p:nvGrpSpPr>
+        <p:cNvPr id="1" name="">
+          <a:extLst>
+            <a:ext uri="{FF2B5EF4-FFF2-40B4-BE49-F238E27FC236}">
+              <a16:creationId xmlns:a16="http://schemas.microsoft.com/office/drawing/2014/main" id="{146C7F3B-8DDA-429B-9FB9-7C764EFD9B4E}"/>
+            </a:ext>
+          </a:extLst>
+        </p:cNvPr>
+        <p:cNvGrpSpPr/>
+        <p:nvPr/>
+      </p:nvGrpSpPr>
+      <p:grpSpPr>
+        <a:xfrm>
+          <a:off x="0" y="0"/>
+          <a:ext cx="0" cy="0"/>
+          <a:chOff x="0" y="0"/>
+          <a:chExt cx="0" cy="0"/>
+        </a:xfrm>
+      </p:grpSpPr>
+      <p:sp>
+        <p:nvSpPr>
+          <p:cNvPr id="12" name="Rectangle: Rounded Corners 11">
+            <a:extLst>
+              <a:ext uri="{FF2B5EF4-FFF2-40B4-BE49-F238E27FC236}">
+                <a16:creationId xmlns:a16="http://schemas.microsoft.com/office/drawing/2014/main" id="{7D2EAEA5-0C48-F5B1-2B81-AD31A083A683}"/>
+              </a:ext>
+            </a:extLst>
+          </p:cNvPr>
+          <p:cNvSpPr/>
+          <p:nvPr/>
+        </p:nvSpPr>
+        <p:spPr>
+          <a:xfrm>
+            <a:off x="2694357" y="1393036"/>
+            <a:ext cx="6170243" cy="2950363"/>
+          </a:xfrm>
+          <a:prstGeom prst="roundRect">
+            <a:avLst>
+              <a:gd name="adj" fmla="val 4246"/>
+            </a:avLst>
+          </a:prstGeom>
+          <a:solidFill>
+            <a:schemeClr val="bg1"/>
+          </a:solidFill>
+          <a:ln>
+            <a:noFill/>
+          </a:ln>
+          <a:effectLst>
+            <a:outerShdw blurRad="50800" dist="50800" dir="5400000" sx="102000" sy="102000" algn="ctr" rotWithShape="0">
+              <a:srgbClr val="000000">
+                <a:alpha val="10000"/>
+              </a:srgbClr>
+            </a:outerShdw>
+          </a:effectLst>
+        </p:spPr>
+        <p:style>
+          <a:lnRef idx="2">
+            <a:schemeClr val="accent1">
+              <a:shade val="15000"/>
+            </a:schemeClr>
+          </a:lnRef>
+          <a:fillRef idx="1">
+            <a:schemeClr val="accent1"/>
+          </a:fillRef>
+          <a:effectRef idx="0">
+            <a:schemeClr val="accent1"/>
+          </a:effectRef>
+          <a:fontRef idx="minor">
+            <a:schemeClr val="lt1"/>
+          </a:fontRef>
+        </p:style>
+        <p:txBody>
+          <a:bodyPr rtlCol="0" anchor="ctr"/>
+          <a:lstStyle/>
+          <a:p>
+            <a:endParaRPr lang="en-US" sz="3200" b="1">
+              <a:solidFill>
+                <a:schemeClr val="tx1"/>
+              </a:solidFill>
+              <a:latin typeface="Segoe UI Variable Text" pitchFamily="2" charset="0"/>
+              <a:ea typeface="Segoe UI Black" panose="020B0A02040204020203" pitchFamily="34" charset="0"/>
+              <a:cs typeface="Segoe UI Semibold" panose="020B0702040204020203" pitchFamily="34" charset="0"/>
+            </a:endParaRPr>
+          </a:p>
+        </p:txBody>
+      </p:sp>
+      <p:sp>
+        <p:nvSpPr>
+          <p:cNvPr id="31" name="Rectangle: Rounded Corners 30">
+            <a:extLst>
+              <a:ext uri="{FF2B5EF4-FFF2-40B4-BE49-F238E27FC236}">
+                <a16:creationId xmlns:a16="http://schemas.microsoft.com/office/drawing/2014/main" id="{E912672E-CC72-1638-0B2D-1F04ACC134BD}"/>
+              </a:ext>
+            </a:extLst>
+          </p:cNvPr>
+          <p:cNvSpPr/>
+          <p:nvPr/>
+        </p:nvSpPr>
+        <p:spPr>
+          <a:xfrm>
+            <a:off x="2694357" y="4711700"/>
+            <a:ext cx="6170243" cy="4020819"/>
+          </a:xfrm>
+          <a:prstGeom prst="roundRect">
+            <a:avLst>
+              <a:gd name="adj" fmla="val 4246"/>
+            </a:avLst>
+          </a:prstGeom>
+          <a:solidFill>
+            <a:schemeClr val="bg1"/>
+          </a:solidFill>
+          <a:ln>
+            <a:noFill/>
+          </a:ln>
+          <a:effectLst>
+            <a:outerShdw blurRad="50800" dist="50800" dir="5400000" sx="102000" sy="102000" algn="ctr" rotWithShape="0">
+              <a:srgbClr val="000000">
+                <a:alpha val="10000"/>
+              </a:srgbClr>
+            </a:outerShdw>
+          </a:effectLst>
+        </p:spPr>
+        <p:style>
+          <a:lnRef idx="2">
+            <a:schemeClr val="accent1">
+              <a:shade val="15000"/>
+            </a:schemeClr>
+          </a:lnRef>
+          <a:fillRef idx="1">
+            <a:schemeClr val="accent1"/>
+          </a:fillRef>
+          <a:effectRef idx="0">
+            <a:schemeClr val="accent1"/>
+          </a:effectRef>
+          <a:fontRef idx="minor">
+            <a:schemeClr val="lt1"/>
+          </a:fontRef>
+        </p:style>
+        <p:txBody>
+          <a:bodyPr rtlCol="0" anchor="ctr"/>
+          <a:lstStyle/>
+          <a:p>
+            <a:endParaRPr lang="en-US" sz="3200" b="1">
+              <a:solidFill>
+                <a:schemeClr val="tx1"/>
+              </a:solidFill>
+              <a:latin typeface="Segoe UI Variable Text" pitchFamily="2" charset="0"/>
+              <a:ea typeface="Segoe UI Black" panose="020B0A02040204020203" pitchFamily="34" charset="0"/>
+              <a:cs typeface="Segoe UI Semibold" panose="020B0702040204020203" pitchFamily="34" charset="0"/>
+            </a:endParaRPr>
+          </a:p>
+        </p:txBody>
+      </p:sp>
+      <p:sp>
+        <p:nvSpPr>
+          <p:cNvPr id="32" name="Rectangle: Rounded Corners 31">
+            <a:extLst>
+              <a:ext uri="{FF2B5EF4-FFF2-40B4-BE49-F238E27FC236}">
+                <a16:creationId xmlns:a16="http://schemas.microsoft.com/office/drawing/2014/main" id="{787F1D21-1496-D581-CE99-18BDD7A432EE}"/>
+              </a:ext>
+            </a:extLst>
+          </p:cNvPr>
+          <p:cNvSpPr/>
+          <p:nvPr/>
+        </p:nvSpPr>
+        <p:spPr>
+          <a:xfrm>
+            <a:off x="9266132" y="1393037"/>
+            <a:ext cx="7705938" cy="2950362"/>
+          </a:xfrm>
+          <a:prstGeom prst="roundRect">
+            <a:avLst>
+              <a:gd name="adj" fmla="val 4620"/>
+            </a:avLst>
+          </a:prstGeom>
+          <a:solidFill>
+            <a:schemeClr val="bg1"/>
+          </a:solidFill>
+          <a:ln>
+            <a:noFill/>
+          </a:ln>
+          <a:effectLst>
+            <a:outerShdw blurRad="50800" dist="50800" dir="5400000" sx="102000" sy="102000" algn="ctr" rotWithShape="0">
+              <a:srgbClr val="000000">
+                <a:alpha val="10000"/>
+              </a:srgbClr>
+            </a:outerShdw>
+          </a:effectLst>
+        </p:spPr>
+        <p:style>
+          <a:lnRef idx="2">
+            <a:schemeClr val="accent1">
+              <a:shade val="15000"/>
+            </a:schemeClr>
+          </a:lnRef>
+          <a:fillRef idx="1">
+            <a:schemeClr val="accent1"/>
+          </a:fillRef>
+          <a:effectRef idx="0">
+            <a:schemeClr val="accent1"/>
+          </a:effectRef>
+          <a:fontRef idx="minor">
+            <a:schemeClr val="lt1"/>
+          </a:fontRef>
+        </p:style>
+        <p:txBody>
+          <a:bodyPr rtlCol="0" anchor="ctr"/>
+          <a:lstStyle/>
+          <a:p>
+            <a:endParaRPr lang="en-US" sz="3200" b="1">
+              <a:solidFill>
+                <a:schemeClr val="tx1"/>
+              </a:solidFill>
+              <a:latin typeface="Segoe UI Variable Text" pitchFamily="2" charset="0"/>
+              <a:ea typeface="Segoe UI Black" panose="020B0A02040204020203" pitchFamily="34" charset="0"/>
+              <a:cs typeface="Segoe UI Semibold" panose="020B0702040204020203" pitchFamily="34" charset="0"/>
+            </a:endParaRPr>
+          </a:p>
+        </p:txBody>
+      </p:sp>
+      <p:sp>
+        <p:nvSpPr>
+          <p:cNvPr id="11" name="Rectangle 10">
+            <a:extLst>
+              <a:ext uri="{FF2B5EF4-FFF2-40B4-BE49-F238E27FC236}">
+                <a16:creationId xmlns:a16="http://schemas.microsoft.com/office/drawing/2014/main" id="{937BC82D-D0CC-4930-F364-399E26C4FFE0}"/>
+              </a:ext>
+            </a:extLst>
+          </p:cNvPr>
+          <p:cNvSpPr>
+            <a:spLocks noGrp="1" noRot="1" noMove="1" noResize="1" noEditPoints="1" noAdjustHandles="1" noChangeArrowheads="1" noChangeShapeType="1"/>
+          </p:cNvSpPr>
+          <p:nvPr/>
+        </p:nvSpPr>
+        <p:spPr>
+          <a:xfrm>
+            <a:off x="2694357" y="411480"/>
+            <a:ext cx="13949917" cy="816819"/>
+          </a:xfrm>
+          <a:prstGeom prst="rect">
+            <a:avLst/>
+          </a:prstGeom>
+          <a:noFill/>
+          <a:ln>
+            <a:noFill/>
+          </a:ln>
+        </p:spPr>
+        <p:style>
+          <a:lnRef idx="2">
+            <a:schemeClr val="accent1">
+              <a:shade val="15000"/>
+            </a:schemeClr>
+          </a:lnRef>
+          <a:fillRef idx="1">
+            <a:schemeClr val="accent1"/>
+          </a:fillRef>
+          <a:effectRef idx="0">
+            <a:schemeClr val="accent1"/>
+          </a:effectRef>
+          <a:fontRef idx="minor">
+            <a:schemeClr val="lt1"/>
+          </a:fontRef>
+        </p:style>
+        <p:txBody>
+          <a:bodyPr rtlCol="0" anchor="ctr"/>
+          <a:lstStyle/>
+          <a:p>
+            <a:pPr>
+              <a:lnSpc>
+                <a:spcPts val="3000"/>
+              </a:lnSpc>
+            </a:pPr>
+            <a:r>
+              <a:rPr lang="en-US" sz="3200" b="1" dirty="0">
+                <a:solidFill>
+                  <a:schemeClr val="tx1"/>
+                </a:solidFill>
+                <a:latin typeface="Segoe UI Variable Text" pitchFamily="2" charset="0"/>
+                <a:ea typeface="Segoe UI Black" panose="020B0A02040204020203" pitchFamily="34" charset="0"/>
+                <a:cs typeface="Segoe UI Semibold" panose="020B0702040204020203" pitchFamily="34" charset="0"/>
+              </a:rPr>
+              <a:t>Customer Behavior</a:t>
+            </a:r>
+          </a:p>
+          <a:p>
+            <a:pPr>
+              <a:lnSpc>
+                <a:spcPts val="3000"/>
+              </a:lnSpc>
+            </a:pPr>
+            <a:r>
+              <a:rPr lang="en-US" dirty="0">
+                <a:solidFill>
+                  <a:schemeClr val="tx1"/>
+                </a:solidFill>
+                <a:latin typeface="Segoe UI Variable Display Light" pitchFamily="2" charset="0"/>
+                <a:ea typeface="Segoe UI Black" panose="020B0A02040204020203" pitchFamily="34" charset="0"/>
+                <a:cs typeface="Segoe UI Semibold" panose="020B0702040204020203" pitchFamily="34" charset="0"/>
+              </a:rPr>
+              <a:t>Uncover key leakage points and understand what drives or hinders customer retention.</a:t>
+            </a:r>
+          </a:p>
+        </p:txBody>
+      </p:sp>
+      <p:sp>
+        <p:nvSpPr>
+          <p:cNvPr id="14" name="Rectangle 13" hidden="1">
+            <a:extLst>
+              <a:ext uri="{FF2B5EF4-FFF2-40B4-BE49-F238E27FC236}">
+                <a16:creationId xmlns:a16="http://schemas.microsoft.com/office/drawing/2014/main" id="{86D7049E-3B79-C7BA-E8F9-382DACC8F264}"/>
+              </a:ext>
+            </a:extLst>
+          </p:cNvPr>
+          <p:cNvSpPr>
+            <a:spLocks noGrp="1" noRot="1" noMove="1" noResize="1" noEditPoints="1" noAdjustHandles="1" noChangeArrowheads="1" noChangeShapeType="1"/>
+          </p:cNvSpPr>
+          <p:nvPr/>
+        </p:nvSpPr>
+        <p:spPr>
+          <a:xfrm>
+            <a:off x="217716" y="0"/>
+            <a:ext cx="417282" cy="9144000"/>
+          </a:xfrm>
+          <a:prstGeom prst="rect">
+            <a:avLst/>
+          </a:prstGeom>
+          <a:noFill/>
+          <a:ln>
+            <a:solidFill>
+              <a:schemeClr val="tx1"/>
+            </a:solidFill>
+          </a:ln>
+        </p:spPr>
+        <p:style>
+          <a:lnRef idx="2">
+            <a:schemeClr val="accent1">
+              <a:shade val="15000"/>
+            </a:schemeClr>
+          </a:lnRef>
+          <a:fillRef idx="1">
+            <a:schemeClr val="accent1"/>
+          </a:fillRef>
+          <a:effectRef idx="0">
+            <a:schemeClr val="accent1"/>
+          </a:effectRef>
+          <a:fontRef idx="minor">
+            <a:schemeClr val="lt1"/>
+          </a:fontRef>
+        </p:style>
+        <p:txBody>
+          <a:bodyPr rtlCol="0" anchor="ctr"/>
+          <a:lstStyle/>
+          <a:p>
+            <a:endParaRPr lang="en-US" sz="3200" b="1">
+              <a:solidFill>
+                <a:schemeClr val="tx1"/>
+              </a:solidFill>
+              <a:latin typeface="Segoe UI Variable Text" pitchFamily="2" charset="0"/>
+              <a:ea typeface="Segoe UI Black" panose="020B0A02040204020203" pitchFamily="34" charset="0"/>
+              <a:cs typeface="Segoe UI Semibold" panose="020B0702040204020203" pitchFamily="34" charset="0"/>
+            </a:endParaRPr>
+          </a:p>
+        </p:txBody>
+      </p:sp>
+      <p:sp>
+        <p:nvSpPr>
+          <p:cNvPr id="15" name="Rectangle 14" hidden="1">
+            <a:extLst>
+              <a:ext uri="{FF2B5EF4-FFF2-40B4-BE49-F238E27FC236}">
+                <a16:creationId xmlns:a16="http://schemas.microsoft.com/office/drawing/2014/main" id="{9CDDD758-5A56-6699-B927-CF7E196D1629}"/>
+              </a:ext>
+            </a:extLst>
+          </p:cNvPr>
+          <p:cNvSpPr>
+            <a:spLocks/>
+          </p:cNvSpPr>
+          <p:nvPr/>
+        </p:nvSpPr>
+        <p:spPr>
+          <a:xfrm>
+            <a:off x="16651518" y="0"/>
+            <a:ext cx="417282" cy="9144000"/>
+          </a:xfrm>
+          <a:prstGeom prst="rect">
+            <a:avLst/>
+          </a:prstGeom>
+          <a:solidFill>
+            <a:srgbClr val="C00000"/>
+          </a:solidFill>
+          <a:ln>
+            <a:solidFill>
+              <a:schemeClr val="tx1"/>
+            </a:solidFill>
+          </a:ln>
+        </p:spPr>
+        <p:style>
+          <a:lnRef idx="2">
+            <a:schemeClr val="accent1">
+              <a:shade val="15000"/>
+            </a:schemeClr>
+          </a:lnRef>
+          <a:fillRef idx="1">
+            <a:schemeClr val="accent1"/>
+          </a:fillRef>
+          <a:effectRef idx="0">
+            <a:schemeClr val="accent1"/>
+          </a:effectRef>
+          <a:fontRef idx="minor">
+            <a:schemeClr val="lt1"/>
+          </a:fontRef>
+        </p:style>
+        <p:txBody>
+          <a:bodyPr rtlCol="0" anchor="ctr"/>
+          <a:lstStyle/>
+          <a:p>
+            <a:endParaRPr lang="en-US" sz="3200" b="1">
+              <a:solidFill>
+                <a:schemeClr val="tx1"/>
+              </a:solidFill>
+              <a:latin typeface="Segoe UI Variable Text" pitchFamily="2" charset="0"/>
+              <a:ea typeface="Segoe UI Black" panose="020B0A02040204020203" pitchFamily="34" charset="0"/>
+              <a:cs typeface="Segoe UI Semibold" panose="020B0702040204020203" pitchFamily="34" charset="0"/>
+            </a:endParaRPr>
+          </a:p>
+        </p:txBody>
+      </p:sp>
+      <p:sp>
+        <p:nvSpPr>
+          <p:cNvPr id="17" name="Rectangle 16" hidden="1">
+            <a:extLst>
+              <a:ext uri="{FF2B5EF4-FFF2-40B4-BE49-F238E27FC236}">
+                <a16:creationId xmlns:a16="http://schemas.microsoft.com/office/drawing/2014/main" id="{3376EE80-42B9-1517-72B9-53460F118D09}"/>
+              </a:ext>
+            </a:extLst>
+          </p:cNvPr>
+          <p:cNvSpPr>
+            <a:spLocks/>
+          </p:cNvSpPr>
+          <p:nvPr/>
+        </p:nvSpPr>
+        <p:spPr>
+          <a:xfrm>
+            <a:off x="2269839" y="0"/>
+            <a:ext cx="417282" cy="9144000"/>
+          </a:xfrm>
+          <a:prstGeom prst="rect">
+            <a:avLst/>
+          </a:prstGeom>
+          <a:solidFill>
+            <a:srgbClr val="C00000"/>
+          </a:solidFill>
+          <a:ln>
+            <a:solidFill>
+              <a:schemeClr val="tx1"/>
+            </a:solidFill>
+          </a:ln>
+        </p:spPr>
+        <p:style>
+          <a:lnRef idx="2">
+            <a:schemeClr val="accent1">
+              <a:shade val="15000"/>
+            </a:schemeClr>
+          </a:lnRef>
+          <a:fillRef idx="1">
+            <a:schemeClr val="accent1"/>
+          </a:fillRef>
+          <a:effectRef idx="0">
+            <a:schemeClr val="accent1"/>
+          </a:effectRef>
+          <a:fontRef idx="minor">
+            <a:schemeClr val="lt1"/>
+          </a:fontRef>
+        </p:style>
+        <p:txBody>
+          <a:bodyPr rtlCol="0" anchor="ctr"/>
+          <a:lstStyle/>
+          <a:p>
+            <a:endParaRPr lang="en-US" sz="3200" b="1">
+              <a:solidFill>
+                <a:schemeClr val="tx1"/>
+              </a:solidFill>
+              <a:latin typeface="Segoe UI Variable Text" pitchFamily="2" charset="0"/>
+              <a:ea typeface="Segoe UI Black" panose="020B0A02040204020203" pitchFamily="34" charset="0"/>
+              <a:cs typeface="Segoe UI Semibold" panose="020B0702040204020203" pitchFamily="34" charset="0"/>
+            </a:endParaRPr>
+          </a:p>
+        </p:txBody>
+      </p:sp>
+      <p:sp>
+        <p:nvSpPr>
+          <p:cNvPr id="19" name="Rectangle 18" hidden="1">
+            <a:extLst>
+              <a:ext uri="{FF2B5EF4-FFF2-40B4-BE49-F238E27FC236}">
+                <a16:creationId xmlns:a16="http://schemas.microsoft.com/office/drawing/2014/main" id="{69881069-E237-BC47-72E9-93BA4C8CF930}"/>
+              </a:ext>
+            </a:extLst>
+          </p:cNvPr>
+          <p:cNvSpPr>
+            <a:spLocks/>
+          </p:cNvSpPr>
+          <p:nvPr/>
+        </p:nvSpPr>
+        <p:spPr>
+          <a:xfrm>
+            <a:off x="9491011" y="0"/>
+            <a:ext cx="356616" cy="9144000"/>
+          </a:xfrm>
+          <a:prstGeom prst="rect">
+            <a:avLst/>
+          </a:prstGeom>
+          <a:solidFill>
+            <a:srgbClr val="C00000"/>
+          </a:solidFill>
+          <a:ln>
+            <a:solidFill>
+              <a:schemeClr val="tx1"/>
+            </a:solidFill>
+          </a:ln>
+        </p:spPr>
+        <p:style>
+          <a:lnRef idx="2">
+            <a:schemeClr val="accent1">
+              <a:shade val="15000"/>
+            </a:schemeClr>
+          </a:lnRef>
+          <a:fillRef idx="1">
+            <a:schemeClr val="accent1"/>
+          </a:fillRef>
+          <a:effectRef idx="0">
+            <a:schemeClr val="accent1"/>
+          </a:effectRef>
+          <a:fontRef idx="minor">
+            <a:schemeClr val="lt1"/>
+          </a:fontRef>
+        </p:style>
+        <p:txBody>
+          <a:bodyPr rtlCol="0" anchor="ctr"/>
+          <a:lstStyle/>
+          <a:p>
+            <a:endParaRPr lang="en-US" sz="3200" b="1">
+              <a:solidFill>
+                <a:schemeClr val="tx1"/>
+              </a:solidFill>
+              <a:latin typeface="Segoe UI Variable Text" pitchFamily="2" charset="0"/>
+              <a:ea typeface="Segoe UI Black" panose="020B0A02040204020203" pitchFamily="34" charset="0"/>
+              <a:cs typeface="Segoe UI Semibold" panose="020B0702040204020203" pitchFamily="34" charset="0"/>
+            </a:endParaRPr>
+          </a:p>
+        </p:txBody>
+      </p:sp>
+      <p:sp>
+        <p:nvSpPr>
+          <p:cNvPr id="20" name="Rectangle 19" hidden="1">
+            <a:extLst>
+              <a:ext uri="{FF2B5EF4-FFF2-40B4-BE49-F238E27FC236}">
+                <a16:creationId xmlns:a16="http://schemas.microsoft.com/office/drawing/2014/main" id="{DEF75066-F27B-E021-7331-A0476486C15D}"/>
+              </a:ext>
+            </a:extLst>
+          </p:cNvPr>
+          <p:cNvSpPr>
+            <a:spLocks/>
+          </p:cNvSpPr>
+          <p:nvPr/>
+        </p:nvSpPr>
+        <p:spPr>
+          <a:xfrm>
+            <a:off x="2687120" y="4902200"/>
+            <a:ext cx="13964397" cy="352188"/>
+          </a:xfrm>
+          <a:prstGeom prst="rect">
+            <a:avLst/>
+          </a:prstGeom>
+          <a:solidFill>
+            <a:srgbClr val="C00000"/>
+          </a:solidFill>
+          <a:ln>
+            <a:solidFill>
+              <a:schemeClr val="tx1"/>
+            </a:solidFill>
+          </a:ln>
+        </p:spPr>
+        <p:style>
+          <a:lnRef idx="2">
+            <a:schemeClr val="accent1">
+              <a:shade val="15000"/>
+            </a:schemeClr>
+          </a:lnRef>
+          <a:fillRef idx="1">
+            <a:schemeClr val="accent1"/>
+          </a:fillRef>
+          <a:effectRef idx="0">
+            <a:schemeClr val="accent1"/>
+          </a:effectRef>
+          <a:fontRef idx="minor">
+            <a:schemeClr val="lt1"/>
+          </a:fontRef>
+        </p:style>
+        <p:txBody>
+          <a:bodyPr rtlCol="0" anchor="ctr"/>
+          <a:lstStyle/>
+          <a:p>
+            <a:endParaRPr lang="en-US" sz="3200" b="1" dirty="0">
+              <a:solidFill>
+                <a:schemeClr val="tx1"/>
+              </a:solidFill>
+              <a:latin typeface="Segoe UI Variable Text" pitchFamily="2" charset="0"/>
+              <a:ea typeface="Segoe UI Black" panose="020B0A02040204020203" pitchFamily="34" charset="0"/>
+              <a:cs typeface="Segoe UI Semibold" panose="020B0702040204020203" pitchFamily="34" charset="0"/>
+            </a:endParaRPr>
+          </a:p>
+        </p:txBody>
+      </p:sp>
+      <p:pic>
+        <p:nvPicPr>
+          <p:cNvPr id="24" name="Picture 23" hidden="1">
+            <a:extLst>
+              <a:ext uri="{FF2B5EF4-FFF2-40B4-BE49-F238E27FC236}">
+                <a16:creationId xmlns:a16="http://schemas.microsoft.com/office/drawing/2014/main" id="{A9DE2416-A5E5-C1F1-38C6-AAAFFF966EE8}"/>
+              </a:ext>
+            </a:extLst>
+          </p:cNvPr>
+          <p:cNvPicPr>
+            <a:picLocks noChangeAspect="1"/>
+          </p:cNvPicPr>
+          <p:nvPr/>
+        </p:nvPicPr>
+        <p:blipFill>
+          <a:blip r:embed="rId2"/>
+          <a:stretch>
+            <a:fillRect/>
+          </a:stretch>
+        </p:blipFill>
+        <p:spPr>
+          <a:xfrm>
+            <a:off x="2694357" y="1393035"/>
+            <a:ext cx="6803889" cy="3845169"/>
+          </a:xfrm>
+          <a:prstGeom prst="rect">
+            <a:avLst/>
+          </a:prstGeom>
+        </p:spPr>
+      </p:pic>
+      <p:pic>
+        <p:nvPicPr>
+          <p:cNvPr id="26" name="Picture 25" hidden="1">
+            <a:extLst>
+              <a:ext uri="{FF2B5EF4-FFF2-40B4-BE49-F238E27FC236}">
+                <a16:creationId xmlns:a16="http://schemas.microsoft.com/office/drawing/2014/main" id="{D719C3C0-F62A-D7E8-E9D3-962ADA4F96A8}"/>
+              </a:ext>
+            </a:extLst>
+          </p:cNvPr>
+          <p:cNvPicPr>
+            <a:picLocks noChangeAspect="1"/>
+          </p:cNvPicPr>
+          <p:nvPr/>
+        </p:nvPicPr>
+        <p:blipFill>
+          <a:blip r:embed="rId3"/>
+          <a:stretch>
+            <a:fillRect/>
+          </a:stretch>
+        </p:blipFill>
+        <p:spPr>
+          <a:xfrm>
+            <a:off x="9854862" y="1393035"/>
+            <a:ext cx="6796655" cy="7339484"/>
+          </a:xfrm>
+          <a:prstGeom prst="rect">
+            <a:avLst/>
+          </a:prstGeom>
+        </p:spPr>
+      </p:pic>
+      <p:pic>
+        <p:nvPicPr>
+          <p:cNvPr id="28" name="Picture 27" hidden="1">
+            <a:extLst>
+              <a:ext uri="{FF2B5EF4-FFF2-40B4-BE49-F238E27FC236}">
+                <a16:creationId xmlns:a16="http://schemas.microsoft.com/office/drawing/2014/main" id="{E39E14BF-EB3C-BE1B-897B-40CC31673E12}"/>
+              </a:ext>
+            </a:extLst>
+          </p:cNvPr>
+          <p:cNvPicPr>
+            <a:picLocks noChangeAspect="1"/>
+          </p:cNvPicPr>
+          <p:nvPr/>
+        </p:nvPicPr>
+        <p:blipFill>
+          <a:blip r:embed="rId4"/>
+          <a:stretch>
+            <a:fillRect/>
+          </a:stretch>
+        </p:blipFill>
+        <p:spPr>
+          <a:xfrm>
+            <a:off x="2694357" y="5572561"/>
+            <a:ext cx="6803887" cy="3159957"/>
+          </a:xfrm>
+          <a:prstGeom prst="rect">
+            <a:avLst/>
+          </a:prstGeom>
+        </p:spPr>
+      </p:pic>
+      <p:sp>
+        <p:nvSpPr>
+          <p:cNvPr id="3" name="Rectangle: Top Corners Rounded 2">
+            <a:extLst>
+              <a:ext uri="{FF2B5EF4-FFF2-40B4-BE49-F238E27FC236}">
+                <a16:creationId xmlns:a16="http://schemas.microsoft.com/office/drawing/2014/main" id="{64CD3283-EBC8-A8A8-F7D2-A5A72EB53258}"/>
+              </a:ext>
+            </a:extLst>
+          </p:cNvPr>
+          <p:cNvSpPr/>
+          <p:nvPr/>
+        </p:nvSpPr>
+        <p:spPr>
+          <a:xfrm rot="5400000">
+            <a:off x="-3430417" y="3420759"/>
+            <a:ext cx="9144000" cy="2302482"/>
+          </a:xfrm>
+          <a:prstGeom prst="round2SameRect">
+            <a:avLst>
+              <a:gd name="adj1" fmla="val 0"/>
+              <a:gd name="adj2" fmla="val 0"/>
+            </a:avLst>
+          </a:prstGeom>
+          <a:solidFill>
+            <a:srgbClr val="B2292E"/>
+          </a:solidFill>
+          <a:ln>
+            <a:noFill/>
+          </a:ln>
+        </p:spPr>
+        <p:style>
+          <a:lnRef idx="2">
+            <a:schemeClr val="accent1">
+              <a:shade val="15000"/>
+            </a:schemeClr>
+          </a:lnRef>
+          <a:fillRef idx="1">
+            <a:schemeClr val="accent1"/>
+          </a:fillRef>
+          <a:effectRef idx="0">
+            <a:schemeClr val="accent1"/>
+          </a:effectRef>
+          <a:fontRef idx="minor">
+            <a:schemeClr val="lt1"/>
+          </a:fontRef>
+        </p:style>
+        <p:txBody>
+          <a:bodyPr rtlCol="0" anchor="ctr"/>
+          <a:lstStyle/>
+          <a:p>
+            <a:pPr algn="ctr"/>
+            <a:endParaRPr lang="en-US" dirty="0"/>
+          </a:p>
+        </p:txBody>
+      </p:sp>
+      <p:sp>
+        <p:nvSpPr>
+          <p:cNvPr id="2" name="Rectangle: Rounded Corners 1">
+            <a:extLst>
+              <a:ext uri="{FF2B5EF4-FFF2-40B4-BE49-F238E27FC236}">
+                <a16:creationId xmlns:a16="http://schemas.microsoft.com/office/drawing/2014/main" id="{881DD4F1-C2ED-BCCF-358B-D00C5FDCA7FA}"/>
+              </a:ext>
+            </a:extLst>
+          </p:cNvPr>
+          <p:cNvSpPr/>
+          <p:nvPr/>
+        </p:nvSpPr>
+        <p:spPr>
+          <a:xfrm>
+            <a:off x="9266132" y="4711700"/>
+            <a:ext cx="7682946" cy="4020819"/>
+          </a:xfrm>
+          <a:prstGeom prst="roundRect">
+            <a:avLst>
+              <a:gd name="adj" fmla="val 3896"/>
+            </a:avLst>
+          </a:prstGeom>
+          <a:solidFill>
+            <a:schemeClr val="bg1"/>
+          </a:solidFill>
+          <a:ln>
+            <a:noFill/>
+          </a:ln>
+          <a:effectLst>
+            <a:outerShdw blurRad="50800" dist="50800" dir="5400000" sx="102000" sy="102000" algn="ctr" rotWithShape="0">
+              <a:srgbClr val="000000">
+                <a:alpha val="10000"/>
+              </a:srgbClr>
+            </a:outerShdw>
+          </a:effectLst>
+        </p:spPr>
+        <p:style>
+          <a:lnRef idx="2">
+            <a:schemeClr val="accent1">
+              <a:shade val="15000"/>
+            </a:schemeClr>
+          </a:lnRef>
+          <a:fillRef idx="1">
+            <a:schemeClr val="accent1"/>
+          </a:fillRef>
+          <a:effectRef idx="0">
+            <a:schemeClr val="accent1"/>
+          </a:effectRef>
+          <a:fontRef idx="minor">
+            <a:schemeClr val="lt1"/>
+          </a:fontRef>
+        </p:style>
+        <p:txBody>
+          <a:bodyPr rtlCol="0" anchor="ctr"/>
+          <a:lstStyle/>
+          <a:p>
+            <a:endParaRPr lang="en-US" sz="3200" b="1">
+              <a:solidFill>
+                <a:schemeClr val="tx1"/>
+              </a:solidFill>
+              <a:latin typeface="Segoe UI Variable Text" pitchFamily="2" charset="0"/>
+              <a:ea typeface="Segoe UI Black" panose="020B0A02040204020203" pitchFamily="34" charset="0"/>
+              <a:cs typeface="Segoe UI Semibold" panose="020B0702040204020203" pitchFamily="34" charset="0"/>
+            </a:endParaRPr>
+          </a:p>
+        </p:txBody>
+      </p:sp>
+    </p:spTree>
+    <p:extLst>
+      <p:ext uri="{BB962C8B-B14F-4D97-AF65-F5344CB8AC3E}">
+        <p14:creationId xmlns:p14="http://schemas.microsoft.com/office/powerpoint/2010/main" val="1921429586"/>
       </p:ext>
     </p:extLst>
   </p:cSld>

--- a/Power BI Report/Background/Dashboard Layout.pptx
+++ b/Power BI Report/Background/Dashboard Layout.pptx
@@ -248,7 +248,7 @@
           <a:p>
             <a:fld id="{7A2C6692-EA0D-4861-862E-DDC209ABBD47}" type="datetimeFigureOut">
               <a:rPr lang="en-US" smtClean="0"/>
-              <a:t>12/4/2025</a:t>
+              <a:t>12/11/2025</a:t>
             </a:fld>
             <a:endParaRPr lang="en-US"/>
           </a:p>
@@ -418,7 +418,7 @@
           <a:p>
             <a:fld id="{7A2C6692-EA0D-4861-862E-DDC209ABBD47}" type="datetimeFigureOut">
               <a:rPr lang="en-US" smtClean="0"/>
-              <a:t>12/4/2025</a:t>
+              <a:t>12/11/2025</a:t>
             </a:fld>
             <a:endParaRPr lang="en-US"/>
           </a:p>
@@ -598,7 +598,7 @@
           <a:p>
             <a:fld id="{7A2C6692-EA0D-4861-862E-DDC209ABBD47}" type="datetimeFigureOut">
               <a:rPr lang="en-US" smtClean="0"/>
-              <a:t>12/4/2025</a:t>
+              <a:t>12/11/2025</a:t>
             </a:fld>
             <a:endParaRPr lang="en-US"/>
           </a:p>
@@ -768,7 +768,7 @@
           <a:p>
             <a:fld id="{7A2C6692-EA0D-4861-862E-DDC209ABBD47}" type="datetimeFigureOut">
               <a:rPr lang="en-US" smtClean="0"/>
-              <a:t>12/4/2025</a:t>
+              <a:t>12/11/2025</a:t>
             </a:fld>
             <a:endParaRPr lang="en-US"/>
           </a:p>
@@ -1014,7 +1014,7 @@
           <a:p>
             <a:fld id="{7A2C6692-EA0D-4861-862E-DDC209ABBD47}" type="datetimeFigureOut">
               <a:rPr lang="en-US" smtClean="0"/>
-              <a:t>12/4/2025</a:t>
+              <a:t>12/11/2025</a:t>
             </a:fld>
             <a:endParaRPr lang="en-US"/>
           </a:p>
@@ -1246,7 +1246,7 @@
           <a:p>
             <a:fld id="{7A2C6692-EA0D-4861-862E-DDC209ABBD47}" type="datetimeFigureOut">
               <a:rPr lang="en-US" smtClean="0"/>
-              <a:t>12/4/2025</a:t>
+              <a:t>12/11/2025</a:t>
             </a:fld>
             <a:endParaRPr lang="en-US"/>
           </a:p>
@@ -1613,7 +1613,7 @@
           <a:p>
             <a:fld id="{7A2C6692-EA0D-4861-862E-DDC209ABBD47}" type="datetimeFigureOut">
               <a:rPr lang="en-US" smtClean="0"/>
-              <a:t>12/4/2025</a:t>
+              <a:t>12/11/2025</a:t>
             </a:fld>
             <a:endParaRPr lang="en-US"/>
           </a:p>
@@ -1731,7 +1731,7 @@
           <a:p>
             <a:fld id="{7A2C6692-EA0D-4861-862E-DDC209ABBD47}" type="datetimeFigureOut">
               <a:rPr lang="en-US" smtClean="0"/>
-              <a:t>12/4/2025</a:t>
+              <a:t>12/11/2025</a:t>
             </a:fld>
             <a:endParaRPr lang="en-US"/>
           </a:p>
@@ -1826,7 +1826,7 @@
           <a:p>
             <a:fld id="{7A2C6692-EA0D-4861-862E-DDC209ABBD47}" type="datetimeFigureOut">
               <a:rPr lang="en-US" smtClean="0"/>
-              <a:t>12/4/2025</a:t>
+              <a:t>12/11/2025</a:t>
             </a:fld>
             <a:endParaRPr lang="en-US"/>
           </a:p>
@@ -2103,7 +2103,7 @@
           <a:p>
             <a:fld id="{7A2C6692-EA0D-4861-862E-DDC209ABBD47}" type="datetimeFigureOut">
               <a:rPr lang="en-US" smtClean="0"/>
-              <a:t>12/4/2025</a:t>
+              <a:t>12/11/2025</a:t>
             </a:fld>
             <a:endParaRPr lang="en-US"/>
           </a:p>
@@ -2360,7 +2360,7 @@
           <a:p>
             <a:fld id="{7A2C6692-EA0D-4861-862E-DDC209ABBD47}" type="datetimeFigureOut">
               <a:rPr lang="en-US" smtClean="0"/>
-              <a:t>12/4/2025</a:t>
+              <a:t>12/11/2025</a:t>
             </a:fld>
             <a:endParaRPr lang="en-US"/>
           </a:p>
@@ -2573,7 +2573,7 @@
           <a:p>
             <a:fld id="{7A2C6692-EA0D-4861-862E-DDC209ABBD47}" type="datetimeFigureOut">
               <a:rPr lang="en-US" smtClean="0"/>
-              <a:t>12/4/2025</a:t>
+              <a:t>12/11/2025</a:t>
             </a:fld>
             <a:endParaRPr lang="en-US"/>
           </a:p>
@@ -3604,7 +3604,7 @@
         </p:nvCxnSpPr>
         <p:spPr>
           <a:xfrm flipH="1">
-            <a:off x="2961558" y="3224550"/>
+            <a:off x="2961558" y="4024650"/>
             <a:ext cx="4732211" cy="0"/>
           </a:xfrm>
           <a:prstGeom prst="straightConnector1">
@@ -4175,7 +4175,7 @@
         <p:spPr>
           <a:xfrm>
             <a:off x="8385488" y="1393036"/>
-            <a:ext cx="8586582" cy="2645564"/>
+            <a:ext cx="8586582" cy="3178964"/>
           </a:xfrm>
           <a:prstGeom prst="roundRect">
             <a:avLst>
@@ -4438,8 +4438,8 @@
         </p:nvSpPr>
         <p:spPr>
           <a:xfrm>
-            <a:off x="8385487" y="4301336"/>
-            <a:ext cx="8586581" cy="4431180"/>
+            <a:off x="8385487" y="4927600"/>
+            <a:ext cx="8586581" cy="3804916"/>
           </a:xfrm>
           <a:prstGeom prst="roundRect">
             <a:avLst>
@@ -7709,8 +7709,8 @@
         </p:nvSpPr>
         <p:spPr>
           <a:xfrm>
-            <a:off x="2694357" y="1393036"/>
-            <a:ext cx="6170243" cy="2950363"/>
+            <a:off x="2694357" y="1393038"/>
+            <a:ext cx="6170243" cy="3111230"/>
           </a:xfrm>
           <a:prstGeom prst="roundRect">
             <a:avLst>
@@ -7776,8 +7776,8 @@
         </p:nvSpPr>
         <p:spPr>
           <a:xfrm>
-            <a:off x="2694357" y="4711700"/>
-            <a:ext cx="6170243" cy="4020819"/>
+            <a:off x="2694357" y="4842933"/>
+            <a:ext cx="6170243" cy="3889586"/>
           </a:xfrm>
           <a:prstGeom prst="roundRect">
             <a:avLst>
@@ -7843,8 +7843,8 @@
         </p:nvSpPr>
         <p:spPr>
           <a:xfrm>
-            <a:off x="9266132" y="1393037"/>
-            <a:ext cx="7705938" cy="2950362"/>
+            <a:off x="9266132" y="1393038"/>
+            <a:ext cx="7705938" cy="3111229"/>
           </a:xfrm>
           <a:prstGeom prst="roundRect">
             <a:avLst>
@@ -8447,8 +8447,8 @@
         </p:nvSpPr>
         <p:spPr>
           <a:xfrm>
-            <a:off x="9266132" y="4711700"/>
-            <a:ext cx="7682946" cy="4020819"/>
+            <a:off x="9266132" y="4842933"/>
+            <a:ext cx="7682946" cy="3889586"/>
           </a:xfrm>
           <a:prstGeom prst="roundRect">
             <a:avLst>

--- a/Power BI Report/Background/Dashboard Layout.pptx
+++ b/Power BI Report/Background/Dashboard Layout.pptx
@@ -6,11 +6,12 @@
   </p:sldMasterIdLst>
   <p:sldIdLst>
     <p:sldId id="258" r:id="rId2"/>
-    <p:sldId id="257" r:id="rId3"/>
-    <p:sldId id="256" r:id="rId4"/>
-    <p:sldId id="259" r:id="rId5"/>
-    <p:sldId id="260" r:id="rId6"/>
-    <p:sldId id="261" r:id="rId7"/>
+    <p:sldId id="261" r:id="rId3"/>
+    <p:sldId id="257" r:id="rId4"/>
+    <p:sldId id="256" r:id="rId5"/>
+    <p:sldId id="262" r:id="rId6"/>
+    <p:sldId id="259" r:id="rId7"/>
+    <p:sldId id="260" r:id="rId8"/>
   </p:sldIdLst>
   <p:sldSz cx="17373600" cy="9144000"/>
   <p:notesSz cx="6858000" cy="9144000"/>
@@ -248,7 +249,7 @@
           <a:p>
             <a:fld id="{7A2C6692-EA0D-4861-862E-DDC209ABBD47}" type="datetimeFigureOut">
               <a:rPr lang="en-US" smtClean="0"/>
-              <a:t>12/11/2025</a:t>
+              <a:t>12/12/2025</a:t>
             </a:fld>
             <a:endParaRPr lang="en-US"/>
           </a:p>
@@ -418,7 +419,7 @@
           <a:p>
             <a:fld id="{7A2C6692-EA0D-4861-862E-DDC209ABBD47}" type="datetimeFigureOut">
               <a:rPr lang="en-US" smtClean="0"/>
-              <a:t>12/11/2025</a:t>
+              <a:t>12/12/2025</a:t>
             </a:fld>
             <a:endParaRPr lang="en-US"/>
           </a:p>
@@ -598,7 +599,7 @@
           <a:p>
             <a:fld id="{7A2C6692-EA0D-4861-862E-DDC209ABBD47}" type="datetimeFigureOut">
               <a:rPr lang="en-US" smtClean="0"/>
-              <a:t>12/11/2025</a:t>
+              <a:t>12/12/2025</a:t>
             </a:fld>
             <a:endParaRPr lang="en-US"/>
           </a:p>
@@ -768,7 +769,7 @@
           <a:p>
             <a:fld id="{7A2C6692-EA0D-4861-862E-DDC209ABBD47}" type="datetimeFigureOut">
               <a:rPr lang="en-US" smtClean="0"/>
-              <a:t>12/11/2025</a:t>
+              <a:t>12/12/2025</a:t>
             </a:fld>
             <a:endParaRPr lang="en-US"/>
           </a:p>
@@ -1014,7 +1015,7 @@
           <a:p>
             <a:fld id="{7A2C6692-EA0D-4861-862E-DDC209ABBD47}" type="datetimeFigureOut">
               <a:rPr lang="en-US" smtClean="0"/>
-              <a:t>12/11/2025</a:t>
+              <a:t>12/12/2025</a:t>
             </a:fld>
             <a:endParaRPr lang="en-US"/>
           </a:p>
@@ -1246,7 +1247,7 @@
           <a:p>
             <a:fld id="{7A2C6692-EA0D-4861-862E-DDC209ABBD47}" type="datetimeFigureOut">
               <a:rPr lang="en-US" smtClean="0"/>
-              <a:t>12/11/2025</a:t>
+              <a:t>12/12/2025</a:t>
             </a:fld>
             <a:endParaRPr lang="en-US"/>
           </a:p>
@@ -1613,7 +1614,7 @@
           <a:p>
             <a:fld id="{7A2C6692-EA0D-4861-862E-DDC209ABBD47}" type="datetimeFigureOut">
               <a:rPr lang="en-US" smtClean="0"/>
-              <a:t>12/11/2025</a:t>
+              <a:t>12/12/2025</a:t>
             </a:fld>
             <a:endParaRPr lang="en-US"/>
           </a:p>
@@ -1731,7 +1732,7 @@
           <a:p>
             <a:fld id="{7A2C6692-EA0D-4861-862E-DDC209ABBD47}" type="datetimeFigureOut">
               <a:rPr lang="en-US" smtClean="0"/>
-              <a:t>12/11/2025</a:t>
+              <a:t>12/12/2025</a:t>
             </a:fld>
             <a:endParaRPr lang="en-US"/>
           </a:p>
@@ -1826,7 +1827,7 @@
           <a:p>
             <a:fld id="{7A2C6692-EA0D-4861-862E-DDC209ABBD47}" type="datetimeFigureOut">
               <a:rPr lang="en-US" smtClean="0"/>
-              <a:t>12/11/2025</a:t>
+              <a:t>12/12/2025</a:t>
             </a:fld>
             <a:endParaRPr lang="en-US"/>
           </a:p>
@@ -2103,7 +2104,7 @@
           <a:p>
             <a:fld id="{7A2C6692-EA0D-4861-862E-DDC209ABBD47}" type="datetimeFigureOut">
               <a:rPr lang="en-US" smtClean="0"/>
-              <a:t>12/11/2025</a:t>
+              <a:t>12/12/2025</a:t>
             </a:fld>
             <a:endParaRPr lang="en-US"/>
           </a:p>
@@ -2360,7 +2361,7 @@
           <a:p>
             <a:fld id="{7A2C6692-EA0D-4861-862E-DDC209ABBD47}" type="datetimeFigureOut">
               <a:rPr lang="en-US" smtClean="0"/>
-              <a:t>12/11/2025</a:t>
+              <a:t>12/12/2025</a:t>
             </a:fld>
             <a:endParaRPr lang="en-US"/>
           </a:p>
@@ -2573,7 +2574,7 @@
           <a:p>
             <a:fld id="{7A2C6692-EA0D-4861-862E-DDC209ABBD47}" type="datetimeFigureOut">
               <a:rPr lang="en-US" smtClean="0"/>
-              <a:t>12/11/2025</a:t>
+              <a:t>12/12/2025</a:t>
             </a:fld>
             <a:endParaRPr lang="en-US"/>
           </a:p>
@@ -3073,7 +3074,7 @@
                 <a:ea typeface="Segoe UI Black" panose="020B0A02040204020203" pitchFamily="34" charset="0"/>
                 <a:cs typeface="Segoe UI Semibold" panose="020B0702040204020203" pitchFamily="34" charset="0"/>
               </a:rPr>
-              <a:t>Summarize the number of respondents and their demographics.</a:t>
+              <a:t>Summarize the number of respondents and their demographics</a:t>
             </a:r>
           </a:p>
         </p:txBody>
@@ -3796,6 +3797,847 @@
 </file>
 
 <file path=ppt/slides/slide2.xml><?xml version="1.0" encoding="utf-8"?>
+<p:sld xmlns:a="http://schemas.openxmlformats.org/drawingml/2006/main" xmlns:r="http://schemas.openxmlformats.org/officeDocument/2006/relationships" xmlns:p="http://schemas.openxmlformats.org/presentationml/2006/main">
+  <p:cSld>
+    <p:spTree>
+      <p:nvGrpSpPr>
+        <p:cNvPr id="1" name="">
+          <a:extLst>
+            <a:ext uri="{FF2B5EF4-FFF2-40B4-BE49-F238E27FC236}">
+              <a16:creationId xmlns:a16="http://schemas.microsoft.com/office/drawing/2014/main" id="{146C7F3B-8DDA-429B-9FB9-7C764EFD9B4E}"/>
+            </a:ext>
+          </a:extLst>
+        </p:cNvPr>
+        <p:cNvGrpSpPr/>
+        <p:nvPr/>
+      </p:nvGrpSpPr>
+      <p:grpSpPr>
+        <a:xfrm>
+          <a:off x="0" y="0"/>
+          <a:ext cx="0" cy="0"/>
+          <a:chOff x="0" y="0"/>
+          <a:chExt cx="0" cy="0"/>
+        </a:xfrm>
+      </p:grpSpPr>
+      <p:sp>
+        <p:nvSpPr>
+          <p:cNvPr id="12" name="Rectangle: Rounded Corners 11">
+            <a:extLst>
+              <a:ext uri="{FF2B5EF4-FFF2-40B4-BE49-F238E27FC236}">
+                <a16:creationId xmlns:a16="http://schemas.microsoft.com/office/drawing/2014/main" id="{7D2EAEA5-0C48-F5B1-2B81-AD31A083A683}"/>
+              </a:ext>
+            </a:extLst>
+          </p:cNvPr>
+          <p:cNvSpPr/>
+          <p:nvPr/>
+        </p:nvSpPr>
+        <p:spPr>
+          <a:xfrm>
+            <a:off x="2694357" y="1393038"/>
+            <a:ext cx="6170243" cy="3111230"/>
+          </a:xfrm>
+          <a:prstGeom prst="roundRect">
+            <a:avLst>
+              <a:gd name="adj" fmla="val 4246"/>
+            </a:avLst>
+          </a:prstGeom>
+          <a:solidFill>
+            <a:schemeClr val="bg1"/>
+          </a:solidFill>
+          <a:ln>
+            <a:noFill/>
+          </a:ln>
+          <a:effectLst>
+            <a:outerShdw blurRad="50800" dist="50800" dir="5400000" sx="102000" sy="102000" algn="ctr" rotWithShape="0">
+              <a:srgbClr val="000000">
+                <a:alpha val="10000"/>
+              </a:srgbClr>
+            </a:outerShdw>
+          </a:effectLst>
+        </p:spPr>
+        <p:style>
+          <a:lnRef idx="2">
+            <a:schemeClr val="accent1">
+              <a:shade val="15000"/>
+            </a:schemeClr>
+          </a:lnRef>
+          <a:fillRef idx="1">
+            <a:schemeClr val="accent1"/>
+          </a:fillRef>
+          <a:effectRef idx="0">
+            <a:schemeClr val="accent1"/>
+          </a:effectRef>
+          <a:fontRef idx="minor">
+            <a:schemeClr val="lt1"/>
+          </a:fontRef>
+        </p:style>
+        <p:txBody>
+          <a:bodyPr rtlCol="0" anchor="ctr"/>
+          <a:lstStyle/>
+          <a:p>
+            <a:endParaRPr lang="en-US" sz="3200" b="1">
+              <a:solidFill>
+                <a:schemeClr val="tx1"/>
+              </a:solidFill>
+              <a:latin typeface="Segoe UI Variable Text" pitchFamily="2" charset="0"/>
+              <a:ea typeface="Segoe UI Black" panose="020B0A02040204020203" pitchFamily="34" charset="0"/>
+              <a:cs typeface="Segoe UI Semibold" panose="020B0702040204020203" pitchFamily="34" charset="0"/>
+            </a:endParaRPr>
+          </a:p>
+        </p:txBody>
+      </p:sp>
+      <p:sp>
+        <p:nvSpPr>
+          <p:cNvPr id="31" name="Rectangle: Rounded Corners 30">
+            <a:extLst>
+              <a:ext uri="{FF2B5EF4-FFF2-40B4-BE49-F238E27FC236}">
+                <a16:creationId xmlns:a16="http://schemas.microsoft.com/office/drawing/2014/main" id="{E912672E-CC72-1638-0B2D-1F04ACC134BD}"/>
+              </a:ext>
+            </a:extLst>
+          </p:cNvPr>
+          <p:cNvSpPr/>
+          <p:nvPr/>
+        </p:nvSpPr>
+        <p:spPr>
+          <a:xfrm>
+            <a:off x="2694357" y="4842933"/>
+            <a:ext cx="6170243" cy="3889586"/>
+          </a:xfrm>
+          <a:prstGeom prst="roundRect">
+            <a:avLst>
+              <a:gd name="adj" fmla="val 4246"/>
+            </a:avLst>
+          </a:prstGeom>
+          <a:solidFill>
+            <a:schemeClr val="bg1"/>
+          </a:solidFill>
+          <a:ln>
+            <a:noFill/>
+          </a:ln>
+          <a:effectLst>
+            <a:outerShdw blurRad="50800" dist="50800" dir="5400000" sx="102000" sy="102000" algn="ctr" rotWithShape="0">
+              <a:srgbClr val="000000">
+                <a:alpha val="10000"/>
+              </a:srgbClr>
+            </a:outerShdw>
+          </a:effectLst>
+        </p:spPr>
+        <p:style>
+          <a:lnRef idx="2">
+            <a:schemeClr val="accent1">
+              <a:shade val="15000"/>
+            </a:schemeClr>
+          </a:lnRef>
+          <a:fillRef idx="1">
+            <a:schemeClr val="accent1"/>
+          </a:fillRef>
+          <a:effectRef idx="0">
+            <a:schemeClr val="accent1"/>
+          </a:effectRef>
+          <a:fontRef idx="minor">
+            <a:schemeClr val="lt1"/>
+          </a:fontRef>
+        </p:style>
+        <p:txBody>
+          <a:bodyPr rtlCol="0" anchor="ctr"/>
+          <a:lstStyle/>
+          <a:p>
+            <a:endParaRPr lang="en-US" sz="3200" b="1">
+              <a:solidFill>
+                <a:schemeClr val="tx1"/>
+              </a:solidFill>
+              <a:latin typeface="Segoe UI Variable Text" pitchFamily="2" charset="0"/>
+              <a:ea typeface="Segoe UI Black" panose="020B0A02040204020203" pitchFamily="34" charset="0"/>
+              <a:cs typeface="Segoe UI Semibold" panose="020B0702040204020203" pitchFamily="34" charset="0"/>
+            </a:endParaRPr>
+          </a:p>
+        </p:txBody>
+      </p:sp>
+      <p:sp>
+        <p:nvSpPr>
+          <p:cNvPr id="32" name="Rectangle: Rounded Corners 31">
+            <a:extLst>
+              <a:ext uri="{FF2B5EF4-FFF2-40B4-BE49-F238E27FC236}">
+                <a16:creationId xmlns:a16="http://schemas.microsoft.com/office/drawing/2014/main" id="{787F1D21-1496-D581-CE99-18BDD7A432EE}"/>
+              </a:ext>
+            </a:extLst>
+          </p:cNvPr>
+          <p:cNvSpPr/>
+          <p:nvPr/>
+        </p:nvSpPr>
+        <p:spPr>
+          <a:xfrm>
+            <a:off x="9266132" y="1393038"/>
+            <a:ext cx="7705938" cy="3111229"/>
+          </a:xfrm>
+          <a:prstGeom prst="roundRect">
+            <a:avLst>
+              <a:gd name="adj" fmla="val 4620"/>
+            </a:avLst>
+          </a:prstGeom>
+          <a:solidFill>
+            <a:schemeClr val="bg1"/>
+          </a:solidFill>
+          <a:ln>
+            <a:noFill/>
+          </a:ln>
+          <a:effectLst>
+            <a:outerShdw blurRad="50800" dist="50800" dir="5400000" sx="102000" sy="102000" algn="ctr" rotWithShape="0">
+              <a:srgbClr val="000000">
+                <a:alpha val="10000"/>
+              </a:srgbClr>
+            </a:outerShdw>
+          </a:effectLst>
+        </p:spPr>
+        <p:style>
+          <a:lnRef idx="2">
+            <a:schemeClr val="accent1">
+              <a:shade val="15000"/>
+            </a:schemeClr>
+          </a:lnRef>
+          <a:fillRef idx="1">
+            <a:schemeClr val="accent1"/>
+          </a:fillRef>
+          <a:effectRef idx="0">
+            <a:schemeClr val="accent1"/>
+          </a:effectRef>
+          <a:fontRef idx="minor">
+            <a:schemeClr val="lt1"/>
+          </a:fontRef>
+        </p:style>
+        <p:txBody>
+          <a:bodyPr rtlCol="0" anchor="ctr"/>
+          <a:lstStyle/>
+          <a:p>
+            <a:endParaRPr lang="en-US" sz="3200" b="1">
+              <a:solidFill>
+                <a:schemeClr val="tx1"/>
+              </a:solidFill>
+              <a:latin typeface="Segoe UI Variable Text" pitchFamily="2" charset="0"/>
+              <a:ea typeface="Segoe UI Black" panose="020B0A02040204020203" pitchFamily="34" charset="0"/>
+              <a:cs typeface="Segoe UI Semibold" panose="020B0702040204020203" pitchFamily="34" charset="0"/>
+            </a:endParaRPr>
+          </a:p>
+        </p:txBody>
+      </p:sp>
+      <p:sp>
+        <p:nvSpPr>
+          <p:cNvPr id="11" name="Rectangle 10">
+            <a:extLst>
+              <a:ext uri="{FF2B5EF4-FFF2-40B4-BE49-F238E27FC236}">
+                <a16:creationId xmlns:a16="http://schemas.microsoft.com/office/drawing/2014/main" id="{937BC82D-D0CC-4930-F364-399E26C4FFE0}"/>
+              </a:ext>
+            </a:extLst>
+          </p:cNvPr>
+          <p:cNvSpPr>
+            <a:spLocks noGrp="1" noRot="1" noMove="1" noResize="1" noEditPoints="1" noAdjustHandles="1" noChangeArrowheads="1" noChangeShapeType="1"/>
+          </p:cNvSpPr>
+          <p:nvPr/>
+        </p:nvSpPr>
+        <p:spPr>
+          <a:xfrm>
+            <a:off x="2694357" y="411480"/>
+            <a:ext cx="13949917" cy="816819"/>
+          </a:xfrm>
+          <a:prstGeom prst="rect">
+            <a:avLst/>
+          </a:prstGeom>
+          <a:noFill/>
+          <a:ln>
+            <a:noFill/>
+          </a:ln>
+        </p:spPr>
+        <p:style>
+          <a:lnRef idx="2">
+            <a:schemeClr val="accent1">
+              <a:shade val="15000"/>
+            </a:schemeClr>
+          </a:lnRef>
+          <a:fillRef idx="1">
+            <a:schemeClr val="accent1"/>
+          </a:fillRef>
+          <a:effectRef idx="0">
+            <a:schemeClr val="accent1"/>
+          </a:effectRef>
+          <a:fontRef idx="minor">
+            <a:schemeClr val="lt1"/>
+          </a:fontRef>
+        </p:style>
+        <p:txBody>
+          <a:bodyPr rtlCol="0" anchor="ctr"/>
+          <a:lstStyle/>
+          <a:p>
+            <a:pPr>
+              <a:lnSpc>
+                <a:spcPts val="3000"/>
+              </a:lnSpc>
+            </a:pPr>
+            <a:r>
+              <a:rPr lang="en-US" sz="3200" b="1" dirty="0">
+                <a:solidFill>
+                  <a:schemeClr val="tx1"/>
+                </a:solidFill>
+                <a:latin typeface="Segoe UI Variable Text" pitchFamily="2" charset="0"/>
+                <a:ea typeface="Segoe UI Black" panose="020B0A02040204020203" pitchFamily="34" charset="0"/>
+                <a:cs typeface="Segoe UI Semibold" panose="020B0702040204020203" pitchFamily="34" charset="0"/>
+              </a:rPr>
+              <a:t>Customer Behavior Analysis</a:t>
+            </a:r>
+          </a:p>
+          <a:p>
+            <a:pPr>
+              <a:lnSpc>
+                <a:spcPts val="3000"/>
+              </a:lnSpc>
+            </a:pPr>
+            <a:r>
+              <a:rPr lang="en-US" dirty="0">
+                <a:solidFill>
+                  <a:schemeClr val="tx1"/>
+                </a:solidFill>
+                <a:latin typeface="Segoe UI Variable Display Light" pitchFamily="2" charset="0"/>
+                <a:ea typeface="Segoe UI Black" panose="020B0A02040204020203" pitchFamily="34" charset="0"/>
+                <a:cs typeface="Segoe UI Semibold" panose="020B0702040204020203" pitchFamily="34" charset="0"/>
+              </a:rPr>
+              <a:t>Analyzing customer activity, peak times, and store preference drivers</a:t>
+            </a:r>
+          </a:p>
+        </p:txBody>
+      </p:sp>
+      <p:sp>
+        <p:nvSpPr>
+          <p:cNvPr id="14" name="Rectangle 13" hidden="1">
+            <a:extLst>
+              <a:ext uri="{FF2B5EF4-FFF2-40B4-BE49-F238E27FC236}">
+                <a16:creationId xmlns:a16="http://schemas.microsoft.com/office/drawing/2014/main" id="{86D7049E-3B79-C7BA-E8F9-382DACC8F264}"/>
+              </a:ext>
+            </a:extLst>
+          </p:cNvPr>
+          <p:cNvSpPr>
+            <a:spLocks noGrp="1" noRot="1" noMove="1" noResize="1" noEditPoints="1" noAdjustHandles="1" noChangeArrowheads="1" noChangeShapeType="1"/>
+          </p:cNvSpPr>
+          <p:nvPr/>
+        </p:nvSpPr>
+        <p:spPr>
+          <a:xfrm>
+            <a:off x="217716" y="0"/>
+            <a:ext cx="417282" cy="9144000"/>
+          </a:xfrm>
+          <a:prstGeom prst="rect">
+            <a:avLst/>
+          </a:prstGeom>
+          <a:noFill/>
+          <a:ln>
+            <a:solidFill>
+              <a:schemeClr val="tx1"/>
+            </a:solidFill>
+          </a:ln>
+        </p:spPr>
+        <p:style>
+          <a:lnRef idx="2">
+            <a:schemeClr val="accent1">
+              <a:shade val="15000"/>
+            </a:schemeClr>
+          </a:lnRef>
+          <a:fillRef idx="1">
+            <a:schemeClr val="accent1"/>
+          </a:fillRef>
+          <a:effectRef idx="0">
+            <a:schemeClr val="accent1"/>
+          </a:effectRef>
+          <a:fontRef idx="minor">
+            <a:schemeClr val="lt1"/>
+          </a:fontRef>
+        </p:style>
+        <p:txBody>
+          <a:bodyPr rtlCol="0" anchor="ctr"/>
+          <a:lstStyle/>
+          <a:p>
+            <a:endParaRPr lang="en-US" sz="3200" b="1">
+              <a:solidFill>
+                <a:schemeClr val="tx1"/>
+              </a:solidFill>
+              <a:latin typeface="Segoe UI Variable Text" pitchFamily="2" charset="0"/>
+              <a:ea typeface="Segoe UI Black" panose="020B0A02040204020203" pitchFamily="34" charset="0"/>
+              <a:cs typeface="Segoe UI Semibold" panose="020B0702040204020203" pitchFamily="34" charset="0"/>
+            </a:endParaRPr>
+          </a:p>
+        </p:txBody>
+      </p:sp>
+      <p:sp>
+        <p:nvSpPr>
+          <p:cNvPr id="15" name="Rectangle 14" hidden="1">
+            <a:extLst>
+              <a:ext uri="{FF2B5EF4-FFF2-40B4-BE49-F238E27FC236}">
+                <a16:creationId xmlns:a16="http://schemas.microsoft.com/office/drawing/2014/main" id="{9CDDD758-5A56-6699-B927-CF7E196D1629}"/>
+              </a:ext>
+            </a:extLst>
+          </p:cNvPr>
+          <p:cNvSpPr>
+            <a:spLocks/>
+          </p:cNvSpPr>
+          <p:nvPr/>
+        </p:nvSpPr>
+        <p:spPr>
+          <a:xfrm>
+            <a:off x="16651518" y="0"/>
+            <a:ext cx="417282" cy="9144000"/>
+          </a:xfrm>
+          <a:prstGeom prst="rect">
+            <a:avLst/>
+          </a:prstGeom>
+          <a:solidFill>
+            <a:srgbClr val="C00000"/>
+          </a:solidFill>
+          <a:ln>
+            <a:solidFill>
+              <a:schemeClr val="tx1"/>
+            </a:solidFill>
+          </a:ln>
+        </p:spPr>
+        <p:style>
+          <a:lnRef idx="2">
+            <a:schemeClr val="accent1">
+              <a:shade val="15000"/>
+            </a:schemeClr>
+          </a:lnRef>
+          <a:fillRef idx="1">
+            <a:schemeClr val="accent1"/>
+          </a:fillRef>
+          <a:effectRef idx="0">
+            <a:schemeClr val="accent1"/>
+          </a:effectRef>
+          <a:fontRef idx="minor">
+            <a:schemeClr val="lt1"/>
+          </a:fontRef>
+        </p:style>
+        <p:txBody>
+          <a:bodyPr rtlCol="0" anchor="ctr"/>
+          <a:lstStyle/>
+          <a:p>
+            <a:endParaRPr lang="en-US" sz="3200" b="1">
+              <a:solidFill>
+                <a:schemeClr val="tx1"/>
+              </a:solidFill>
+              <a:latin typeface="Segoe UI Variable Text" pitchFamily="2" charset="0"/>
+              <a:ea typeface="Segoe UI Black" panose="020B0A02040204020203" pitchFamily="34" charset="0"/>
+              <a:cs typeface="Segoe UI Semibold" panose="020B0702040204020203" pitchFamily="34" charset="0"/>
+            </a:endParaRPr>
+          </a:p>
+        </p:txBody>
+      </p:sp>
+      <p:sp>
+        <p:nvSpPr>
+          <p:cNvPr id="17" name="Rectangle 16" hidden="1">
+            <a:extLst>
+              <a:ext uri="{FF2B5EF4-FFF2-40B4-BE49-F238E27FC236}">
+                <a16:creationId xmlns:a16="http://schemas.microsoft.com/office/drawing/2014/main" id="{3376EE80-42B9-1517-72B9-53460F118D09}"/>
+              </a:ext>
+            </a:extLst>
+          </p:cNvPr>
+          <p:cNvSpPr>
+            <a:spLocks/>
+          </p:cNvSpPr>
+          <p:nvPr/>
+        </p:nvSpPr>
+        <p:spPr>
+          <a:xfrm>
+            <a:off x="2269839" y="0"/>
+            <a:ext cx="417282" cy="9144000"/>
+          </a:xfrm>
+          <a:prstGeom prst="rect">
+            <a:avLst/>
+          </a:prstGeom>
+          <a:solidFill>
+            <a:srgbClr val="C00000"/>
+          </a:solidFill>
+          <a:ln>
+            <a:solidFill>
+              <a:schemeClr val="tx1"/>
+            </a:solidFill>
+          </a:ln>
+        </p:spPr>
+        <p:style>
+          <a:lnRef idx="2">
+            <a:schemeClr val="accent1">
+              <a:shade val="15000"/>
+            </a:schemeClr>
+          </a:lnRef>
+          <a:fillRef idx="1">
+            <a:schemeClr val="accent1"/>
+          </a:fillRef>
+          <a:effectRef idx="0">
+            <a:schemeClr val="accent1"/>
+          </a:effectRef>
+          <a:fontRef idx="minor">
+            <a:schemeClr val="lt1"/>
+          </a:fontRef>
+        </p:style>
+        <p:txBody>
+          <a:bodyPr rtlCol="0" anchor="ctr"/>
+          <a:lstStyle/>
+          <a:p>
+            <a:endParaRPr lang="en-US" sz="3200" b="1">
+              <a:solidFill>
+                <a:schemeClr val="tx1"/>
+              </a:solidFill>
+              <a:latin typeface="Segoe UI Variable Text" pitchFamily="2" charset="0"/>
+              <a:ea typeface="Segoe UI Black" panose="020B0A02040204020203" pitchFamily="34" charset="0"/>
+              <a:cs typeface="Segoe UI Semibold" panose="020B0702040204020203" pitchFamily="34" charset="0"/>
+            </a:endParaRPr>
+          </a:p>
+        </p:txBody>
+      </p:sp>
+      <p:sp>
+        <p:nvSpPr>
+          <p:cNvPr id="19" name="Rectangle 18" hidden="1">
+            <a:extLst>
+              <a:ext uri="{FF2B5EF4-FFF2-40B4-BE49-F238E27FC236}">
+                <a16:creationId xmlns:a16="http://schemas.microsoft.com/office/drawing/2014/main" id="{69881069-E237-BC47-72E9-93BA4C8CF930}"/>
+              </a:ext>
+            </a:extLst>
+          </p:cNvPr>
+          <p:cNvSpPr>
+            <a:spLocks/>
+          </p:cNvSpPr>
+          <p:nvPr/>
+        </p:nvSpPr>
+        <p:spPr>
+          <a:xfrm>
+            <a:off x="9491011" y="0"/>
+            <a:ext cx="356616" cy="9144000"/>
+          </a:xfrm>
+          <a:prstGeom prst="rect">
+            <a:avLst/>
+          </a:prstGeom>
+          <a:solidFill>
+            <a:srgbClr val="C00000"/>
+          </a:solidFill>
+          <a:ln>
+            <a:solidFill>
+              <a:schemeClr val="tx1"/>
+            </a:solidFill>
+          </a:ln>
+        </p:spPr>
+        <p:style>
+          <a:lnRef idx="2">
+            <a:schemeClr val="accent1">
+              <a:shade val="15000"/>
+            </a:schemeClr>
+          </a:lnRef>
+          <a:fillRef idx="1">
+            <a:schemeClr val="accent1"/>
+          </a:fillRef>
+          <a:effectRef idx="0">
+            <a:schemeClr val="accent1"/>
+          </a:effectRef>
+          <a:fontRef idx="minor">
+            <a:schemeClr val="lt1"/>
+          </a:fontRef>
+        </p:style>
+        <p:txBody>
+          <a:bodyPr rtlCol="0" anchor="ctr"/>
+          <a:lstStyle/>
+          <a:p>
+            <a:endParaRPr lang="en-US" sz="3200" b="1">
+              <a:solidFill>
+                <a:schemeClr val="tx1"/>
+              </a:solidFill>
+              <a:latin typeface="Segoe UI Variable Text" pitchFamily="2" charset="0"/>
+              <a:ea typeface="Segoe UI Black" panose="020B0A02040204020203" pitchFamily="34" charset="0"/>
+              <a:cs typeface="Segoe UI Semibold" panose="020B0702040204020203" pitchFamily="34" charset="0"/>
+            </a:endParaRPr>
+          </a:p>
+        </p:txBody>
+      </p:sp>
+      <p:sp>
+        <p:nvSpPr>
+          <p:cNvPr id="20" name="Rectangle 19" hidden="1">
+            <a:extLst>
+              <a:ext uri="{FF2B5EF4-FFF2-40B4-BE49-F238E27FC236}">
+                <a16:creationId xmlns:a16="http://schemas.microsoft.com/office/drawing/2014/main" id="{DEF75066-F27B-E021-7331-A0476486C15D}"/>
+              </a:ext>
+            </a:extLst>
+          </p:cNvPr>
+          <p:cNvSpPr>
+            <a:spLocks/>
+          </p:cNvSpPr>
+          <p:nvPr/>
+        </p:nvSpPr>
+        <p:spPr>
+          <a:xfrm>
+            <a:off x="2687120" y="4902200"/>
+            <a:ext cx="13964397" cy="352188"/>
+          </a:xfrm>
+          <a:prstGeom prst="rect">
+            <a:avLst/>
+          </a:prstGeom>
+          <a:solidFill>
+            <a:srgbClr val="C00000"/>
+          </a:solidFill>
+          <a:ln>
+            <a:solidFill>
+              <a:schemeClr val="tx1"/>
+            </a:solidFill>
+          </a:ln>
+        </p:spPr>
+        <p:style>
+          <a:lnRef idx="2">
+            <a:schemeClr val="accent1">
+              <a:shade val="15000"/>
+            </a:schemeClr>
+          </a:lnRef>
+          <a:fillRef idx="1">
+            <a:schemeClr val="accent1"/>
+          </a:fillRef>
+          <a:effectRef idx="0">
+            <a:schemeClr val="accent1"/>
+          </a:effectRef>
+          <a:fontRef idx="minor">
+            <a:schemeClr val="lt1"/>
+          </a:fontRef>
+        </p:style>
+        <p:txBody>
+          <a:bodyPr rtlCol="0" anchor="ctr"/>
+          <a:lstStyle/>
+          <a:p>
+            <a:endParaRPr lang="en-US" sz="3200" b="1" dirty="0">
+              <a:solidFill>
+                <a:schemeClr val="tx1"/>
+              </a:solidFill>
+              <a:latin typeface="Segoe UI Variable Text" pitchFamily="2" charset="0"/>
+              <a:ea typeface="Segoe UI Black" panose="020B0A02040204020203" pitchFamily="34" charset="0"/>
+              <a:cs typeface="Segoe UI Semibold" panose="020B0702040204020203" pitchFamily="34" charset="0"/>
+            </a:endParaRPr>
+          </a:p>
+        </p:txBody>
+      </p:sp>
+      <p:pic>
+        <p:nvPicPr>
+          <p:cNvPr id="24" name="Picture 23" hidden="1">
+            <a:extLst>
+              <a:ext uri="{FF2B5EF4-FFF2-40B4-BE49-F238E27FC236}">
+                <a16:creationId xmlns:a16="http://schemas.microsoft.com/office/drawing/2014/main" id="{A9DE2416-A5E5-C1F1-38C6-AAAFFF966EE8}"/>
+              </a:ext>
+            </a:extLst>
+          </p:cNvPr>
+          <p:cNvPicPr>
+            <a:picLocks noChangeAspect="1"/>
+          </p:cNvPicPr>
+          <p:nvPr/>
+        </p:nvPicPr>
+        <p:blipFill>
+          <a:blip r:embed="rId2"/>
+          <a:stretch>
+            <a:fillRect/>
+          </a:stretch>
+        </p:blipFill>
+        <p:spPr>
+          <a:xfrm>
+            <a:off x="2694357" y="1393035"/>
+            <a:ext cx="6803889" cy="3845169"/>
+          </a:xfrm>
+          <a:prstGeom prst="rect">
+            <a:avLst/>
+          </a:prstGeom>
+        </p:spPr>
+      </p:pic>
+      <p:pic>
+        <p:nvPicPr>
+          <p:cNvPr id="26" name="Picture 25" hidden="1">
+            <a:extLst>
+              <a:ext uri="{FF2B5EF4-FFF2-40B4-BE49-F238E27FC236}">
+                <a16:creationId xmlns:a16="http://schemas.microsoft.com/office/drawing/2014/main" id="{D719C3C0-F62A-D7E8-E9D3-962ADA4F96A8}"/>
+              </a:ext>
+            </a:extLst>
+          </p:cNvPr>
+          <p:cNvPicPr>
+            <a:picLocks noChangeAspect="1"/>
+          </p:cNvPicPr>
+          <p:nvPr/>
+        </p:nvPicPr>
+        <p:blipFill>
+          <a:blip r:embed="rId3"/>
+          <a:stretch>
+            <a:fillRect/>
+          </a:stretch>
+        </p:blipFill>
+        <p:spPr>
+          <a:xfrm>
+            <a:off x="9854862" y="1393035"/>
+            <a:ext cx="6796655" cy="7339484"/>
+          </a:xfrm>
+          <a:prstGeom prst="rect">
+            <a:avLst/>
+          </a:prstGeom>
+        </p:spPr>
+      </p:pic>
+      <p:pic>
+        <p:nvPicPr>
+          <p:cNvPr id="28" name="Picture 27" hidden="1">
+            <a:extLst>
+              <a:ext uri="{FF2B5EF4-FFF2-40B4-BE49-F238E27FC236}">
+                <a16:creationId xmlns:a16="http://schemas.microsoft.com/office/drawing/2014/main" id="{E39E14BF-EB3C-BE1B-897B-40CC31673E12}"/>
+              </a:ext>
+            </a:extLst>
+          </p:cNvPr>
+          <p:cNvPicPr>
+            <a:picLocks noChangeAspect="1"/>
+          </p:cNvPicPr>
+          <p:nvPr/>
+        </p:nvPicPr>
+        <p:blipFill>
+          <a:blip r:embed="rId4"/>
+          <a:stretch>
+            <a:fillRect/>
+          </a:stretch>
+        </p:blipFill>
+        <p:spPr>
+          <a:xfrm>
+            <a:off x="2694357" y="5572561"/>
+            <a:ext cx="6803887" cy="3159957"/>
+          </a:xfrm>
+          <a:prstGeom prst="rect">
+            <a:avLst/>
+          </a:prstGeom>
+        </p:spPr>
+      </p:pic>
+      <p:sp>
+        <p:nvSpPr>
+          <p:cNvPr id="3" name="Rectangle: Top Corners Rounded 2">
+            <a:extLst>
+              <a:ext uri="{FF2B5EF4-FFF2-40B4-BE49-F238E27FC236}">
+                <a16:creationId xmlns:a16="http://schemas.microsoft.com/office/drawing/2014/main" id="{64CD3283-EBC8-A8A8-F7D2-A5A72EB53258}"/>
+              </a:ext>
+            </a:extLst>
+          </p:cNvPr>
+          <p:cNvSpPr/>
+          <p:nvPr/>
+        </p:nvSpPr>
+        <p:spPr>
+          <a:xfrm rot="5400000">
+            <a:off x="-3430417" y="3420759"/>
+            <a:ext cx="9144000" cy="2302482"/>
+          </a:xfrm>
+          <a:prstGeom prst="round2SameRect">
+            <a:avLst>
+              <a:gd name="adj1" fmla="val 0"/>
+              <a:gd name="adj2" fmla="val 0"/>
+            </a:avLst>
+          </a:prstGeom>
+          <a:solidFill>
+            <a:srgbClr val="B2292E"/>
+          </a:solidFill>
+          <a:ln>
+            <a:noFill/>
+          </a:ln>
+        </p:spPr>
+        <p:style>
+          <a:lnRef idx="2">
+            <a:schemeClr val="accent1">
+              <a:shade val="15000"/>
+            </a:schemeClr>
+          </a:lnRef>
+          <a:fillRef idx="1">
+            <a:schemeClr val="accent1"/>
+          </a:fillRef>
+          <a:effectRef idx="0">
+            <a:schemeClr val="accent1"/>
+          </a:effectRef>
+          <a:fontRef idx="minor">
+            <a:schemeClr val="lt1"/>
+          </a:fontRef>
+        </p:style>
+        <p:txBody>
+          <a:bodyPr rtlCol="0" anchor="ctr"/>
+          <a:lstStyle/>
+          <a:p>
+            <a:pPr algn="ctr"/>
+            <a:endParaRPr lang="en-US" dirty="0"/>
+          </a:p>
+        </p:txBody>
+      </p:sp>
+      <p:sp>
+        <p:nvSpPr>
+          <p:cNvPr id="2" name="Rectangle: Rounded Corners 1">
+            <a:extLst>
+              <a:ext uri="{FF2B5EF4-FFF2-40B4-BE49-F238E27FC236}">
+                <a16:creationId xmlns:a16="http://schemas.microsoft.com/office/drawing/2014/main" id="{881DD4F1-C2ED-BCCF-358B-D00C5FDCA7FA}"/>
+              </a:ext>
+            </a:extLst>
+          </p:cNvPr>
+          <p:cNvSpPr/>
+          <p:nvPr/>
+        </p:nvSpPr>
+        <p:spPr>
+          <a:xfrm>
+            <a:off x="9266132" y="4842933"/>
+            <a:ext cx="7682946" cy="3889586"/>
+          </a:xfrm>
+          <a:prstGeom prst="roundRect">
+            <a:avLst>
+              <a:gd name="adj" fmla="val 3896"/>
+            </a:avLst>
+          </a:prstGeom>
+          <a:solidFill>
+            <a:schemeClr val="bg1"/>
+          </a:solidFill>
+          <a:ln>
+            <a:noFill/>
+          </a:ln>
+          <a:effectLst>
+            <a:outerShdw blurRad="50800" dist="50800" dir="5400000" sx="102000" sy="102000" algn="ctr" rotWithShape="0">
+              <a:srgbClr val="000000">
+                <a:alpha val="10000"/>
+              </a:srgbClr>
+            </a:outerShdw>
+          </a:effectLst>
+        </p:spPr>
+        <p:style>
+          <a:lnRef idx="2">
+            <a:schemeClr val="accent1">
+              <a:shade val="15000"/>
+            </a:schemeClr>
+          </a:lnRef>
+          <a:fillRef idx="1">
+            <a:schemeClr val="accent1"/>
+          </a:fillRef>
+          <a:effectRef idx="0">
+            <a:schemeClr val="accent1"/>
+          </a:effectRef>
+          <a:fontRef idx="minor">
+            <a:schemeClr val="lt1"/>
+          </a:fontRef>
+        </p:style>
+        <p:txBody>
+          <a:bodyPr rtlCol="0" anchor="ctr"/>
+          <a:lstStyle/>
+          <a:p>
+            <a:endParaRPr lang="en-US" sz="3200" b="1">
+              <a:solidFill>
+                <a:schemeClr val="tx1"/>
+              </a:solidFill>
+              <a:latin typeface="Segoe UI Variable Text" pitchFamily="2" charset="0"/>
+              <a:ea typeface="Segoe UI Black" panose="020B0A02040204020203" pitchFamily="34" charset="0"/>
+              <a:cs typeface="Segoe UI Semibold" panose="020B0702040204020203" pitchFamily="34" charset="0"/>
+            </a:endParaRPr>
+          </a:p>
+        </p:txBody>
+      </p:sp>
+    </p:spTree>
+    <p:extLst>
+      <p:ext uri="{BB962C8B-B14F-4D97-AF65-F5344CB8AC3E}">
+        <p14:creationId xmlns:p14="http://schemas.microsoft.com/office/powerpoint/2010/main" val="1921429586"/>
+      </p:ext>
+    </p:extLst>
+  </p:cSld>
+  <p:clrMapOvr>
+    <a:masterClrMapping/>
+  </p:clrMapOvr>
+</p:sld>
+</file>
+
+<file path=ppt/slides/slide3.xml><?xml version="1.0" encoding="utf-8"?>
 <p:sld xmlns:a="http://schemas.openxmlformats.org/drawingml/2006/main" xmlns:r="http://schemas.openxmlformats.org/officeDocument/2006/relationships" xmlns:p="http://schemas.openxmlformats.org/presentationml/2006/main">
   <p:cSld>
     <p:bg>
@@ -3907,7 +4749,7 @@
                 <a:ea typeface="Segoe UI Black" panose="020B0A02040204020203" pitchFamily="34" charset="0"/>
                 <a:cs typeface="Segoe UI Semibold" panose="020B0702040204020203" pitchFamily="34" charset="0"/>
               </a:rPr>
-              <a:t>Understand how major coffee brands compete in scale, growth, and customer perception across key attributes.</a:t>
+              <a:t>Analyze how major coffee brands compete in scale, growth, and awareness</a:t>
             </a:r>
           </a:p>
         </p:txBody>
@@ -4604,7 +5446,7 @@
 </p:sld>
 </file>
 
-<file path=ppt/slides/slide3.xml><?xml version="1.0" encoding="utf-8"?>
+<file path=ppt/slides/slide4.xml><?xml version="1.0" encoding="utf-8"?>
 <p:sld xmlns:a="http://schemas.openxmlformats.org/drawingml/2006/main" xmlns:r="http://schemas.openxmlformats.org/officeDocument/2006/relationships" xmlns:p="http://schemas.openxmlformats.org/presentationml/2006/main">
   <p:cSld>
     <p:bg>
@@ -4911,7 +5753,7 @@
                 <a:ea typeface="Segoe UI Black" panose="020B0A02040204020203" pitchFamily="34" charset="0"/>
                 <a:cs typeface="Segoe UI Semibold" panose="020B0702040204020203" pitchFamily="34" charset="0"/>
               </a:rPr>
-              <a:t>Uncover key leakage points and understand what drives or hinders customer retention.</a:t>
+              <a:t>Uncover key leakage points and understand what drives or hinders customer retention</a:t>
             </a:r>
           </a:p>
         </p:txBody>
@@ -5382,7 +6224,781 @@
 </p:sld>
 </file>
 
-<file path=ppt/slides/slide4.xml><?xml version="1.0" encoding="utf-8"?>
+<file path=ppt/slides/slide5.xml><?xml version="1.0" encoding="utf-8"?>
+<p:sld xmlns:a="http://schemas.openxmlformats.org/drawingml/2006/main" xmlns:r="http://schemas.openxmlformats.org/officeDocument/2006/relationships" xmlns:p="http://schemas.openxmlformats.org/presentationml/2006/main">
+  <p:cSld>
+    <p:spTree>
+      <p:nvGrpSpPr>
+        <p:cNvPr id="1" name="">
+          <a:extLst>
+            <a:ext uri="{FF2B5EF4-FFF2-40B4-BE49-F238E27FC236}">
+              <a16:creationId xmlns:a16="http://schemas.microsoft.com/office/drawing/2014/main" id="{E11A2D6D-E70F-7BF7-6471-A6C34A7E18D9}"/>
+            </a:ext>
+          </a:extLst>
+        </p:cNvPr>
+        <p:cNvGrpSpPr/>
+        <p:nvPr/>
+      </p:nvGrpSpPr>
+      <p:grpSpPr>
+        <a:xfrm>
+          <a:off x="0" y="0"/>
+          <a:ext cx="0" cy="0"/>
+          <a:chOff x="0" y="0"/>
+          <a:chExt cx="0" cy="0"/>
+        </a:xfrm>
+      </p:grpSpPr>
+      <p:sp>
+        <p:nvSpPr>
+          <p:cNvPr id="12" name="Rectangle: Rounded Corners 11">
+            <a:extLst>
+              <a:ext uri="{FF2B5EF4-FFF2-40B4-BE49-F238E27FC236}">
+                <a16:creationId xmlns:a16="http://schemas.microsoft.com/office/drawing/2014/main" id="{BDF37691-352D-26AC-C95D-A14D43A8DDF6}"/>
+              </a:ext>
+            </a:extLst>
+          </p:cNvPr>
+          <p:cNvSpPr/>
+          <p:nvPr/>
+        </p:nvSpPr>
+        <p:spPr>
+          <a:xfrm>
+            <a:off x="2694357" y="1393036"/>
+            <a:ext cx="7194688" cy="7339482"/>
+          </a:xfrm>
+          <a:prstGeom prst="roundRect">
+            <a:avLst>
+              <a:gd name="adj" fmla="val 1774"/>
+            </a:avLst>
+          </a:prstGeom>
+          <a:solidFill>
+            <a:schemeClr val="bg1"/>
+          </a:solidFill>
+          <a:ln>
+            <a:noFill/>
+          </a:ln>
+          <a:effectLst>
+            <a:outerShdw blurRad="50800" dist="50800" dir="5400000" sx="102000" sy="102000" algn="ctr" rotWithShape="0">
+              <a:srgbClr val="000000">
+                <a:alpha val="10000"/>
+              </a:srgbClr>
+            </a:outerShdw>
+          </a:effectLst>
+        </p:spPr>
+        <p:style>
+          <a:lnRef idx="2">
+            <a:schemeClr val="accent1">
+              <a:shade val="15000"/>
+            </a:schemeClr>
+          </a:lnRef>
+          <a:fillRef idx="1">
+            <a:schemeClr val="accent1"/>
+          </a:fillRef>
+          <a:effectRef idx="0">
+            <a:schemeClr val="accent1"/>
+          </a:effectRef>
+          <a:fontRef idx="minor">
+            <a:schemeClr val="lt1"/>
+          </a:fontRef>
+        </p:style>
+        <p:txBody>
+          <a:bodyPr rtlCol="0" anchor="ctr"/>
+          <a:lstStyle/>
+          <a:p>
+            <a:endParaRPr lang="en-US" sz="3200" b="1">
+              <a:solidFill>
+                <a:schemeClr val="tx1"/>
+              </a:solidFill>
+              <a:latin typeface="Segoe UI Variable Text" pitchFamily="2" charset="0"/>
+              <a:ea typeface="Segoe UI Black" panose="020B0A02040204020203" pitchFamily="34" charset="0"/>
+              <a:cs typeface="Segoe UI Semibold" panose="020B0702040204020203" pitchFamily="34" charset="0"/>
+            </a:endParaRPr>
+          </a:p>
+        </p:txBody>
+      </p:sp>
+      <p:sp>
+        <p:nvSpPr>
+          <p:cNvPr id="32" name="Rectangle: Rounded Corners 31">
+            <a:extLst>
+              <a:ext uri="{FF2B5EF4-FFF2-40B4-BE49-F238E27FC236}">
+                <a16:creationId xmlns:a16="http://schemas.microsoft.com/office/drawing/2014/main" id="{AB5AFFB2-6A0F-50C6-29DA-686943597AF7}"/>
+              </a:ext>
+            </a:extLst>
+          </p:cNvPr>
+          <p:cNvSpPr/>
+          <p:nvPr/>
+        </p:nvSpPr>
+        <p:spPr>
+          <a:xfrm>
+            <a:off x="10313568" y="1393037"/>
+            <a:ext cx="6658502" cy="3483763"/>
+          </a:xfrm>
+          <a:prstGeom prst="roundRect">
+            <a:avLst>
+              <a:gd name="adj" fmla="val 2037"/>
+            </a:avLst>
+          </a:prstGeom>
+          <a:solidFill>
+            <a:schemeClr val="bg1"/>
+          </a:solidFill>
+          <a:ln>
+            <a:noFill/>
+          </a:ln>
+          <a:effectLst>
+            <a:outerShdw blurRad="50800" dist="50800" dir="5400000" sx="102000" sy="102000" algn="ctr" rotWithShape="0">
+              <a:srgbClr val="000000">
+                <a:alpha val="10000"/>
+              </a:srgbClr>
+            </a:outerShdw>
+          </a:effectLst>
+        </p:spPr>
+        <p:style>
+          <a:lnRef idx="2">
+            <a:schemeClr val="accent1">
+              <a:shade val="15000"/>
+            </a:schemeClr>
+          </a:lnRef>
+          <a:fillRef idx="1">
+            <a:schemeClr val="accent1"/>
+          </a:fillRef>
+          <a:effectRef idx="0">
+            <a:schemeClr val="accent1"/>
+          </a:effectRef>
+          <a:fontRef idx="minor">
+            <a:schemeClr val="lt1"/>
+          </a:fontRef>
+        </p:style>
+        <p:txBody>
+          <a:bodyPr rtlCol="0" anchor="ctr"/>
+          <a:lstStyle/>
+          <a:p>
+            <a:endParaRPr lang="en-US" sz="3200" b="1">
+              <a:solidFill>
+                <a:schemeClr val="tx1"/>
+              </a:solidFill>
+              <a:latin typeface="Segoe UI Variable Text" pitchFamily="2" charset="0"/>
+              <a:ea typeface="Segoe UI Black" panose="020B0A02040204020203" pitchFamily="34" charset="0"/>
+              <a:cs typeface="Segoe UI Semibold" panose="020B0702040204020203" pitchFamily="34" charset="0"/>
+            </a:endParaRPr>
+          </a:p>
+        </p:txBody>
+      </p:sp>
+      <p:sp>
+        <p:nvSpPr>
+          <p:cNvPr id="11" name="Rectangle 10">
+            <a:extLst>
+              <a:ext uri="{FF2B5EF4-FFF2-40B4-BE49-F238E27FC236}">
+                <a16:creationId xmlns:a16="http://schemas.microsoft.com/office/drawing/2014/main" id="{B9F99D7D-7AD0-F129-73B2-CDA835D272EE}"/>
+              </a:ext>
+            </a:extLst>
+          </p:cNvPr>
+          <p:cNvSpPr>
+            <a:spLocks noGrp="1" noRot="1" noMove="1" noResize="1" noEditPoints="1" noAdjustHandles="1" noChangeArrowheads="1" noChangeShapeType="1"/>
+          </p:cNvSpPr>
+          <p:nvPr/>
+        </p:nvSpPr>
+        <p:spPr>
+          <a:xfrm>
+            <a:off x="2694357" y="411480"/>
+            <a:ext cx="13949917" cy="816819"/>
+          </a:xfrm>
+          <a:prstGeom prst="rect">
+            <a:avLst/>
+          </a:prstGeom>
+          <a:noFill/>
+          <a:ln>
+            <a:noFill/>
+          </a:ln>
+        </p:spPr>
+        <p:style>
+          <a:lnRef idx="2">
+            <a:schemeClr val="accent1">
+              <a:shade val="15000"/>
+            </a:schemeClr>
+          </a:lnRef>
+          <a:fillRef idx="1">
+            <a:schemeClr val="accent1"/>
+          </a:fillRef>
+          <a:effectRef idx="0">
+            <a:schemeClr val="accent1"/>
+          </a:effectRef>
+          <a:fontRef idx="minor">
+            <a:schemeClr val="lt1"/>
+          </a:fontRef>
+        </p:style>
+        <p:txBody>
+          <a:bodyPr rtlCol="0" anchor="ctr"/>
+          <a:lstStyle/>
+          <a:p>
+            <a:pPr>
+              <a:lnSpc>
+                <a:spcPts val="3000"/>
+              </a:lnSpc>
+            </a:pPr>
+            <a:r>
+              <a:rPr lang="en-US" sz="3200" b="1" dirty="0">
+                <a:solidFill>
+                  <a:schemeClr val="tx1"/>
+                </a:solidFill>
+                <a:latin typeface="Segoe UI Variable Text" pitchFamily="2" charset="0"/>
+                <a:ea typeface="Segoe UI Black" panose="020B0A02040204020203" pitchFamily="34" charset="0"/>
+                <a:cs typeface="Segoe UI Semibold" panose="020B0702040204020203" pitchFamily="34" charset="0"/>
+              </a:rPr>
+              <a:t>Customer Insights Dashboard</a:t>
+            </a:r>
+          </a:p>
+          <a:p>
+            <a:pPr>
+              <a:lnSpc>
+                <a:spcPts val="3000"/>
+              </a:lnSpc>
+            </a:pPr>
+            <a:r>
+              <a:rPr lang="en-US" dirty="0">
+                <a:solidFill>
+                  <a:schemeClr val="tx1"/>
+                </a:solidFill>
+                <a:latin typeface="Segoe UI Variable Display Light" pitchFamily="2" charset="0"/>
+                <a:ea typeface="Segoe UI Black" panose="020B0A02040204020203" pitchFamily="34" charset="0"/>
+                <a:cs typeface="Segoe UI Semibold" panose="020B0702040204020203" pitchFamily="34" charset="0"/>
+              </a:rPr>
+              <a:t>Analyze customer perceptions and the value drivers they prioritize</a:t>
+            </a:r>
+          </a:p>
+        </p:txBody>
+      </p:sp>
+      <p:sp>
+        <p:nvSpPr>
+          <p:cNvPr id="14" name="Rectangle 13" hidden="1">
+            <a:extLst>
+              <a:ext uri="{FF2B5EF4-FFF2-40B4-BE49-F238E27FC236}">
+                <a16:creationId xmlns:a16="http://schemas.microsoft.com/office/drawing/2014/main" id="{C70D1FF7-AA24-7D9A-B2FD-35F879B064E7}"/>
+              </a:ext>
+            </a:extLst>
+          </p:cNvPr>
+          <p:cNvSpPr>
+            <a:spLocks noGrp="1" noRot="1" noMove="1" noResize="1" noEditPoints="1" noAdjustHandles="1" noChangeArrowheads="1" noChangeShapeType="1"/>
+          </p:cNvSpPr>
+          <p:nvPr/>
+        </p:nvSpPr>
+        <p:spPr>
+          <a:xfrm>
+            <a:off x="217716" y="0"/>
+            <a:ext cx="417282" cy="9144000"/>
+          </a:xfrm>
+          <a:prstGeom prst="rect">
+            <a:avLst/>
+          </a:prstGeom>
+          <a:noFill/>
+          <a:ln>
+            <a:solidFill>
+              <a:schemeClr val="tx1"/>
+            </a:solidFill>
+          </a:ln>
+        </p:spPr>
+        <p:style>
+          <a:lnRef idx="2">
+            <a:schemeClr val="accent1">
+              <a:shade val="15000"/>
+            </a:schemeClr>
+          </a:lnRef>
+          <a:fillRef idx="1">
+            <a:schemeClr val="accent1"/>
+          </a:fillRef>
+          <a:effectRef idx="0">
+            <a:schemeClr val="accent1"/>
+          </a:effectRef>
+          <a:fontRef idx="minor">
+            <a:schemeClr val="lt1"/>
+          </a:fontRef>
+        </p:style>
+        <p:txBody>
+          <a:bodyPr rtlCol="0" anchor="ctr"/>
+          <a:lstStyle/>
+          <a:p>
+            <a:endParaRPr lang="en-US" sz="3200" b="1">
+              <a:solidFill>
+                <a:schemeClr val="tx1"/>
+              </a:solidFill>
+              <a:latin typeface="Segoe UI Variable Text" pitchFamily="2" charset="0"/>
+              <a:ea typeface="Segoe UI Black" panose="020B0A02040204020203" pitchFamily="34" charset="0"/>
+              <a:cs typeface="Segoe UI Semibold" panose="020B0702040204020203" pitchFamily="34" charset="0"/>
+            </a:endParaRPr>
+          </a:p>
+        </p:txBody>
+      </p:sp>
+      <p:sp>
+        <p:nvSpPr>
+          <p:cNvPr id="15" name="Rectangle 14" hidden="1">
+            <a:extLst>
+              <a:ext uri="{FF2B5EF4-FFF2-40B4-BE49-F238E27FC236}">
+                <a16:creationId xmlns:a16="http://schemas.microsoft.com/office/drawing/2014/main" id="{DCD74D4B-BC41-AD0F-4474-51863084440D}"/>
+              </a:ext>
+            </a:extLst>
+          </p:cNvPr>
+          <p:cNvSpPr>
+            <a:spLocks/>
+          </p:cNvSpPr>
+          <p:nvPr/>
+        </p:nvSpPr>
+        <p:spPr>
+          <a:xfrm>
+            <a:off x="16651518" y="0"/>
+            <a:ext cx="417282" cy="9144000"/>
+          </a:xfrm>
+          <a:prstGeom prst="rect">
+            <a:avLst/>
+          </a:prstGeom>
+          <a:solidFill>
+            <a:srgbClr val="C00000"/>
+          </a:solidFill>
+          <a:ln>
+            <a:solidFill>
+              <a:schemeClr val="tx1"/>
+            </a:solidFill>
+          </a:ln>
+        </p:spPr>
+        <p:style>
+          <a:lnRef idx="2">
+            <a:schemeClr val="accent1">
+              <a:shade val="15000"/>
+            </a:schemeClr>
+          </a:lnRef>
+          <a:fillRef idx="1">
+            <a:schemeClr val="accent1"/>
+          </a:fillRef>
+          <a:effectRef idx="0">
+            <a:schemeClr val="accent1"/>
+          </a:effectRef>
+          <a:fontRef idx="minor">
+            <a:schemeClr val="lt1"/>
+          </a:fontRef>
+        </p:style>
+        <p:txBody>
+          <a:bodyPr rtlCol="0" anchor="ctr"/>
+          <a:lstStyle/>
+          <a:p>
+            <a:endParaRPr lang="en-US" sz="3200" b="1">
+              <a:solidFill>
+                <a:schemeClr val="tx1"/>
+              </a:solidFill>
+              <a:latin typeface="Segoe UI Variable Text" pitchFamily="2" charset="0"/>
+              <a:ea typeface="Segoe UI Black" panose="020B0A02040204020203" pitchFamily="34" charset="0"/>
+              <a:cs typeface="Segoe UI Semibold" panose="020B0702040204020203" pitchFamily="34" charset="0"/>
+            </a:endParaRPr>
+          </a:p>
+        </p:txBody>
+      </p:sp>
+      <p:sp>
+        <p:nvSpPr>
+          <p:cNvPr id="17" name="Rectangle 16" hidden="1">
+            <a:extLst>
+              <a:ext uri="{FF2B5EF4-FFF2-40B4-BE49-F238E27FC236}">
+                <a16:creationId xmlns:a16="http://schemas.microsoft.com/office/drawing/2014/main" id="{4C1EA8BB-C22C-4DA9-8AA9-DB53E21067C7}"/>
+              </a:ext>
+            </a:extLst>
+          </p:cNvPr>
+          <p:cNvSpPr>
+            <a:spLocks/>
+          </p:cNvSpPr>
+          <p:nvPr/>
+        </p:nvSpPr>
+        <p:spPr>
+          <a:xfrm>
+            <a:off x="2269839" y="0"/>
+            <a:ext cx="417282" cy="9144000"/>
+          </a:xfrm>
+          <a:prstGeom prst="rect">
+            <a:avLst/>
+          </a:prstGeom>
+          <a:solidFill>
+            <a:srgbClr val="C00000"/>
+          </a:solidFill>
+          <a:ln>
+            <a:solidFill>
+              <a:schemeClr val="tx1"/>
+            </a:solidFill>
+          </a:ln>
+        </p:spPr>
+        <p:style>
+          <a:lnRef idx="2">
+            <a:schemeClr val="accent1">
+              <a:shade val="15000"/>
+            </a:schemeClr>
+          </a:lnRef>
+          <a:fillRef idx="1">
+            <a:schemeClr val="accent1"/>
+          </a:fillRef>
+          <a:effectRef idx="0">
+            <a:schemeClr val="accent1"/>
+          </a:effectRef>
+          <a:fontRef idx="minor">
+            <a:schemeClr val="lt1"/>
+          </a:fontRef>
+        </p:style>
+        <p:txBody>
+          <a:bodyPr rtlCol="0" anchor="ctr"/>
+          <a:lstStyle/>
+          <a:p>
+            <a:endParaRPr lang="en-US" sz="3200" b="1">
+              <a:solidFill>
+                <a:schemeClr val="tx1"/>
+              </a:solidFill>
+              <a:latin typeface="Segoe UI Variable Text" pitchFamily="2" charset="0"/>
+              <a:ea typeface="Segoe UI Black" panose="020B0A02040204020203" pitchFamily="34" charset="0"/>
+              <a:cs typeface="Segoe UI Semibold" panose="020B0702040204020203" pitchFamily="34" charset="0"/>
+            </a:endParaRPr>
+          </a:p>
+        </p:txBody>
+      </p:sp>
+      <p:sp>
+        <p:nvSpPr>
+          <p:cNvPr id="19" name="Rectangle 18" hidden="1">
+            <a:extLst>
+              <a:ext uri="{FF2B5EF4-FFF2-40B4-BE49-F238E27FC236}">
+                <a16:creationId xmlns:a16="http://schemas.microsoft.com/office/drawing/2014/main" id="{D5C1BF5D-CD6A-10E5-3171-1B99604B5658}"/>
+              </a:ext>
+            </a:extLst>
+          </p:cNvPr>
+          <p:cNvSpPr>
+            <a:spLocks/>
+          </p:cNvSpPr>
+          <p:nvPr/>
+        </p:nvSpPr>
+        <p:spPr>
+          <a:xfrm>
+            <a:off x="9491011" y="0"/>
+            <a:ext cx="356616" cy="9144000"/>
+          </a:xfrm>
+          <a:prstGeom prst="rect">
+            <a:avLst/>
+          </a:prstGeom>
+          <a:solidFill>
+            <a:srgbClr val="C00000"/>
+          </a:solidFill>
+          <a:ln>
+            <a:solidFill>
+              <a:schemeClr val="tx1"/>
+            </a:solidFill>
+          </a:ln>
+        </p:spPr>
+        <p:style>
+          <a:lnRef idx="2">
+            <a:schemeClr val="accent1">
+              <a:shade val="15000"/>
+            </a:schemeClr>
+          </a:lnRef>
+          <a:fillRef idx="1">
+            <a:schemeClr val="accent1"/>
+          </a:fillRef>
+          <a:effectRef idx="0">
+            <a:schemeClr val="accent1"/>
+          </a:effectRef>
+          <a:fontRef idx="minor">
+            <a:schemeClr val="lt1"/>
+          </a:fontRef>
+        </p:style>
+        <p:txBody>
+          <a:bodyPr rtlCol="0" anchor="ctr"/>
+          <a:lstStyle/>
+          <a:p>
+            <a:endParaRPr lang="en-US" sz="3200" b="1">
+              <a:solidFill>
+                <a:schemeClr val="tx1"/>
+              </a:solidFill>
+              <a:latin typeface="Segoe UI Variable Text" pitchFamily="2" charset="0"/>
+              <a:ea typeface="Segoe UI Black" panose="020B0A02040204020203" pitchFamily="34" charset="0"/>
+              <a:cs typeface="Segoe UI Semibold" panose="020B0702040204020203" pitchFamily="34" charset="0"/>
+            </a:endParaRPr>
+          </a:p>
+        </p:txBody>
+      </p:sp>
+      <p:sp>
+        <p:nvSpPr>
+          <p:cNvPr id="20" name="Rectangle 19" hidden="1">
+            <a:extLst>
+              <a:ext uri="{FF2B5EF4-FFF2-40B4-BE49-F238E27FC236}">
+                <a16:creationId xmlns:a16="http://schemas.microsoft.com/office/drawing/2014/main" id="{AA63CFF0-2304-9E52-D271-251679E906DB}"/>
+              </a:ext>
+            </a:extLst>
+          </p:cNvPr>
+          <p:cNvSpPr>
+            <a:spLocks/>
+          </p:cNvSpPr>
+          <p:nvPr/>
+        </p:nvSpPr>
+        <p:spPr>
+          <a:xfrm>
+            <a:off x="2687120" y="4902200"/>
+            <a:ext cx="13964397" cy="352188"/>
+          </a:xfrm>
+          <a:prstGeom prst="rect">
+            <a:avLst/>
+          </a:prstGeom>
+          <a:solidFill>
+            <a:srgbClr val="C00000"/>
+          </a:solidFill>
+          <a:ln>
+            <a:solidFill>
+              <a:schemeClr val="tx1"/>
+            </a:solidFill>
+          </a:ln>
+        </p:spPr>
+        <p:style>
+          <a:lnRef idx="2">
+            <a:schemeClr val="accent1">
+              <a:shade val="15000"/>
+            </a:schemeClr>
+          </a:lnRef>
+          <a:fillRef idx="1">
+            <a:schemeClr val="accent1"/>
+          </a:fillRef>
+          <a:effectRef idx="0">
+            <a:schemeClr val="accent1"/>
+          </a:effectRef>
+          <a:fontRef idx="minor">
+            <a:schemeClr val="lt1"/>
+          </a:fontRef>
+        </p:style>
+        <p:txBody>
+          <a:bodyPr rtlCol="0" anchor="ctr"/>
+          <a:lstStyle/>
+          <a:p>
+            <a:endParaRPr lang="en-US" sz="3200" b="1" dirty="0">
+              <a:solidFill>
+                <a:schemeClr val="tx1"/>
+              </a:solidFill>
+              <a:latin typeface="Segoe UI Variable Text" pitchFamily="2" charset="0"/>
+              <a:ea typeface="Segoe UI Black" panose="020B0A02040204020203" pitchFamily="34" charset="0"/>
+              <a:cs typeface="Segoe UI Semibold" panose="020B0702040204020203" pitchFamily="34" charset="0"/>
+            </a:endParaRPr>
+          </a:p>
+        </p:txBody>
+      </p:sp>
+      <p:pic>
+        <p:nvPicPr>
+          <p:cNvPr id="24" name="Picture 23" hidden="1">
+            <a:extLst>
+              <a:ext uri="{FF2B5EF4-FFF2-40B4-BE49-F238E27FC236}">
+                <a16:creationId xmlns:a16="http://schemas.microsoft.com/office/drawing/2014/main" id="{D2A89660-8D2F-C44C-D49F-06B3EFA86BFC}"/>
+              </a:ext>
+            </a:extLst>
+          </p:cNvPr>
+          <p:cNvPicPr>
+            <a:picLocks noChangeAspect="1"/>
+          </p:cNvPicPr>
+          <p:nvPr/>
+        </p:nvPicPr>
+        <p:blipFill>
+          <a:blip r:embed="rId2"/>
+          <a:stretch>
+            <a:fillRect/>
+          </a:stretch>
+        </p:blipFill>
+        <p:spPr>
+          <a:xfrm>
+            <a:off x="2694357" y="1393035"/>
+            <a:ext cx="6803889" cy="3845169"/>
+          </a:xfrm>
+          <a:prstGeom prst="rect">
+            <a:avLst/>
+          </a:prstGeom>
+        </p:spPr>
+      </p:pic>
+      <p:pic>
+        <p:nvPicPr>
+          <p:cNvPr id="26" name="Picture 25" hidden="1">
+            <a:extLst>
+              <a:ext uri="{FF2B5EF4-FFF2-40B4-BE49-F238E27FC236}">
+                <a16:creationId xmlns:a16="http://schemas.microsoft.com/office/drawing/2014/main" id="{B1F0868E-6C81-1582-DEE3-F7897A3AC750}"/>
+              </a:ext>
+            </a:extLst>
+          </p:cNvPr>
+          <p:cNvPicPr>
+            <a:picLocks noChangeAspect="1"/>
+          </p:cNvPicPr>
+          <p:nvPr/>
+        </p:nvPicPr>
+        <p:blipFill>
+          <a:blip r:embed="rId3"/>
+          <a:stretch>
+            <a:fillRect/>
+          </a:stretch>
+        </p:blipFill>
+        <p:spPr>
+          <a:xfrm>
+            <a:off x="9854862" y="1393035"/>
+            <a:ext cx="6796655" cy="7339484"/>
+          </a:xfrm>
+          <a:prstGeom prst="rect">
+            <a:avLst/>
+          </a:prstGeom>
+        </p:spPr>
+      </p:pic>
+      <p:pic>
+        <p:nvPicPr>
+          <p:cNvPr id="28" name="Picture 27" hidden="1">
+            <a:extLst>
+              <a:ext uri="{FF2B5EF4-FFF2-40B4-BE49-F238E27FC236}">
+                <a16:creationId xmlns:a16="http://schemas.microsoft.com/office/drawing/2014/main" id="{B01373E5-E5D4-2470-B815-E9E5401463A8}"/>
+              </a:ext>
+            </a:extLst>
+          </p:cNvPr>
+          <p:cNvPicPr>
+            <a:picLocks noChangeAspect="1"/>
+          </p:cNvPicPr>
+          <p:nvPr/>
+        </p:nvPicPr>
+        <p:blipFill>
+          <a:blip r:embed="rId4"/>
+          <a:stretch>
+            <a:fillRect/>
+          </a:stretch>
+        </p:blipFill>
+        <p:spPr>
+          <a:xfrm>
+            <a:off x="2694357" y="5572561"/>
+            <a:ext cx="6803887" cy="3159957"/>
+          </a:xfrm>
+          <a:prstGeom prst="rect">
+            <a:avLst/>
+          </a:prstGeom>
+        </p:spPr>
+      </p:pic>
+      <p:sp>
+        <p:nvSpPr>
+          <p:cNvPr id="3" name="Rectangle: Top Corners Rounded 2">
+            <a:extLst>
+              <a:ext uri="{FF2B5EF4-FFF2-40B4-BE49-F238E27FC236}">
+                <a16:creationId xmlns:a16="http://schemas.microsoft.com/office/drawing/2014/main" id="{B5616E9E-C18B-D561-0984-3FB0CCA0E8FE}"/>
+              </a:ext>
+            </a:extLst>
+          </p:cNvPr>
+          <p:cNvSpPr/>
+          <p:nvPr/>
+        </p:nvSpPr>
+        <p:spPr>
+          <a:xfrm rot="5400000">
+            <a:off x="-3430417" y="3420759"/>
+            <a:ext cx="9144000" cy="2302482"/>
+          </a:xfrm>
+          <a:prstGeom prst="round2SameRect">
+            <a:avLst>
+              <a:gd name="adj1" fmla="val 0"/>
+              <a:gd name="adj2" fmla="val 0"/>
+            </a:avLst>
+          </a:prstGeom>
+          <a:solidFill>
+            <a:srgbClr val="B2292E"/>
+          </a:solidFill>
+          <a:ln>
+            <a:noFill/>
+          </a:ln>
+        </p:spPr>
+        <p:style>
+          <a:lnRef idx="2">
+            <a:schemeClr val="accent1">
+              <a:shade val="15000"/>
+            </a:schemeClr>
+          </a:lnRef>
+          <a:fillRef idx="1">
+            <a:schemeClr val="accent1"/>
+          </a:fillRef>
+          <a:effectRef idx="0">
+            <a:schemeClr val="accent1"/>
+          </a:effectRef>
+          <a:fontRef idx="minor">
+            <a:schemeClr val="lt1"/>
+          </a:fontRef>
+        </p:style>
+        <p:txBody>
+          <a:bodyPr rtlCol="0" anchor="ctr"/>
+          <a:lstStyle/>
+          <a:p>
+            <a:pPr algn="ctr"/>
+            <a:endParaRPr lang="en-US" dirty="0"/>
+          </a:p>
+        </p:txBody>
+      </p:sp>
+      <p:sp>
+        <p:nvSpPr>
+          <p:cNvPr id="2" name="Rectangle: Rounded Corners 1">
+            <a:extLst>
+              <a:ext uri="{FF2B5EF4-FFF2-40B4-BE49-F238E27FC236}">
+                <a16:creationId xmlns:a16="http://schemas.microsoft.com/office/drawing/2014/main" id="{287AD72F-D825-C7F9-C418-9216D045B59B}"/>
+              </a:ext>
+            </a:extLst>
+          </p:cNvPr>
+          <p:cNvSpPr/>
+          <p:nvPr/>
+        </p:nvSpPr>
+        <p:spPr>
+          <a:xfrm>
+            <a:off x="10290577" y="5248755"/>
+            <a:ext cx="6658502" cy="3483763"/>
+          </a:xfrm>
+          <a:prstGeom prst="roundRect">
+            <a:avLst>
+              <a:gd name="adj" fmla="val 2037"/>
+            </a:avLst>
+          </a:prstGeom>
+          <a:solidFill>
+            <a:schemeClr val="bg1"/>
+          </a:solidFill>
+          <a:ln>
+            <a:noFill/>
+          </a:ln>
+          <a:effectLst>
+            <a:outerShdw blurRad="50800" dist="50800" dir="5400000" sx="102000" sy="102000" algn="ctr" rotWithShape="0">
+              <a:srgbClr val="000000">
+                <a:alpha val="10000"/>
+              </a:srgbClr>
+            </a:outerShdw>
+          </a:effectLst>
+        </p:spPr>
+        <p:style>
+          <a:lnRef idx="2">
+            <a:schemeClr val="accent1">
+              <a:shade val="15000"/>
+            </a:schemeClr>
+          </a:lnRef>
+          <a:fillRef idx="1">
+            <a:schemeClr val="accent1"/>
+          </a:fillRef>
+          <a:effectRef idx="0">
+            <a:schemeClr val="accent1"/>
+          </a:effectRef>
+          <a:fontRef idx="minor">
+            <a:schemeClr val="lt1"/>
+          </a:fontRef>
+        </p:style>
+        <p:txBody>
+          <a:bodyPr rtlCol="0" anchor="ctr"/>
+          <a:lstStyle/>
+          <a:p>
+            <a:endParaRPr lang="en-US" sz="3200" b="1">
+              <a:solidFill>
+                <a:schemeClr val="tx1"/>
+              </a:solidFill>
+              <a:latin typeface="Segoe UI Variable Text" pitchFamily="2" charset="0"/>
+              <a:ea typeface="Segoe UI Black" panose="020B0A02040204020203" pitchFamily="34" charset="0"/>
+              <a:cs typeface="Segoe UI Semibold" panose="020B0702040204020203" pitchFamily="34" charset="0"/>
+            </a:endParaRPr>
+          </a:p>
+        </p:txBody>
+      </p:sp>
+    </p:spTree>
+    <p:extLst>
+      <p:ext uri="{BB962C8B-B14F-4D97-AF65-F5344CB8AC3E}">
+        <p14:creationId xmlns:p14="http://schemas.microsoft.com/office/powerpoint/2010/main" val="529214943"/>
+      </p:ext>
+    </p:extLst>
+  </p:cSld>
+  <p:clrMapOvr>
+    <a:masterClrMapping/>
+  </p:clrMapOvr>
+</p:sld>
+</file>
+
+<file path=ppt/slides/slide6.xml><?xml version="1.0" encoding="utf-8"?>
 <p:sld xmlns:a="http://schemas.openxmlformats.org/drawingml/2006/main" xmlns:r="http://schemas.openxmlformats.org/officeDocument/2006/relationships" xmlns:p="http://schemas.openxmlformats.org/presentationml/2006/main">
   <p:cSld>
     <p:bg>
@@ -5476,7 +7092,7 @@
                 <a:ea typeface="Segoe UI Black" panose="020B0A02040204020203" pitchFamily="34" charset="0"/>
                 <a:cs typeface="Segoe UI Semibold" panose="020B0702040204020203" pitchFamily="34" charset="0"/>
               </a:rPr>
-              <a:t>Segment Analysis</a:t>
+              <a:t>RFM Analysis</a:t>
             </a:r>
           </a:p>
           <a:p>
@@ -5494,7 +7110,7 @@
                 <a:ea typeface="Segoe UI Black" panose="020B0A02040204020203" pitchFamily="34" charset="0"/>
                 <a:cs typeface="Segoe UI Semibold" panose="020B0702040204020203" pitchFamily="34" charset="0"/>
               </a:rPr>
-              <a:t>Analyze customer composition, churn behavior, and demographic trends across key segments.</a:t>
+              <a:t>Analyze customer loyalty across customer segments and demographics</a:t>
             </a:r>
           </a:p>
         </p:txBody>
@@ -6414,196 +8030,6 @@
           </a:p>
         </p:txBody>
       </p:sp>
-      <p:pic>
-        <p:nvPicPr>
-          <p:cNvPr id="5" name="Picture 4">
-            <a:extLst>
-              <a:ext uri="{FF2B5EF4-FFF2-40B4-BE49-F238E27FC236}">
-                <a16:creationId xmlns:a16="http://schemas.microsoft.com/office/drawing/2014/main" id="{35B02EA1-21FB-C2ED-B50E-391F009E70DA}"/>
-              </a:ext>
-            </a:extLst>
-          </p:cNvPr>
-          <p:cNvPicPr>
-            <a:picLocks noChangeAspect="1"/>
-          </p:cNvPicPr>
-          <p:nvPr/>
-        </p:nvPicPr>
-        <p:blipFill>
-          <a:blip r:embed="rId2">
-            <a:duotone>
-              <a:schemeClr val="bg2">
-                <a:shade val="45000"/>
-                <a:satMod val="135000"/>
-              </a:schemeClr>
-              <a:prstClr val="white"/>
-            </a:duotone>
-          </a:blip>
-          <a:stretch>
-            <a:fillRect/>
-          </a:stretch>
-        </p:blipFill>
-        <p:spPr>
-          <a:xfrm>
-            <a:off x="16580774" y="1523429"/>
-            <a:ext cx="274320" cy="274320"/>
-          </a:xfrm>
-          <a:prstGeom prst="rect">
-            <a:avLst/>
-          </a:prstGeom>
-        </p:spPr>
-      </p:pic>
-      <p:pic>
-        <p:nvPicPr>
-          <p:cNvPr id="10" name="Picture 9">
-            <a:extLst>
-              <a:ext uri="{FF2B5EF4-FFF2-40B4-BE49-F238E27FC236}">
-                <a16:creationId xmlns:a16="http://schemas.microsoft.com/office/drawing/2014/main" id="{941DF447-04E6-E221-2F45-0A728A81562C}"/>
-              </a:ext>
-            </a:extLst>
-          </p:cNvPr>
-          <p:cNvPicPr>
-            <a:picLocks noChangeAspect="1"/>
-          </p:cNvPicPr>
-          <p:nvPr/>
-        </p:nvPicPr>
-        <p:blipFill>
-          <a:blip r:embed="rId3">
-            <a:duotone>
-              <a:schemeClr val="bg2">
-                <a:shade val="45000"/>
-                <a:satMod val="135000"/>
-              </a:schemeClr>
-              <a:prstClr val="white"/>
-            </a:duotone>
-          </a:blip>
-          <a:stretch>
-            <a:fillRect/>
-          </a:stretch>
-        </p:blipFill>
-        <p:spPr>
-          <a:xfrm>
-            <a:off x="13040004" y="3263900"/>
-            <a:ext cx="274320" cy="274320"/>
-          </a:xfrm>
-          <a:prstGeom prst="rect">
-            <a:avLst/>
-          </a:prstGeom>
-        </p:spPr>
-      </p:pic>
-      <p:pic>
-        <p:nvPicPr>
-          <p:cNvPr id="22" name="Picture 21">
-            <a:extLst>
-              <a:ext uri="{FF2B5EF4-FFF2-40B4-BE49-F238E27FC236}">
-                <a16:creationId xmlns:a16="http://schemas.microsoft.com/office/drawing/2014/main" id="{21564B09-B8FC-EBAD-3EF8-3090B5B54E7D}"/>
-              </a:ext>
-            </a:extLst>
-          </p:cNvPr>
-          <p:cNvPicPr>
-            <a:picLocks noChangeAspect="1"/>
-          </p:cNvPicPr>
-          <p:nvPr/>
-        </p:nvPicPr>
-        <p:blipFill>
-          <a:blip r:embed="rId4">
-            <a:duotone>
-              <a:schemeClr val="bg2">
-                <a:shade val="45000"/>
-                <a:satMod val="135000"/>
-              </a:schemeClr>
-              <a:prstClr val="white"/>
-            </a:duotone>
-          </a:blip>
-          <a:stretch>
-            <a:fillRect/>
-          </a:stretch>
-        </p:blipFill>
-        <p:spPr>
-          <a:xfrm>
-            <a:off x="16580774" y="3289300"/>
-            <a:ext cx="274320" cy="274320"/>
-          </a:xfrm>
-          <a:prstGeom prst="rect">
-            <a:avLst/>
-          </a:prstGeom>
-        </p:spPr>
-      </p:pic>
-      <p:pic>
-        <p:nvPicPr>
-          <p:cNvPr id="27" name="Picture 26">
-            <a:extLst>
-              <a:ext uri="{FF2B5EF4-FFF2-40B4-BE49-F238E27FC236}">
-                <a16:creationId xmlns:a16="http://schemas.microsoft.com/office/drawing/2014/main" id="{37A3136A-7C24-66A7-9E0F-4772D2B858F6}"/>
-              </a:ext>
-            </a:extLst>
-          </p:cNvPr>
-          <p:cNvPicPr>
-            <a:picLocks noChangeAspect="1"/>
-          </p:cNvPicPr>
-          <p:nvPr/>
-        </p:nvPicPr>
-        <p:blipFill>
-          <a:blip r:embed="rId5">
-            <a:duotone>
-              <a:schemeClr val="bg2">
-                <a:shade val="45000"/>
-                <a:satMod val="135000"/>
-              </a:schemeClr>
-              <a:prstClr val="white"/>
-            </a:duotone>
-          </a:blip>
-          <a:stretch>
-            <a:fillRect/>
-          </a:stretch>
-        </p:blipFill>
-        <p:spPr>
-          <a:xfrm>
-            <a:off x="16580774" y="7079960"/>
-            <a:ext cx="274320" cy="274320"/>
-          </a:xfrm>
-          <a:prstGeom prst="rect">
-            <a:avLst/>
-          </a:prstGeom>
-        </p:spPr>
-      </p:pic>
-      <p:pic>
-        <p:nvPicPr>
-          <p:cNvPr id="29" name="Picture 28">
-            <a:extLst>
-              <a:ext uri="{FF2B5EF4-FFF2-40B4-BE49-F238E27FC236}">
-                <a16:creationId xmlns:a16="http://schemas.microsoft.com/office/drawing/2014/main" id="{D97F249B-4740-E6DE-0105-FF7B10682C4B}"/>
-              </a:ext>
-            </a:extLst>
-          </p:cNvPr>
-          <p:cNvPicPr>
-            <a:picLocks noChangeAspect="1"/>
-          </p:cNvPicPr>
-          <p:nvPr/>
-        </p:nvPicPr>
-        <p:blipFill>
-          <a:blip r:embed="rId6">
-            <a:duotone>
-              <a:schemeClr val="bg2">
-                <a:shade val="45000"/>
-                <a:satMod val="135000"/>
-              </a:schemeClr>
-              <a:prstClr val="white"/>
-            </a:duotone>
-          </a:blip>
-          <a:stretch>
-            <a:fillRect/>
-          </a:stretch>
-        </p:blipFill>
-        <p:spPr>
-          <a:xfrm>
-            <a:off x="16580774" y="5184630"/>
-            <a:ext cx="274320" cy="274320"/>
-          </a:xfrm>
-          <a:prstGeom prst="rect">
-            <a:avLst/>
-          </a:prstGeom>
-        </p:spPr>
-      </p:pic>
     </p:spTree>
     <p:extLst>
       <p:ext uri="{BB962C8B-B14F-4D97-AF65-F5344CB8AC3E}">
@@ -6617,7 +8043,7 @@
 </p:sld>
 </file>
 
-<file path=ppt/slides/slide5.xml><?xml version="1.0" encoding="utf-8"?>
+<file path=ppt/slides/slide7.xml><?xml version="1.0" encoding="utf-8"?>
 <p:sld xmlns:a="http://schemas.openxmlformats.org/drawingml/2006/main" xmlns:r="http://schemas.openxmlformats.org/officeDocument/2006/relationships" xmlns:p="http://schemas.openxmlformats.org/presentationml/2006/main">
   <p:cSld>
     <p:spTree>
@@ -6719,7 +8145,7 @@
                 <a:ea typeface="Segoe UI Black" panose="020B0A02040204020203" pitchFamily="34" charset="0"/>
                 <a:cs typeface="Segoe UI Semibold" panose="020B0702040204020203" pitchFamily="34" charset="0"/>
               </a:rPr>
-              <a:t>Analyze customer composition, churn behavior, and demographic trends across key segments.</a:t>
+              <a:t>Analyze the need satisfaction rate of each customer segment and loyalty level </a:t>
             </a:r>
           </a:p>
         </p:txBody>
@@ -7663,847 +9089,6 @@
     <p:extLst>
       <p:ext uri="{BB962C8B-B14F-4D97-AF65-F5344CB8AC3E}">
         <p14:creationId xmlns:p14="http://schemas.microsoft.com/office/powerpoint/2010/main" val="2484462050"/>
-      </p:ext>
-    </p:extLst>
-  </p:cSld>
-  <p:clrMapOvr>
-    <a:masterClrMapping/>
-  </p:clrMapOvr>
-</p:sld>
-</file>
-
-<file path=ppt/slides/slide6.xml><?xml version="1.0" encoding="utf-8"?>
-<p:sld xmlns:a="http://schemas.openxmlformats.org/drawingml/2006/main" xmlns:r="http://schemas.openxmlformats.org/officeDocument/2006/relationships" xmlns:p="http://schemas.openxmlformats.org/presentationml/2006/main">
-  <p:cSld>
-    <p:spTree>
-      <p:nvGrpSpPr>
-        <p:cNvPr id="1" name="">
-          <a:extLst>
-            <a:ext uri="{FF2B5EF4-FFF2-40B4-BE49-F238E27FC236}">
-              <a16:creationId xmlns:a16="http://schemas.microsoft.com/office/drawing/2014/main" id="{146C7F3B-8DDA-429B-9FB9-7C764EFD9B4E}"/>
-            </a:ext>
-          </a:extLst>
-        </p:cNvPr>
-        <p:cNvGrpSpPr/>
-        <p:nvPr/>
-      </p:nvGrpSpPr>
-      <p:grpSpPr>
-        <a:xfrm>
-          <a:off x="0" y="0"/>
-          <a:ext cx="0" cy="0"/>
-          <a:chOff x="0" y="0"/>
-          <a:chExt cx="0" cy="0"/>
-        </a:xfrm>
-      </p:grpSpPr>
-      <p:sp>
-        <p:nvSpPr>
-          <p:cNvPr id="12" name="Rectangle: Rounded Corners 11">
-            <a:extLst>
-              <a:ext uri="{FF2B5EF4-FFF2-40B4-BE49-F238E27FC236}">
-                <a16:creationId xmlns:a16="http://schemas.microsoft.com/office/drawing/2014/main" id="{7D2EAEA5-0C48-F5B1-2B81-AD31A083A683}"/>
-              </a:ext>
-            </a:extLst>
-          </p:cNvPr>
-          <p:cNvSpPr/>
-          <p:nvPr/>
-        </p:nvSpPr>
-        <p:spPr>
-          <a:xfrm>
-            <a:off x="2694357" y="1393038"/>
-            <a:ext cx="6170243" cy="3111230"/>
-          </a:xfrm>
-          <a:prstGeom prst="roundRect">
-            <a:avLst>
-              <a:gd name="adj" fmla="val 4246"/>
-            </a:avLst>
-          </a:prstGeom>
-          <a:solidFill>
-            <a:schemeClr val="bg1"/>
-          </a:solidFill>
-          <a:ln>
-            <a:noFill/>
-          </a:ln>
-          <a:effectLst>
-            <a:outerShdw blurRad="50800" dist="50800" dir="5400000" sx="102000" sy="102000" algn="ctr" rotWithShape="0">
-              <a:srgbClr val="000000">
-                <a:alpha val="10000"/>
-              </a:srgbClr>
-            </a:outerShdw>
-          </a:effectLst>
-        </p:spPr>
-        <p:style>
-          <a:lnRef idx="2">
-            <a:schemeClr val="accent1">
-              <a:shade val="15000"/>
-            </a:schemeClr>
-          </a:lnRef>
-          <a:fillRef idx="1">
-            <a:schemeClr val="accent1"/>
-          </a:fillRef>
-          <a:effectRef idx="0">
-            <a:schemeClr val="accent1"/>
-          </a:effectRef>
-          <a:fontRef idx="minor">
-            <a:schemeClr val="lt1"/>
-          </a:fontRef>
-        </p:style>
-        <p:txBody>
-          <a:bodyPr rtlCol="0" anchor="ctr"/>
-          <a:lstStyle/>
-          <a:p>
-            <a:endParaRPr lang="en-US" sz="3200" b="1">
-              <a:solidFill>
-                <a:schemeClr val="tx1"/>
-              </a:solidFill>
-              <a:latin typeface="Segoe UI Variable Text" pitchFamily="2" charset="0"/>
-              <a:ea typeface="Segoe UI Black" panose="020B0A02040204020203" pitchFamily="34" charset="0"/>
-              <a:cs typeface="Segoe UI Semibold" panose="020B0702040204020203" pitchFamily="34" charset="0"/>
-            </a:endParaRPr>
-          </a:p>
-        </p:txBody>
-      </p:sp>
-      <p:sp>
-        <p:nvSpPr>
-          <p:cNvPr id="31" name="Rectangle: Rounded Corners 30">
-            <a:extLst>
-              <a:ext uri="{FF2B5EF4-FFF2-40B4-BE49-F238E27FC236}">
-                <a16:creationId xmlns:a16="http://schemas.microsoft.com/office/drawing/2014/main" id="{E912672E-CC72-1638-0B2D-1F04ACC134BD}"/>
-              </a:ext>
-            </a:extLst>
-          </p:cNvPr>
-          <p:cNvSpPr/>
-          <p:nvPr/>
-        </p:nvSpPr>
-        <p:spPr>
-          <a:xfrm>
-            <a:off x="2694357" y="4842933"/>
-            <a:ext cx="6170243" cy="3889586"/>
-          </a:xfrm>
-          <a:prstGeom prst="roundRect">
-            <a:avLst>
-              <a:gd name="adj" fmla="val 4246"/>
-            </a:avLst>
-          </a:prstGeom>
-          <a:solidFill>
-            <a:schemeClr val="bg1"/>
-          </a:solidFill>
-          <a:ln>
-            <a:noFill/>
-          </a:ln>
-          <a:effectLst>
-            <a:outerShdw blurRad="50800" dist="50800" dir="5400000" sx="102000" sy="102000" algn="ctr" rotWithShape="0">
-              <a:srgbClr val="000000">
-                <a:alpha val="10000"/>
-              </a:srgbClr>
-            </a:outerShdw>
-          </a:effectLst>
-        </p:spPr>
-        <p:style>
-          <a:lnRef idx="2">
-            <a:schemeClr val="accent1">
-              <a:shade val="15000"/>
-            </a:schemeClr>
-          </a:lnRef>
-          <a:fillRef idx="1">
-            <a:schemeClr val="accent1"/>
-          </a:fillRef>
-          <a:effectRef idx="0">
-            <a:schemeClr val="accent1"/>
-          </a:effectRef>
-          <a:fontRef idx="minor">
-            <a:schemeClr val="lt1"/>
-          </a:fontRef>
-        </p:style>
-        <p:txBody>
-          <a:bodyPr rtlCol="0" anchor="ctr"/>
-          <a:lstStyle/>
-          <a:p>
-            <a:endParaRPr lang="en-US" sz="3200" b="1">
-              <a:solidFill>
-                <a:schemeClr val="tx1"/>
-              </a:solidFill>
-              <a:latin typeface="Segoe UI Variable Text" pitchFamily="2" charset="0"/>
-              <a:ea typeface="Segoe UI Black" panose="020B0A02040204020203" pitchFamily="34" charset="0"/>
-              <a:cs typeface="Segoe UI Semibold" panose="020B0702040204020203" pitchFamily="34" charset="0"/>
-            </a:endParaRPr>
-          </a:p>
-        </p:txBody>
-      </p:sp>
-      <p:sp>
-        <p:nvSpPr>
-          <p:cNvPr id="32" name="Rectangle: Rounded Corners 31">
-            <a:extLst>
-              <a:ext uri="{FF2B5EF4-FFF2-40B4-BE49-F238E27FC236}">
-                <a16:creationId xmlns:a16="http://schemas.microsoft.com/office/drawing/2014/main" id="{787F1D21-1496-D581-CE99-18BDD7A432EE}"/>
-              </a:ext>
-            </a:extLst>
-          </p:cNvPr>
-          <p:cNvSpPr/>
-          <p:nvPr/>
-        </p:nvSpPr>
-        <p:spPr>
-          <a:xfrm>
-            <a:off x="9266132" y="1393038"/>
-            <a:ext cx="7705938" cy="3111229"/>
-          </a:xfrm>
-          <a:prstGeom prst="roundRect">
-            <a:avLst>
-              <a:gd name="adj" fmla="val 4620"/>
-            </a:avLst>
-          </a:prstGeom>
-          <a:solidFill>
-            <a:schemeClr val="bg1"/>
-          </a:solidFill>
-          <a:ln>
-            <a:noFill/>
-          </a:ln>
-          <a:effectLst>
-            <a:outerShdw blurRad="50800" dist="50800" dir="5400000" sx="102000" sy="102000" algn="ctr" rotWithShape="0">
-              <a:srgbClr val="000000">
-                <a:alpha val="10000"/>
-              </a:srgbClr>
-            </a:outerShdw>
-          </a:effectLst>
-        </p:spPr>
-        <p:style>
-          <a:lnRef idx="2">
-            <a:schemeClr val="accent1">
-              <a:shade val="15000"/>
-            </a:schemeClr>
-          </a:lnRef>
-          <a:fillRef idx="1">
-            <a:schemeClr val="accent1"/>
-          </a:fillRef>
-          <a:effectRef idx="0">
-            <a:schemeClr val="accent1"/>
-          </a:effectRef>
-          <a:fontRef idx="minor">
-            <a:schemeClr val="lt1"/>
-          </a:fontRef>
-        </p:style>
-        <p:txBody>
-          <a:bodyPr rtlCol="0" anchor="ctr"/>
-          <a:lstStyle/>
-          <a:p>
-            <a:endParaRPr lang="en-US" sz="3200" b="1">
-              <a:solidFill>
-                <a:schemeClr val="tx1"/>
-              </a:solidFill>
-              <a:latin typeface="Segoe UI Variable Text" pitchFamily="2" charset="0"/>
-              <a:ea typeface="Segoe UI Black" panose="020B0A02040204020203" pitchFamily="34" charset="0"/>
-              <a:cs typeface="Segoe UI Semibold" panose="020B0702040204020203" pitchFamily="34" charset="0"/>
-            </a:endParaRPr>
-          </a:p>
-        </p:txBody>
-      </p:sp>
-      <p:sp>
-        <p:nvSpPr>
-          <p:cNvPr id="11" name="Rectangle 10">
-            <a:extLst>
-              <a:ext uri="{FF2B5EF4-FFF2-40B4-BE49-F238E27FC236}">
-                <a16:creationId xmlns:a16="http://schemas.microsoft.com/office/drawing/2014/main" id="{937BC82D-D0CC-4930-F364-399E26C4FFE0}"/>
-              </a:ext>
-            </a:extLst>
-          </p:cNvPr>
-          <p:cNvSpPr>
-            <a:spLocks noGrp="1" noRot="1" noMove="1" noResize="1" noEditPoints="1" noAdjustHandles="1" noChangeArrowheads="1" noChangeShapeType="1"/>
-          </p:cNvSpPr>
-          <p:nvPr/>
-        </p:nvSpPr>
-        <p:spPr>
-          <a:xfrm>
-            <a:off x="2694357" y="411480"/>
-            <a:ext cx="13949917" cy="816819"/>
-          </a:xfrm>
-          <a:prstGeom prst="rect">
-            <a:avLst/>
-          </a:prstGeom>
-          <a:noFill/>
-          <a:ln>
-            <a:noFill/>
-          </a:ln>
-        </p:spPr>
-        <p:style>
-          <a:lnRef idx="2">
-            <a:schemeClr val="accent1">
-              <a:shade val="15000"/>
-            </a:schemeClr>
-          </a:lnRef>
-          <a:fillRef idx="1">
-            <a:schemeClr val="accent1"/>
-          </a:fillRef>
-          <a:effectRef idx="0">
-            <a:schemeClr val="accent1"/>
-          </a:effectRef>
-          <a:fontRef idx="minor">
-            <a:schemeClr val="lt1"/>
-          </a:fontRef>
-        </p:style>
-        <p:txBody>
-          <a:bodyPr rtlCol="0" anchor="ctr"/>
-          <a:lstStyle/>
-          <a:p>
-            <a:pPr>
-              <a:lnSpc>
-                <a:spcPts val="3000"/>
-              </a:lnSpc>
-            </a:pPr>
-            <a:r>
-              <a:rPr lang="en-US" sz="3200" b="1" dirty="0">
-                <a:solidFill>
-                  <a:schemeClr val="tx1"/>
-                </a:solidFill>
-                <a:latin typeface="Segoe UI Variable Text" pitchFamily="2" charset="0"/>
-                <a:ea typeface="Segoe UI Black" panose="020B0A02040204020203" pitchFamily="34" charset="0"/>
-                <a:cs typeface="Segoe UI Semibold" panose="020B0702040204020203" pitchFamily="34" charset="0"/>
-              </a:rPr>
-              <a:t>Customer Behavior</a:t>
-            </a:r>
-          </a:p>
-          <a:p>
-            <a:pPr>
-              <a:lnSpc>
-                <a:spcPts val="3000"/>
-              </a:lnSpc>
-            </a:pPr>
-            <a:r>
-              <a:rPr lang="en-US" dirty="0">
-                <a:solidFill>
-                  <a:schemeClr val="tx1"/>
-                </a:solidFill>
-                <a:latin typeface="Segoe UI Variable Display Light" pitchFamily="2" charset="0"/>
-                <a:ea typeface="Segoe UI Black" panose="020B0A02040204020203" pitchFamily="34" charset="0"/>
-                <a:cs typeface="Segoe UI Semibold" panose="020B0702040204020203" pitchFamily="34" charset="0"/>
-              </a:rPr>
-              <a:t>Uncover key leakage points and understand what drives or hinders customer retention.</a:t>
-            </a:r>
-          </a:p>
-        </p:txBody>
-      </p:sp>
-      <p:sp>
-        <p:nvSpPr>
-          <p:cNvPr id="14" name="Rectangle 13" hidden="1">
-            <a:extLst>
-              <a:ext uri="{FF2B5EF4-FFF2-40B4-BE49-F238E27FC236}">
-                <a16:creationId xmlns:a16="http://schemas.microsoft.com/office/drawing/2014/main" id="{86D7049E-3B79-C7BA-E8F9-382DACC8F264}"/>
-              </a:ext>
-            </a:extLst>
-          </p:cNvPr>
-          <p:cNvSpPr>
-            <a:spLocks noGrp="1" noRot="1" noMove="1" noResize="1" noEditPoints="1" noAdjustHandles="1" noChangeArrowheads="1" noChangeShapeType="1"/>
-          </p:cNvSpPr>
-          <p:nvPr/>
-        </p:nvSpPr>
-        <p:spPr>
-          <a:xfrm>
-            <a:off x="217716" y="0"/>
-            <a:ext cx="417282" cy="9144000"/>
-          </a:xfrm>
-          <a:prstGeom prst="rect">
-            <a:avLst/>
-          </a:prstGeom>
-          <a:noFill/>
-          <a:ln>
-            <a:solidFill>
-              <a:schemeClr val="tx1"/>
-            </a:solidFill>
-          </a:ln>
-        </p:spPr>
-        <p:style>
-          <a:lnRef idx="2">
-            <a:schemeClr val="accent1">
-              <a:shade val="15000"/>
-            </a:schemeClr>
-          </a:lnRef>
-          <a:fillRef idx="1">
-            <a:schemeClr val="accent1"/>
-          </a:fillRef>
-          <a:effectRef idx="0">
-            <a:schemeClr val="accent1"/>
-          </a:effectRef>
-          <a:fontRef idx="minor">
-            <a:schemeClr val="lt1"/>
-          </a:fontRef>
-        </p:style>
-        <p:txBody>
-          <a:bodyPr rtlCol="0" anchor="ctr"/>
-          <a:lstStyle/>
-          <a:p>
-            <a:endParaRPr lang="en-US" sz="3200" b="1">
-              <a:solidFill>
-                <a:schemeClr val="tx1"/>
-              </a:solidFill>
-              <a:latin typeface="Segoe UI Variable Text" pitchFamily="2" charset="0"/>
-              <a:ea typeface="Segoe UI Black" panose="020B0A02040204020203" pitchFamily="34" charset="0"/>
-              <a:cs typeface="Segoe UI Semibold" panose="020B0702040204020203" pitchFamily="34" charset="0"/>
-            </a:endParaRPr>
-          </a:p>
-        </p:txBody>
-      </p:sp>
-      <p:sp>
-        <p:nvSpPr>
-          <p:cNvPr id="15" name="Rectangle 14" hidden="1">
-            <a:extLst>
-              <a:ext uri="{FF2B5EF4-FFF2-40B4-BE49-F238E27FC236}">
-                <a16:creationId xmlns:a16="http://schemas.microsoft.com/office/drawing/2014/main" id="{9CDDD758-5A56-6699-B927-CF7E196D1629}"/>
-              </a:ext>
-            </a:extLst>
-          </p:cNvPr>
-          <p:cNvSpPr>
-            <a:spLocks/>
-          </p:cNvSpPr>
-          <p:nvPr/>
-        </p:nvSpPr>
-        <p:spPr>
-          <a:xfrm>
-            <a:off x="16651518" y="0"/>
-            <a:ext cx="417282" cy="9144000"/>
-          </a:xfrm>
-          <a:prstGeom prst="rect">
-            <a:avLst/>
-          </a:prstGeom>
-          <a:solidFill>
-            <a:srgbClr val="C00000"/>
-          </a:solidFill>
-          <a:ln>
-            <a:solidFill>
-              <a:schemeClr val="tx1"/>
-            </a:solidFill>
-          </a:ln>
-        </p:spPr>
-        <p:style>
-          <a:lnRef idx="2">
-            <a:schemeClr val="accent1">
-              <a:shade val="15000"/>
-            </a:schemeClr>
-          </a:lnRef>
-          <a:fillRef idx="1">
-            <a:schemeClr val="accent1"/>
-          </a:fillRef>
-          <a:effectRef idx="0">
-            <a:schemeClr val="accent1"/>
-          </a:effectRef>
-          <a:fontRef idx="minor">
-            <a:schemeClr val="lt1"/>
-          </a:fontRef>
-        </p:style>
-        <p:txBody>
-          <a:bodyPr rtlCol="0" anchor="ctr"/>
-          <a:lstStyle/>
-          <a:p>
-            <a:endParaRPr lang="en-US" sz="3200" b="1">
-              <a:solidFill>
-                <a:schemeClr val="tx1"/>
-              </a:solidFill>
-              <a:latin typeface="Segoe UI Variable Text" pitchFamily="2" charset="0"/>
-              <a:ea typeface="Segoe UI Black" panose="020B0A02040204020203" pitchFamily="34" charset="0"/>
-              <a:cs typeface="Segoe UI Semibold" panose="020B0702040204020203" pitchFamily="34" charset="0"/>
-            </a:endParaRPr>
-          </a:p>
-        </p:txBody>
-      </p:sp>
-      <p:sp>
-        <p:nvSpPr>
-          <p:cNvPr id="17" name="Rectangle 16" hidden="1">
-            <a:extLst>
-              <a:ext uri="{FF2B5EF4-FFF2-40B4-BE49-F238E27FC236}">
-                <a16:creationId xmlns:a16="http://schemas.microsoft.com/office/drawing/2014/main" id="{3376EE80-42B9-1517-72B9-53460F118D09}"/>
-              </a:ext>
-            </a:extLst>
-          </p:cNvPr>
-          <p:cNvSpPr>
-            <a:spLocks/>
-          </p:cNvSpPr>
-          <p:nvPr/>
-        </p:nvSpPr>
-        <p:spPr>
-          <a:xfrm>
-            <a:off x="2269839" y="0"/>
-            <a:ext cx="417282" cy="9144000"/>
-          </a:xfrm>
-          <a:prstGeom prst="rect">
-            <a:avLst/>
-          </a:prstGeom>
-          <a:solidFill>
-            <a:srgbClr val="C00000"/>
-          </a:solidFill>
-          <a:ln>
-            <a:solidFill>
-              <a:schemeClr val="tx1"/>
-            </a:solidFill>
-          </a:ln>
-        </p:spPr>
-        <p:style>
-          <a:lnRef idx="2">
-            <a:schemeClr val="accent1">
-              <a:shade val="15000"/>
-            </a:schemeClr>
-          </a:lnRef>
-          <a:fillRef idx="1">
-            <a:schemeClr val="accent1"/>
-          </a:fillRef>
-          <a:effectRef idx="0">
-            <a:schemeClr val="accent1"/>
-          </a:effectRef>
-          <a:fontRef idx="minor">
-            <a:schemeClr val="lt1"/>
-          </a:fontRef>
-        </p:style>
-        <p:txBody>
-          <a:bodyPr rtlCol="0" anchor="ctr"/>
-          <a:lstStyle/>
-          <a:p>
-            <a:endParaRPr lang="en-US" sz="3200" b="1">
-              <a:solidFill>
-                <a:schemeClr val="tx1"/>
-              </a:solidFill>
-              <a:latin typeface="Segoe UI Variable Text" pitchFamily="2" charset="0"/>
-              <a:ea typeface="Segoe UI Black" panose="020B0A02040204020203" pitchFamily="34" charset="0"/>
-              <a:cs typeface="Segoe UI Semibold" panose="020B0702040204020203" pitchFamily="34" charset="0"/>
-            </a:endParaRPr>
-          </a:p>
-        </p:txBody>
-      </p:sp>
-      <p:sp>
-        <p:nvSpPr>
-          <p:cNvPr id="19" name="Rectangle 18" hidden="1">
-            <a:extLst>
-              <a:ext uri="{FF2B5EF4-FFF2-40B4-BE49-F238E27FC236}">
-                <a16:creationId xmlns:a16="http://schemas.microsoft.com/office/drawing/2014/main" id="{69881069-E237-BC47-72E9-93BA4C8CF930}"/>
-              </a:ext>
-            </a:extLst>
-          </p:cNvPr>
-          <p:cNvSpPr>
-            <a:spLocks/>
-          </p:cNvSpPr>
-          <p:nvPr/>
-        </p:nvSpPr>
-        <p:spPr>
-          <a:xfrm>
-            <a:off x="9491011" y="0"/>
-            <a:ext cx="356616" cy="9144000"/>
-          </a:xfrm>
-          <a:prstGeom prst="rect">
-            <a:avLst/>
-          </a:prstGeom>
-          <a:solidFill>
-            <a:srgbClr val="C00000"/>
-          </a:solidFill>
-          <a:ln>
-            <a:solidFill>
-              <a:schemeClr val="tx1"/>
-            </a:solidFill>
-          </a:ln>
-        </p:spPr>
-        <p:style>
-          <a:lnRef idx="2">
-            <a:schemeClr val="accent1">
-              <a:shade val="15000"/>
-            </a:schemeClr>
-          </a:lnRef>
-          <a:fillRef idx="1">
-            <a:schemeClr val="accent1"/>
-          </a:fillRef>
-          <a:effectRef idx="0">
-            <a:schemeClr val="accent1"/>
-          </a:effectRef>
-          <a:fontRef idx="minor">
-            <a:schemeClr val="lt1"/>
-          </a:fontRef>
-        </p:style>
-        <p:txBody>
-          <a:bodyPr rtlCol="0" anchor="ctr"/>
-          <a:lstStyle/>
-          <a:p>
-            <a:endParaRPr lang="en-US" sz="3200" b="1">
-              <a:solidFill>
-                <a:schemeClr val="tx1"/>
-              </a:solidFill>
-              <a:latin typeface="Segoe UI Variable Text" pitchFamily="2" charset="0"/>
-              <a:ea typeface="Segoe UI Black" panose="020B0A02040204020203" pitchFamily="34" charset="0"/>
-              <a:cs typeface="Segoe UI Semibold" panose="020B0702040204020203" pitchFamily="34" charset="0"/>
-            </a:endParaRPr>
-          </a:p>
-        </p:txBody>
-      </p:sp>
-      <p:sp>
-        <p:nvSpPr>
-          <p:cNvPr id="20" name="Rectangle 19" hidden="1">
-            <a:extLst>
-              <a:ext uri="{FF2B5EF4-FFF2-40B4-BE49-F238E27FC236}">
-                <a16:creationId xmlns:a16="http://schemas.microsoft.com/office/drawing/2014/main" id="{DEF75066-F27B-E021-7331-A0476486C15D}"/>
-              </a:ext>
-            </a:extLst>
-          </p:cNvPr>
-          <p:cNvSpPr>
-            <a:spLocks/>
-          </p:cNvSpPr>
-          <p:nvPr/>
-        </p:nvSpPr>
-        <p:spPr>
-          <a:xfrm>
-            <a:off x="2687120" y="4902200"/>
-            <a:ext cx="13964397" cy="352188"/>
-          </a:xfrm>
-          <a:prstGeom prst="rect">
-            <a:avLst/>
-          </a:prstGeom>
-          <a:solidFill>
-            <a:srgbClr val="C00000"/>
-          </a:solidFill>
-          <a:ln>
-            <a:solidFill>
-              <a:schemeClr val="tx1"/>
-            </a:solidFill>
-          </a:ln>
-        </p:spPr>
-        <p:style>
-          <a:lnRef idx="2">
-            <a:schemeClr val="accent1">
-              <a:shade val="15000"/>
-            </a:schemeClr>
-          </a:lnRef>
-          <a:fillRef idx="1">
-            <a:schemeClr val="accent1"/>
-          </a:fillRef>
-          <a:effectRef idx="0">
-            <a:schemeClr val="accent1"/>
-          </a:effectRef>
-          <a:fontRef idx="minor">
-            <a:schemeClr val="lt1"/>
-          </a:fontRef>
-        </p:style>
-        <p:txBody>
-          <a:bodyPr rtlCol="0" anchor="ctr"/>
-          <a:lstStyle/>
-          <a:p>
-            <a:endParaRPr lang="en-US" sz="3200" b="1" dirty="0">
-              <a:solidFill>
-                <a:schemeClr val="tx1"/>
-              </a:solidFill>
-              <a:latin typeface="Segoe UI Variable Text" pitchFamily="2" charset="0"/>
-              <a:ea typeface="Segoe UI Black" panose="020B0A02040204020203" pitchFamily="34" charset="0"/>
-              <a:cs typeface="Segoe UI Semibold" panose="020B0702040204020203" pitchFamily="34" charset="0"/>
-            </a:endParaRPr>
-          </a:p>
-        </p:txBody>
-      </p:sp>
-      <p:pic>
-        <p:nvPicPr>
-          <p:cNvPr id="24" name="Picture 23" hidden="1">
-            <a:extLst>
-              <a:ext uri="{FF2B5EF4-FFF2-40B4-BE49-F238E27FC236}">
-                <a16:creationId xmlns:a16="http://schemas.microsoft.com/office/drawing/2014/main" id="{A9DE2416-A5E5-C1F1-38C6-AAAFFF966EE8}"/>
-              </a:ext>
-            </a:extLst>
-          </p:cNvPr>
-          <p:cNvPicPr>
-            <a:picLocks noChangeAspect="1"/>
-          </p:cNvPicPr>
-          <p:nvPr/>
-        </p:nvPicPr>
-        <p:blipFill>
-          <a:blip r:embed="rId2"/>
-          <a:stretch>
-            <a:fillRect/>
-          </a:stretch>
-        </p:blipFill>
-        <p:spPr>
-          <a:xfrm>
-            <a:off x="2694357" y="1393035"/>
-            <a:ext cx="6803889" cy="3845169"/>
-          </a:xfrm>
-          <a:prstGeom prst="rect">
-            <a:avLst/>
-          </a:prstGeom>
-        </p:spPr>
-      </p:pic>
-      <p:pic>
-        <p:nvPicPr>
-          <p:cNvPr id="26" name="Picture 25" hidden="1">
-            <a:extLst>
-              <a:ext uri="{FF2B5EF4-FFF2-40B4-BE49-F238E27FC236}">
-                <a16:creationId xmlns:a16="http://schemas.microsoft.com/office/drawing/2014/main" id="{D719C3C0-F62A-D7E8-E9D3-962ADA4F96A8}"/>
-              </a:ext>
-            </a:extLst>
-          </p:cNvPr>
-          <p:cNvPicPr>
-            <a:picLocks noChangeAspect="1"/>
-          </p:cNvPicPr>
-          <p:nvPr/>
-        </p:nvPicPr>
-        <p:blipFill>
-          <a:blip r:embed="rId3"/>
-          <a:stretch>
-            <a:fillRect/>
-          </a:stretch>
-        </p:blipFill>
-        <p:spPr>
-          <a:xfrm>
-            <a:off x="9854862" y="1393035"/>
-            <a:ext cx="6796655" cy="7339484"/>
-          </a:xfrm>
-          <a:prstGeom prst="rect">
-            <a:avLst/>
-          </a:prstGeom>
-        </p:spPr>
-      </p:pic>
-      <p:pic>
-        <p:nvPicPr>
-          <p:cNvPr id="28" name="Picture 27" hidden="1">
-            <a:extLst>
-              <a:ext uri="{FF2B5EF4-FFF2-40B4-BE49-F238E27FC236}">
-                <a16:creationId xmlns:a16="http://schemas.microsoft.com/office/drawing/2014/main" id="{E39E14BF-EB3C-BE1B-897B-40CC31673E12}"/>
-              </a:ext>
-            </a:extLst>
-          </p:cNvPr>
-          <p:cNvPicPr>
-            <a:picLocks noChangeAspect="1"/>
-          </p:cNvPicPr>
-          <p:nvPr/>
-        </p:nvPicPr>
-        <p:blipFill>
-          <a:blip r:embed="rId4"/>
-          <a:stretch>
-            <a:fillRect/>
-          </a:stretch>
-        </p:blipFill>
-        <p:spPr>
-          <a:xfrm>
-            <a:off x="2694357" y="5572561"/>
-            <a:ext cx="6803887" cy="3159957"/>
-          </a:xfrm>
-          <a:prstGeom prst="rect">
-            <a:avLst/>
-          </a:prstGeom>
-        </p:spPr>
-      </p:pic>
-      <p:sp>
-        <p:nvSpPr>
-          <p:cNvPr id="3" name="Rectangle: Top Corners Rounded 2">
-            <a:extLst>
-              <a:ext uri="{FF2B5EF4-FFF2-40B4-BE49-F238E27FC236}">
-                <a16:creationId xmlns:a16="http://schemas.microsoft.com/office/drawing/2014/main" id="{64CD3283-EBC8-A8A8-F7D2-A5A72EB53258}"/>
-              </a:ext>
-            </a:extLst>
-          </p:cNvPr>
-          <p:cNvSpPr/>
-          <p:nvPr/>
-        </p:nvSpPr>
-        <p:spPr>
-          <a:xfrm rot="5400000">
-            <a:off x="-3430417" y="3420759"/>
-            <a:ext cx="9144000" cy="2302482"/>
-          </a:xfrm>
-          <a:prstGeom prst="round2SameRect">
-            <a:avLst>
-              <a:gd name="adj1" fmla="val 0"/>
-              <a:gd name="adj2" fmla="val 0"/>
-            </a:avLst>
-          </a:prstGeom>
-          <a:solidFill>
-            <a:srgbClr val="B2292E"/>
-          </a:solidFill>
-          <a:ln>
-            <a:noFill/>
-          </a:ln>
-        </p:spPr>
-        <p:style>
-          <a:lnRef idx="2">
-            <a:schemeClr val="accent1">
-              <a:shade val="15000"/>
-            </a:schemeClr>
-          </a:lnRef>
-          <a:fillRef idx="1">
-            <a:schemeClr val="accent1"/>
-          </a:fillRef>
-          <a:effectRef idx="0">
-            <a:schemeClr val="accent1"/>
-          </a:effectRef>
-          <a:fontRef idx="minor">
-            <a:schemeClr val="lt1"/>
-          </a:fontRef>
-        </p:style>
-        <p:txBody>
-          <a:bodyPr rtlCol="0" anchor="ctr"/>
-          <a:lstStyle/>
-          <a:p>
-            <a:pPr algn="ctr"/>
-            <a:endParaRPr lang="en-US" dirty="0"/>
-          </a:p>
-        </p:txBody>
-      </p:sp>
-      <p:sp>
-        <p:nvSpPr>
-          <p:cNvPr id="2" name="Rectangle: Rounded Corners 1">
-            <a:extLst>
-              <a:ext uri="{FF2B5EF4-FFF2-40B4-BE49-F238E27FC236}">
-                <a16:creationId xmlns:a16="http://schemas.microsoft.com/office/drawing/2014/main" id="{881DD4F1-C2ED-BCCF-358B-D00C5FDCA7FA}"/>
-              </a:ext>
-            </a:extLst>
-          </p:cNvPr>
-          <p:cNvSpPr/>
-          <p:nvPr/>
-        </p:nvSpPr>
-        <p:spPr>
-          <a:xfrm>
-            <a:off x="9266132" y="4842933"/>
-            <a:ext cx="7682946" cy="3889586"/>
-          </a:xfrm>
-          <a:prstGeom prst="roundRect">
-            <a:avLst>
-              <a:gd name="adj" fmla="val 3896"/>
-            </a:avLst>
-          </a:prstGeom>
-          <a:solidFill>
-            <a:schemeClr val="bg1"/>
-          </a:solidFill>
-          <a:ln>
-            <a:noFill/>
-          </a:ln>
-          <a:effectLst>
-            <a:outerShdw blurRad="50800" dist="50800" dir="5400000" sx="102000" sy="102000" algn="ctr" rotWithShape="0">
-              <a:srgbClr val="000000">
-                <a:alpha val="10000"/>
-              </a:srgbClr>
-            </a:outerShdw>
-          </a:effectLst>
-        </p:spPr>
-        <p:style>
-          <a:lnRef idx="2">
-            <a:schemeClr val="accent1">
-              <a:shade val="15000"/>
-            </a:schemeClr>
-          </a:lnRef>
-          <a:fillRef idx="1">
-            <a:schemeClr val="accent1"/>
-          </a:fillRef>
-          <a:effectRef idx="0">
-            <a:schemeClr val="accent1"/>
-          </a:effectRef>
-          <a:fontRef idx="minor">
-            <a:schemeClr val="lt1"/>
-          </a:fontRef>
-        </p:style>
-        <p:txBody>
-          <a:bodyPr rtlCol="0" anchor="ctr"/>
-          <a:lstStyle/>
-          <a:p>
-            <a:endParaRPr lang="en-US" sz="3200" b="1">
-              <a:solidFill>
-                <a:schemeClr val="tx1"/>
-              </a:solidFill>
-              <a:latin typeface="Segoe UI Variable Text" pitchFamily="2" charset="0"/>
-              <a:ea typeface="Segoe UI Black" panose="020B0A02040204020203" pitchFamily="34" charset="0"/>
-              <a:cs typeface="Segoe UI Semibold" panose="020B0702040204020203" pitchFamily="34" charset="0"/>
-            </a:endParaRPr>
-          </a:p>
-        </p:txBody>
-      </p:sp>
-    </p:spTree>
-    <p:extLst>
-      <p:ext uri="{BB962C8B-B14F-4D97-AF65-F5344CB8AC3E}">
-        <p14:creationId xmlns:p14="http://schemas.microsoft.com/office/powerpoint/2010/main" val="1921429586"/>
       </p:ext>
     </p:extLst>
   </p:cSld>

--- a/Power BI Report/Background/Dashboard Layout.pptx
+++ b/Power BI Report/Background/Dashboard Layout.pptx
@@ -249,7 +249,7 @@
           <a:p>
             <a:fld id="{7A2C6692-EA0D-4861-862E-DDC209ABBD47}" type="datetimeFigureOut">
               <a:rPr lang="en-US" smtClean="0"/>
-              <a:t>12/12/2025</a:t>
+              <a:t>1/17/2026</a:t>
             </a:fld>
             <a:endParaRPr lang="en-US"/>
           </a:p>
@@ -419,7 +419,7 @@
           <a:p>
             <a:fld id="{7A2C6692-EA0D-4861-862E-DDC209ABBD47}" type="datetimeFigureOut">
               <a:rPr lang="en-US" smtClean="0"/>
-              <a:t>12/12/2025</a:t>
+              <a:t>1/17/2026</a:t>
             </a:fld>
             <a:endParaRPr lang="en-US"/>
           </a:p>
@@ -599,7 +599,7 @@
           <a:p>
             <a:fld id="{7A2C6692-EA0D-4861-862E-DDC209ABBD47}" type="datetimeFigureOut">
               <a:rPr lang="en-US" smtClean="0"/>
-              <a:t>12/12/2025</a:t>
+              <a:t>1/17/2026</a:t>
             </a:fld>
             <a:endParaRPr lang="en-US"/>
           </a:p>
@@ -769,7 +769,7 @@
           <a:p>
             <a:fld id="{7A2C6692-EA0D-4861-862E-DDC209ABBD47}" type="datetimeFigureOut">
               <a:rPr lang="en-US" smtClean="0"/>
-              <a:t>12/12/2025</a:t>
+              <a:t>1/17/2026</a:t>
             </a:fld>
             <a:endParaRPr lang="en-US"/>
           </a:p>
@@ -1015,7 +1015,7 @@
           <a:p>
             <a:fld id="{7A2C6692-EA0D-4861-862E-DDC209ABBD47}" type="datetimeFigureOut">
               <a:rPr lang="en-US" smtClean="0"/>
-              <a:t>12/12/2025</a:t>
+              <a:t>1/17/2026</a:t>
             </a:fld>
             <a:endParaRPr lang="en-US"/>
           </a:p>
@@ -1247,7 +1247,7 @@
           <a:p>
             <a:fld id="{7A2C6692-EA0D-4861-862E-DDC209ABBD47}" type="datetimeFigureOut">
               <a:rPr lang="en-US" smtClean="0"/>
-              <a:t>12/12/2025</a:t>
+              <a:t>1/17/2026</a:t>
             </a:fld>
             <a:endParaRPr lang="en-US"/>
           </a:p>
@@ -1614,7 +1614,7 @@
           <a:p>
             <a:fld id="{7A2C6692-EA0D-4861-862E-DDC209ABBD47}" type="datetimeFigureOut">
               <a:rPr lang="en-US" smtClean="0"/>
-              <a:t>12/12/2025</a:t>
+              <a:t>1/17/2026</a:t>
             </a:fld>
             <a:endParaRPr lang="en-US"/>
           </a:p>
@@ -1732,7 +1732,7 @@
           <a:p>
             <a:fld id="{7A2C6692-EA0D-4861-862E-DDC209ABBD47}" type="datetimeFigureOut">
               <a:rPr lang="en-US" smtClean="0"/>
-              <a:t>12/12/2025</a:t>
+              <a:t>1/17/2026</a:t>
             </a:fld>
             <a:endParaRPr lang="en-US"/>
           </a:p>
@@ -1827,7 +1827,7 @@
           <a:p>
             <a:fld id="{7A2C6692-EA0D-4861-862E-DDC209ABBD47}" type="datetimeFigureOut">
               <a:rPr lang="en-US" smtClean="0"/>
-              <a:t>12/12/2025</a:t>
+              <a:t>1/17/2026</a:t>
             </a:fld>
             <a:endParaRPr lang="en-US"/>
           </a:p>
@@ -2104,7 +2104,7 @@
           <a:p>
             <a:fld id="{7A2C6692-EA0D-4861-862E-DDC209ABBD47}" type="datetimeFigureOut">
               <a:rPr lang="en-US" smtClean="0"/>
-              <a:t>12/12/2025</a:t>
+              <a:t>1/17/2026</a:t>
             </a:fld>
             <a:endParaRPr lang="en-US"/>
           </a:p>
@@ -2361,7 +2361,7 @@
           <a:p>
             <a:fld id="{7A2C6692-EA0D-4861-862E-DDC209ABBD47}" type="datetimeFigureOut">
               <a:rPr lang="en-US" smtClean="0"/>
-              <a:t>12/12/2025</a:t>
+              <a:t>1/17/2026</a:t>
             </a:fld>
             <a:endParaRPr lang="en-US"/>
           </a:p>
@@ -2574,7 +2574,7 @@
           <a:p>
             <a:fld id="{7A2C6692-EA0D-4861-862E-DDC209ABBD47}" type="datetimeFigureOut">
               <a:rPr lang="en-US" smtClean="0"/>
-              <a:t>12/12/2025</a:t>
+              <a:t>1/17/2026</a:t>
             </a:fld>
             <a:endParaRPr lang="en-US"/>
           </a:p>
@@ -3834,7 +3834,7 @@
         <p:spPr>
           <a:xfrm>
             <a:off x="2694357" y="1393038"/>
-            <a:ext cx="6170243" cy="3111230"/>
+            <a:ext cx="5814643" cy="3111230"/>
           </a:xfrm>
           <a:prstGeom prst="roundRect">
             <a:avLst>
@@ -3901,7 +3901,7 @@
         <p:spPr>
           <a:xfrm>
             <a:off x="2694357" y="4842933"/>
-            <a:ext cx="6170243" cy="3889586"/>
+            <a:ext cx="5814643" cy="3889586"/>
           </a:xfrm>
           <a:prstGeom prst="roundRect">
             <a:avLst>
@@ -3967,8 +3967,8 @@
         </p:nvSpPr>
         <p:spPr>
           <a:xfrm>
-            <a:off x="9266132" y="1393038"/>
-            <a:ext cx="7705938" cy="3111229"/>
+            <a:off x="13068300" y="1393038"/>
+            <a:ext cx="3903770" cy="3111229"/>
           </a:xfrm>
           <a:prstGeom prst="roundRect">
             <a:avLst>
@@ -4081,7 +4081,7 @@
                 <a:ea typeface="Segoe UI Black" panose="020B0A02040204020203" pitchFamily="34" charset="0"/>
                 <a:cs typeface="Segoe UI Semibold" panose="020B0702040204020203" pitchFamily="34" charset="0"/>
               </a:rPr>
-              <a:t>Customer Behavior Analysis</a:t>
+              <a:t>Customer Behavior</a:t>
             </a:r>
           </a:p>
           <a:p>
@@ -4571,12 +4571,79 @@
         </p:nvSpPr>
         <p:spPr>
           <a:xfrm>
-            <a:off x="9266132" y="4842933"/>
-            <a:ext cx="7682946" cy="3889586"/>
+            <a:off x="8864602" y="4842933"/>
+            <a:ext cx="8084476" cy="3889586"/>
           </a:xfrm>
           <a:prstGeom prst="roundRect">
             <a:avLst>
               <a:gd name="adj" fmla="val 3896"/>
+            </a:avLst>
+          </a:prstGeom>
+          <a:solidFill>
+            <a:schemeClr val="bg1"/>
+          </a:solidFill>
+          <a:ln>
+            <a:noFill/>
+          </a:ln>
+          <a:effectLst>
+            <a:outerShdw blurRad="50800" dist="50800" dir="5400000" sx="102000" sy="102000" algn="ctr" rotWithShape="0">
+              <a:srgbClr val="000000">
+                <a:alpha val="10000"/>
+              </a:srgbClr>
+            </a:outerShdw>
+          </a:effectLst>
+        </p:spPr>
+        <p:style>
+          <a:lnRef idx="2">
+            <a:schemeClr val="accent1">
+              <a:shade val="15000"/>
+            </a:schemeClr>
+          </a:lnRef>
+          <a:fillRef idx="1">
+            <a:schemeClr val="accent1"/>
+          </a:fillRef>
+          <a:effectRef idx="0">
+            <a:schemeClr val="accent1"/>
+          </a:effectRef>
+          <a:fontRef idx="minor">
+            <a:schemeClr val="lt1"/>
+          </a:fontRef>
+        </p:style>
+        <p:txBody>
+          <a:bodyPr rtlCol="0" anchor="ctr"/>
+          <a:lstStyle/>
+          <a:p>
+            <a:endParaRPr lang="en-US" sz="3200" b="1">
+              <a:solidFill>
+                <a:schemeClr val="tx1"/>
+              </a:solidFill>
+              <a:latin typeface="Segoe UI Variable Text" pitchFamily="2" charset="0"/>
+              <a:ea typeface="Segoe UI Black" panose="020B0A02040204020203" pitchFamily="34" charset="0"/>
+              <a:cs typeface="Segoe UI Semibold" panose="020B0702040204020203" pitchFamily="34" charset="0"/>
+            </a:endParaRPr>
+          </a:p>
+        </p:txBody>
+      </p:sp>
+      <p:sp>
+        <p:nvSpPr>
+          <p:cNvPr id="6" name="Rectangle: Rounded Corners 5">
+            <a:extLst>
+              <a:ext uri="{FF2B5EF4-FFF2-40B4-BE49-F238E27FC236}">
+                <a16:creationId xmlns:a16="http://schemas.microsoft.com/office/drawing/2014/main" id="{E4734A21-DCDB-AA45-A272-AF579B580080}"/>
+              </a:ext>
+            </a:extLst>
+          </p:cNvPr>
+          <p:cNvSpPr/>
+          <p:nvPr/>
+        </p:nvSpPr>
+        <p:spPr>
+          <a:xfrm>
+            <a:off x="8836765" y="1393037"/>
+            <a:ext cx="3903770" cy="3111229"/>
+          </a:xfrm>
+          <a:prstGeom prst="roundRect">
+            <a:avLst>
+              <a:gd name="adj" fmla="val 4620"/>
             </a:avLst>
           </a:prstGeom>
           <a:solidFill>
